--- a/lessons/day2-finance/C_Day2_Finance_SPA_Build.pptx
+++ b/lessons/day2-finance/C_Day2_Finance_SPA_Build.pptx
@@ -4,6 +4,9 @@
   <p:sldMasterIdLst>
     <p:sldMasterId id="2147483648" r:id="rId1"/>
   </p:sldMasterIdLst>
+  <p:notesMasterIdLst>
+    <p:notesMasterId r:id="rId23"/>
+  </p:notesMasterIdLst>
   <p:sldIdLst>
     <p:sldId id="256" r:id="rId2"/>
     <p:sldId id="257" r:id="rId3"/>
@@ -27,9 +30,6 @@
     <p:sldId id="275" r:id="rId21"/>
     <p:sldId id="276" r:id="rId22"/>
   </p:sldIdLst>
-  <p:notesMasterIdLst>
-    <p:notesMasterId r:id="rId23"/>
-  </p:notesMasterIdLst>
   <p:sldSz cx="12192000" cy="6858000"/>
   <p:notesSz cx="6858000" cy="12192000"/>
   <p:defaultTextStyle>
@@ -124,6 +124,11 @@
       </a:defRPr>
     </a:lvl9pPr>
   </p:defaultTextStyle>
+  <p:extLst>
+    <p:ext uri="{EFAFB233-063F-42B5-8137-9DF3F51BA10A}">
+      <p15:sldGuideLst xmlns:p15="http://schemas.microsoft.com/office/powerpoint/2012/main"/>
+    </p:ext>
+  </p:extLst>
 </p:presentation>
 </file>
 
@@ -149,234 +154,10 @@
           <a:chExt cx="0" cy="0"/>
         </a:xfrm>
       </p:grpSpPr>
-      <p:sp>
-        <p:nvSpPr>
-          <p:cNvPr id="2" name="Header Placeholder 1"/>
-          <p:cNvSpPr>
-            <a:spLocks noGrp="1"/>
-          </p:cNvSpPr>
-          <p:nvPr>
-            <p:ph type="hdr" sz="quarter"/>
-          </p:nvPr>
-        </p:nvSpPr>
-        <p:spPr>
-          <a:xfrm>
-            <a:off x="0" y="0"/>
-            <a:ext cx="2971800" cy="458788"/>
-          </a:xfrm>
-          <a:prstGeom prst="rect">
-            <a:avLst/>
-          </a:prstGeom>
-        </p:spPr>
-        <p:txBody>
-          <a:bodyPr vert="horz" lIns="91440" tIns="45720" rIns="91440" bIns="45720" rtlCol="0"/>
-          <a:lstStyle>
-            <a:lvl1pPr algn="l">
-              <a:defRPr sz="1200"/>
-            </a:lvl1pPr>
-          </a:lstStyle>
-          <a:p>
-            <a:endParaRPr lang="en-US"/>
-          </a:p>
-        </p:txBody>
-      </p:sp>
-      <p:sp>
-        <p:nvSpPr>
-          <p:cNvPr id="3" name="Date Placeholder 2"/>
-          <p:cNvSpPr>
-            <a:spLocks noGrp="1"/>
-          </p:cNvSpPr>
-          <p:nvPr>
-            <p:ph type="dt" idx="1"/>
-          </p:nvPr>
-        </p:nvSpPr>
-        <p:spPr>
-          <a:xfrm>
-            <a:off x="3884613" y="0"/>
-            <a:ext cx="2971800" cy="458788"/>
-          </a:xfrm>
-          <a:prstGeom prst="rect">
-            <a:avLst/>
-          </a:prstGeom>
-        </p:spPr>
-        <p:txBody>
-          <a:bodyPr vert="horz" lIns="91440" tIns="45720" rIns="91440" bIns="45720" rtlCol="0"/>
-          <a:lstStyle>
-            <a:lvl1pPr algn="r">
-              <a:defRPr sz="1200"/>
-            </a:lvl1pPr>
-          </a:lstStyle>
-          <a:p>
-            <a:fld id="{5282F153-3F37-0F45-9E97-73ACFA13230C}" type="datetimeFigureOut">
-              <a:rPr lang="en-US"/>
-              <a:t>7/23/19</a:t>
-            </a:fld>
-            <a:endParaRPr lang="en-US"/>
-          </a:p>
-        </p:txBody>
-      </p:sp>
-      <p:sp>
-        <p:nvSpPr>
-          <p:cNvPr id="4" name="Slide Image Placeholder 3"/>
-          <p:cNvSpPr>
-            <a:spLocks noGrp="1" noRot="1" noChangeAspect="1"/>
-          </p:cNvSpPr>
-          <p:nvPr>
-            <p:ph type="sldImg" idx="2"/>
-          </p:nvPr>
-        </p:nvSpPr>
-        <p:spPr>
-          <a:xfrm>
-            <a:off x="685800" y="1143000"/>
-            <a:ext cx="5486400" cy="3086100"/>
-          </a:xfrm>
-          <a:prstGeom prst="rect">
-            <a:avLst/>
-          </a:prstGeom>
-          <a:noFill/>
-          <a:ln w="12700">
-            <a:solidFill>
-              <a:prstClr val="black"/>
-            </a:solidFill>
-          </a:ln>
-        </p:spPr>
-        <p:txBody>
-          <a:bodyPr vert="horz" lIns="91440" tIns="45720" rIns="91440" bIns="45720" rtlCol="0" anchor="ctr"/>
-          <a:lstStyle/>
-          <a:p>
-            <a:endParaRPr lang="en-US"/>
-          </a:p>
-        </p:txBody>
-      </p:sp>
-      <p:sp>
-        <p:nvSpPr>
-          <p:cNvPr id="5" name="Notes Placeholder 4"/>
-          <p:cNvSpPr>
-            <a:spLocks noGrp="1"/>
-          </p:cNvSpPr>
-          <p:nvPr>
-            <p:ph type="body" sz="quarter" idx="3"/>
-          </p:nvPr>
-        </p:nvSpPr>
-        <p:spPr>
-          <a:xfrm>
-            <a:off x="685800" y="4400550"/>
-            <a:ext cx="5486400" cy="3600450"/>
-          </a:xfrm>
-          <a:prstGeom prst="rect">
-            <a:avLst/>
-          </a:prstGeom>
-        </p:spPr>
-        <p:txBody>
-          <a:bodyPr vert="horz" lIns="91440" tIns="45720" rIns="91440" bIns="45720" rtlCol="0"/>
-          <a:lstStyle/>
-          <a:p>
-            <a:pPr lvl="0"/>
-            <a:r>
-              <a:rPr lang="en-US"/>
-              <a:t>Click to edit Master text styles</a:t>
-            </a:r>
-          </a:p>
-          <a:p>
-            <a:pPr lvl="1"/>
-            <a:r>
-              <a:rPr lang="en-US"/>
-              <a:t>Second level</a:t>
-            </a:r>
-          </a:p>
-          <a:p>
-            <a:pPr lvl="2"/>
-            <a:r>
-              <a:rPr lang="en-US"/>
-              <a:t>Third level</a:t>
-            </a:r>
-          </a:p>
-          <a:p>
-            <a:pPr lvl="3"/>
-            <a:r>
-              <a:rPr lang="en-US"/>
-              <a:t>Fourth level</a:t>
-            </a:r>
-          </a:p>
-          <a:p>
-            <a:pPr lvl="4"/>
-            <a:r>
-              <a:rPr lang="en-US"/>
-              <a:t>Fifth level</a:t>
-            </a:r>
-          </a:p>
-        </p:txBody>
-      </p:sp>
-      <p:sp>
-        <p:nvSpPr>
-          <p:cNvPr id="6" name="Footer Placeholder 5"/>
-          <p:cNvSpPr>
-            <a:spLocks noGrp="1"/>
-          </p:cNvSpPr>
-          <p:nvPr>
-            <p:ph type="ftr" sz="quarter" idx="4"/>
-          </p:nvPr>
-        </p:nvSpPr>
-        <p:spPr>
-          <a:xfrm>
-            <a:off x="0" y="8685213"/>
-            <a:ext cx="2971800" cy="458787"/>
-          </a:xfrm>
-          <a:prstGeom prst="rect">
-            <a:avLst/>
-          </a:prstGeom>
-        </p:spPr>
-        <p:txBody>
-          <a:bodyPr vert="horz" lIns="91440" tIns="45720" rIns="91440" bIns="45720" rtlCol="0" anchor="b"/>
-          <a:lstStyle>
-            <a:lvl1pPr algn="l">
-              <a:defRPr sz="1200"/>
-            </a:lvl1pPr>
-          </a:lstStyle>
-          <a:p>
-            <a:endParaRPr lang="en-US"/>
-          </a:p>
-        </p:txBody>
-      </p:sp>
-      <p:sp>
-        <p:nvSpPr>
-          <p:cNvPr id="7" name="Slide Number Placeholder 6"/>
-          <p:cNvSpPr>
-            <a:spLocks noGrp="1"/>
-          </p:cNvSpPr>
-          <p:nvPr>
-            <p:ph type="sldNum" sz="quarter" idx="5"/>
-          </p:nvPr>
-        </p:nvSpPr>
-        <p:spPr>
-          <a:xfrm>
-            <a:off x="3884613" y="8685213"/>
-            <a:ext cx="2971800" cy="458787"/>
-          </a:xfrm>
-          <a:prstGeom prst="rect">
-            <a:avLst/>
-          </a:prstGeom>
-        </p:spPr>
-        <p:txBody>
-          <a:bodyPr vert="horz" lIns="91440" tIns="45720" rIns="91440" bIns="45720" rtlCol="0" anchor="b"/>
-          <a:lstStyle>
-            <a:lvl1pPr algn="r">
-              <a:defRPr sz="1200"/>
-            </a:lvl1pPr>
-          </a:lstStyle>
-          <a:p>
-            <a:fld id="{CE5E9CC1-C706-0F49-92D6-E571CC5EEA8F}" type="slidenum">
-              <a:rPr lang="en-US"/>
-              <a:t>‹#›</a:t>
-            </a:fld>
-            <a:endParaRPr lang="en-US"/>
-          </a:p>
-        </p:txBody>
-      </p:sp>
     </p:spTree>
     <p:extLst>
       <p:ext uri="{BB962C8B-B14F-4D97-AF65-F5344CB8AC3E}">
-        <p14:creationId xmlns:p14="http://schemas.microsoft.com/office/powerpoint/2010/main" val="1024086991"/>
+        <p14:creationId xmlns:p14="http://schemas.microsoft.com/office/powerpoint/2010/main" val="3165298647"/>
       </p:ext>
     </p:extLst>
   </p:cSld>
@@ -520,10 +301,6 @@
           <a:bodyPr/>
           <a:lstStyle/>
           <a:p>
-            <a:r>
-              <a:rPr lang="en-US" dirty="0"/>
-              <a:t/>
-            </a:r>
             <a:endParaRPr lang="en-US" dirty="0"/>
           </a:p>
         </p:txBody>
@@ -608,10 +385,6 @@
           <a:bodyPr/>
           <a:lstStyle/>
           <a:p>
-            <a:r>
-              <a:rPr lang="en-US" dirty="0"/>
-              <a:t/>
-            </a:r>
             <a:endParaRPr lang="en-US" dirty="0"/>
           </a:p>
         </p:txBody>
@@ -696,10 +469,6 @@
           <a:bodyPr/>
           <a:lstStyle/>
           <a:p>
-            <a:r>
-              <a:rPr lang="en-US" dirty="0"/>
-              <a:t/>
-            </a:r>
             <a:endParaRPr lang="en-US" dirty="0"/>
           </a:p>
         </p:txBody>
@@ -784,10 +553,6 @@
           <a:bodyPr/>
           <a:lstStyle/>
           <a:p>
-            <a:r>
-              <a:rPr lang="en-US" dirty="0"/>
-              <a:t/>
-            </a:r>
             <a:endParaRPr lang="en-US" dirty="0"/>
           </a:p>
         </p:txBody>
@@ -872,10 +637,6 @@
           <a:bodyPr/>
           <a:lstStyle/>
           <a:p>
-            <a:r>
-              <a:rPr lang="en-US" dirty="0"/>
-              <a:t/>
-            </a:r>
             <a:endParaRPr lang="en-US" dirty="0"/>
           </a:p>
         </p:txBody>
@@ -960,10 +721,6 @@
           <a:bodyPr/>
           <a:lstStyle/>
           <a:p>
-            <a:r>
-              <a:rPr lang="en-US" dirty="0"/>
-              <a:t/>
-            </a:r>
             <a:endParaRPr lang="en-US" dirty="0"/>
           </a:p>
         </p:txBody>
@@ -1048,10 +805,6 @@
           <a:bodyPr/>
           <a:lstStyle/>
           <a:p>
-            <a:r>
-              <a:rPr lang="en-US" dirty="0"/>
-              <a:t/>
-            </a:r>
             <a:endParaRPr lang="en-US" dirty="0"/>
           </a:p>
         </p:txBody>
@@ -1136,10 +889,6 @@
           <a:bodyPr/>
           <a:lstStyle/>
           <a:p>
-            <a:r>
-              <a:rPr lang="en-US" dirty="0"/>
-              <a:t/>
-            </a:r>
             <a:endParaRPr lang="en-US" dirty="0"/>
           </a:p>
         </p:txBody>
@@ -1224,10 +973,6 @@
           <a:bodyPr/>
           <a:lstStyle/>
           <a:p>
-            <a:r>
-              <a:rPr lang="en-US" dirty="0"/>
-              <a:t/>
-            </a:r>
             <a:endParaRPr lang="en-US" dirty="0"/>
           </a:p>
         </p:txBody>
@@ -1312,10 +1057,6 @@
           <a:bodyPr/>
           <a:lstStyle/>
           <a:p>
-            <a:r>
-              <a:rPr lang="en-US" dirty="0"/>
-              <a:t/>
-            </a:r>
             <a:endParaRPr lang="en-US" dirty="0"/>
           </a:p>
         </p:txBody>
@@ -1400,10 +1141,6 @@
           <a:bodyPr/>
           <a:lstStyle/>
           <a:p>
-            <a:r>
-              <a:rPr lang="en-US" dirty="0"/>
-              <a:t/>
-            </a:r>
             <a:endParaRPr lang="en-US" dirty="0"/>
           </a:p>
         </p:txBody>
@@ -1488,10 +1225,6 @@
           <a:bodyPr/>
           <a:lstStyle/>
           <a:p>
-            <a:r>
-              <a:rPr lang="en-US" dirty="0"/>
-              <a:t/>
-            </a:r>
             <a:endParaRPr lang="en-US" dirty="0"/>
           </a:p>
         </p:txBody>
@@ -1576,10 +1309,6 @@
           <a:bodyPr/>
           <a:lstStyle/>
           <a:p>
-            <a:r>
-              <a:rPr lang="en-US" dirty="0"/>
-              <a:t/>
-            </a:r>
             <a:endParaRPr lang="en-US" dirty="0"/>
           </a:p>
         </p:txBody>
@@ -1664,10 +1393,6 @@
           <a:bodyPr/>
           <a:lstStyle/>
           <a:p>
-            <a:r>
-              <a:rPr lang="en-US" dirty="0"/>
-              <a:t/>
-            </a:r>
             <a:endParaRPr lang="en-US" dirty="0"/>
           </a:p>
         </p:txBody>
@@ -1752,10 +1477,6 @@
           <a:bodyPr/>
           <a:lstStyle/>
           <a:p>
-            <a:r>
-              <a:rPr lang="en-US" dirty="0"/>
-              <a:t/>
-            </a:r>
             <a:endParaRPr lang="en-US" dirty="0"/>
           </a:p>
         </p:txBody>
@@ -1840,10 +1561,6 @@
           <a:bodyPr/>
           <a:lstStyle/>
           <a:p>
-            <a:r>
-              <a:rPr lang="en-US" dirty="0"/>
-              <a:t/>
-            </a:r>
             <a:endParaRPr lang="en-US" dirty="0"/>
           </a:p>
         </p:txBody>
@@ -1928,10 +1645,6 @@
           <a:bodyPr/>
           <a:lstStyle/>
           <a:p>
-            <a:r>
-              <a:rPr lang="en-US" dirty="0"/>
-              <a:t/>
-            </a:r>
             <a:endParaRPr lang="en-US" dirty="0"/>
           </a:p>
         </p:txBody>
@@ -2016,10 +1729,6 @@
           <a:bodyPr/>
           <a:lstStyle/>
           <a:p>
-            <a:r>
-              <a:rPr lang="en-US" dirty="0"/>
-              <a:t/>
-            </a:r>
             <a:endParaRPr lang="en-US" dirty="0"/>
           </a:p>
         </p:txBody>
@@ -2104,10 +1813,6 @@
           <a:bodyPr/>
           <a:lstStyle/>
           <a:p>
-            <a:r>
-              <a:rPr lang="en-US" dirty="0"/>
-              <a:t/>
-            </a:r>
             <a:endParaRPr lang="en-US" dirty="0"/>
           </a:p>
         </p:txBody>
@@ -2192,10 +1897,6 @@
           <a:bodyPr/>
           <a:lstStyle/>
           <a:p>
-            <a:r>
-              <a:rPr lang="en-US" dirty="0"/>
-              <a:t/>
-            </a:r>
             <a:endParaRPr lang="en-US" dirty="0"/>
           </a:p>
         </p:txBody>
@@ -2280,10 +1981,6 @@
           <a:bodyPr/>
           <a:lstStyle/>
           <a:p>
-            <a:r>
-              <a:rPr lang="en-US" dirty="0"/>
-              <a:t/>
-            </a:r>
             <a:endParaRPr lang="en-US" dirty="0"/>
           </a:p>
         </p:txBody>
@@ -2357,6 +2054,11 @@
 <file path=ppt/slideMasters/slideMaster1.xml><?xml version="1.0" encoding="utf-8"?>
 <p:sldMaster xmlns:a="http://schemas.openxmlformats.org/drawingml/2006/main" xmlns:r="http://schemas.openxmlformats.org/officeDocument/2006/relationships" xmlns:p="http://schemas.openxmlformats.org/presentationml/2006/main">
   <p:cSld>
+    <p:bg>
+      <p:bgRef idx="1001">
+        <a:schemeClr val="bg1"/>
+      </p:bgRef>
+    </p:bg>
     <p:spTree>
       <p:nvGrpSpPr>
         <p:cNvPr id="1" name=""/>
@@ -2639,6 +2341,7 @@
         <a:solidFill>
           <a:srgbClr val="A51C30"/>
         </a:solidFill>
+        <a:effectLst/>
       </p:bgPr>
     </p:bg>
     <p:spTree>
@@ -2676,11 +2379,11 @@
           <a:bodyPr wrap="square" lIns="0" tIns="0" rIns="0" bIns="0" rtlCol="0" anchor="ctr"/>
           <a:lstStyle/>
           <a:p>
-            <a:pPr indent="0" marL="0">
-              <a:buNone/>
-            </a:pPr>
-            <a:r>
-              <a:rPr lang="en-US" sz="1400" b="1" spc="600" kern="0" dirty="0">
+            <a:pPr marL="0" indent="0">
+              <a:buNone/>
+            </a:pPr>
+            <a:r>
+              <a:rPr lang="en-US" sz="1400" b="1" kern="0" spc="600" dirty="0">
                 <a:solidFill>
                   <a:srgbClr val="F3F3F1"/>
                 </a:solidFill>
@@ -2715,7 +2418,7 @@
           <a:bodyPr wrap="square" lIns="0" tIns="0" rIns="0" bIns="0" rtlCol="0" anchor="ctr"/>
           <a:lstStyle/>
           <a:p>
-            <a:pPr indent="0" marL="0">
+            <a:pPr marL="0" indent="0">
               <a:buNone/>
             </a:pPr>
             <a:r>
@@ -2754,7 +2457,7 @@
           <a:bodyPr wrap="square" lIns="0" tIns="0" rIns="0" bIns="0" rtlCol="0" anchor="ctr"/>
           <a:lstStyle/>
           <a:p>
-            <a:pPr indent="0" marL="0">
+            <a:pPr marL="0" indent="0">
               <a:buNone/>
             </a:pPr>
             <a:r>
@@ -2793,11 +2496,11 @@
           <a:bodyPr wrap="square" lIns="0" tIns="0" rIns="0" bIns="0" rtlCol="0" anchor="ctr"/>
           <a:lstStyle/>
           <a:p>
-            <a:pPr indent="0" marL="0">
-              <a:buNone/>
-            </a:pPr>
-            <a:r>
-              <a:rPr lang="en-US" sz="1200" spc="400" kern="0" dirty="0">
+            <a:pPr marL="0" indent="0">
+              <a:buNone/>
+            </a:pPr>
+            <a:r>
+              <a:rPr lang="en-US" sz="1200" kern="0" spc="400" dirty="0">
                 <a:solidFill>
                   <a:srgbClr val="F3F3F1"/>
                 </a:solidFill>
@@ -2827,6 +2530,7 @@
         <a:solidFill>
           <a:srgbClr val="FFFFFF"/>
         </a:solidFill>
+        <a:effectLst/>
       </p:bgPr>
     </p:bg>
     <p:spTree>
@@ -2864,11 +2568,11 @@
           <a:bodyPr wrap="square" lIns="0" tIns="0" rIns="0" bIns="0" rtlCol="0" anchor="ctr"/>
           <a:lstStyle/>
           <a:p>
-            <a:pPr indent="0" marL="0">
-              <a:buNone/>
-            </a:pPr>
-            <a:r>
-              <a:rPr lang="en-US" sz="1200" b="1" spc="400" kern="0" dirty="0">
+            <a:pPr marL="0" indent="0">
+              <a:buNone/>
+            </a:pPr>
+            <a:r>
+              <a:rPr lang="en-US" sz="1200" b="1" kern="0" spc="400" dirty="0">
                 <a:solidFill>
                   <a:srgbClr val="A51C30"/>
                 </a:solidFill>
@@ -2903,7 +2607,7 @@
           <a:bodyPr wrap="square" lIns="0" tIns="0" rIns="0" bIns="0" rtlCol="0" anchor="ctr"/>
           <a:lstStyle/>
           <a:p>
-            <a:pPr indent="0" marL="0">
+            <a:pPr marL="0" indent="0">
               <a:buNone/>
             </a:pPr>
             <a:r>
@@ -2990,11 +2694,11 @@
           <a:bodyPr wrap="square" lIns="0" tIns="0" rIns="0" bIns="0" rtlCol="0" anchor="ctr"/>
           <a:lstStyle/>
           <a:p>
-            <a:pPr indent="0" marL="0">
-              <a:buNone/>
-            </a:pPr>
-            <a:r>
-              <a:rPr lang="en-US" sz="1200" b="1" spc="500" kern="0" dirty="0">
+            <a:pPr marL="0" indent="0">
+              <a:buNone/>
+            </a:pPr>
+            <a:r>
+              <a:rPr lang="en-US" sz="1200" b="1" kern="0" spc="500" dirty="0">
                 <a:solidFill>
                   <a:srgbClr val="A51C30"/>
                 </a:solidFill>
@@ -3029,7 +2733,7 @@
           <a:bodyPr wrap="square" lIns="0" tIns="0" rIns="0" bIns="0" rtlCol="0" anchor="ctr"/>
           <a:lstStyle/>
           <a:p>
-            <a:pPr indent="0" marL="0">
+            <a:pPr marL="0" indent="0">
               <a:buNone/>
             </a:pPr>
             <a:r>
@@ -3068,7 +2772,7 @@
           <a:bodyPr wrap="square" lIns="0" tIns="0" rIns="0" bIns="0" rtlCol="0" anchor="ctr"/>
           <a:lstStyle/>
           <a:p>
-            <a:pPr indent="0" marL="0">
+            <a:pPr marL="0" indent="0">
               <a:buNone/>
             </a:pPr>
             <a:r>
@@ -3132,11 +2836,11 @@
           <a:bodyPr wrap="square" lIns="0" tIns="0" rIns="0" bIns="0" rtlCol="0" anchor="ctr"/>
           <a:lstStyle/>
           <a:p>
-            <a:pPr indent="0" marL="0">
-              <a:buNone/>
-            </a:pPr>
-            <a:r>
-              <a:rPr lang="en-US" sz="1200" b="1" spc="500" kern="0" dirty="0">
+            <a:pPr marL="0" indent="0">
+              <a:buNone/>
+            </a:pPr>
+            <a:r>
+              <a:rPr lang="en-US" sz="1200" b="1" kern="0" spc="500" dirty="0">
                 <a:solidFill>
                   <a:srgbClr val="F3F3F1"/>
                 </a:solidFill>
@@ -3171,7 +2875,7 @@
           <a:bodyPr wrap="square" lIns="0" tIns="0" rIns="0" bIns="0" rtlCol="0" anchor="ctr"/>
           <a:lstStyle/>
           <a:p>
-            <a:pPr indent="0" marL="0">
+            <a:pPr marL="0" indent="0">
               <a:buNone/>
             </a:pPr>
             <a:r>
@@ -3311,45 +3015,6 @@
                 <a:cs typeface="Arial" pitchFamily="34" charset="-120"/>
               </a:rPr>
               <a:t>Cache the results so a reload does not spend the daily budget.</a:t>
-            </a:r>
-            <a:endParaRPr lang="en-US" sz="1300" dirty="0"/>
-          </a:p>
-        </p:txBody>
-      </p:sp>
-      <p:sp>
-        <p:nvSpPr>
-          <p:cNvPr id="13" name="Text 11"/>
-          <p:cNvSpPr/>
-          <p:nvPr/>
-        </p:nvSpPr>
-        <p:spPr>
-          <a:xfrm>
-            <a:off x="457200" y="6126480"/>
-            <a:ext cx="11247120" cy="320040"/>
-          </a:xfrm>
-          <a:prstGeom prst="rect">
-            <a:avLst/>
-          </a:prstGeom>
-          <a:noFill/>
-          <a:ln/>
-        </p:spPr>
-        <p:txBody>
-          <a:bodyPr wrap="square" lIns="0" tIns="0" rIns="0" bIns="0" rtlCol="0" anchor="ctr"/>
-          <a:lstStyle/>
-          <a:p>
-            <a:pPr algn="ctr" indent="0" marL="0">
-              <a:buNone/>
-            </a:pPr>
-            <a:r>
-              <a:rPr lang="en-US" sz="1300" i="1" dirty="0">
-                <a:solidFill>
-                  <a:srgbClr val="8996A0"/>
-                </a:solidFill>
-                <a:latin typeface="Arial" pitchFamily="34" charset="0"/>
-                <a:ea typeface="Arial" pitchFamily="34" charset="-122"/>
-                <a:cs typeface="Arial" pitchFamily="34" charset="-120"/>
-              </a:rPr>
-              <a:t>BUILD TIME  ·  ABOUT 6 MINUTES</a:t>
             </a:r>
             <a:endParaRPr lang="en-US" sz="1300" dirty="0"/>
           </a:p>
@@ -3371,6 +3036,7 @@
         <a:solidFill>
           <a:srgbClr val="FFFFFF"/>
         </a:solidFill>
+        <a:effectLst/>
       </p:bgPr>
     </p:bg>
     <p:spTree>
@@ -3408,11 +3074,11 @@
           <a:bodyPr wrap="square" lIns="0" tIns="0" rIns="0" bIns="0" rtlCol="0" anchor="ctr"/>
           <a:lstStyle/>
           <a:p>
-            <a:pPr indent="0" marL="0">
-              <a:buNone/>
-            </a:pPr>
-            <a:r>
-              <a:rPr lang="en-US" sz="1200" b="1" spc="400" kern="0" dirty="0">
+            <a:pPr marL="0" indent="0">
+              <a:buNone/>
+            </a:pPr>
+            <a:r>
+              <a:rPr lang="en-US" sz="1200" b="1" kern="0" spc="400" dirty="0">
                 <a:solidFill>
                   <a:srgbClr val="A51C30"/>
                 </a:solidFill>
@@ -3447,7 +3113,7 @@
           <a:bodyPr wrap="square" lIns="0" tIns="0" rIns="0" bIns="0" rtlCol="0" anchor="ctr"/>
           <a:lstStyle/>
           <a:p>
-            <a:pPr indent="0" marL="0">
+            <a:pPr marL="0" indent="0">
               <a:buNone/>
             </a:pPr>
             <a:r>
@@ -3496,8 +3162,8 @@
         </p:nvSpPr>
         <p:spPr>
           <a:xfrm>
-            <a:off x="457200" y="1965960"/>
-            <a:ext cx="11247120" cy="4160520"/>
+            <a:off x="457200" y="1965959"/>
+            <a:ext cx="11247120" cy="4588947"/>
           </a:xfrm>
           <a:prstGeom prst="rect">
             <a:avLst/>
@@ -3521,7 +3187,7 @@
         </p:nvSpPr>
         <p:spPr>
           <a:xfrm>
-            <a:off x="457200" y="1965960"/>
+            <a:off x="457200" y="1544725"/>
             <a:ext cx="2194560" cy="365760"/>
           </a:xfrm>
           <a:prstGeom prst="rect">
@@ -3546,7 +3212,7 @@
         </p:nvSpPr>
         <p:spPr>
           <a:xfrm>
-            <a:off x="457200" y="1965960"/>
+            <a:off x="457200" y="1544724"/>
             <a:ext cx="2194560" cy="365760"/>
           </a:xfrm>
           <a:prstGeom prst="rect">
@@ -3559,11 +3225,11 @@
           <a:bodyPr wrap="square" lIns="0" tIns="0" rIns="0" bIns="0" rtlCol="0" anchor="ctr"/>
           <a:lstStyle/>
           <a:p>
-            <a:pPr algn="ctr" indent="0" marL="0">
-              <a:buNone/>
-            </a:pPr>
-            <a:r>
-              <a:rPr lang="en-US" sz="1000" b="1" spc="400" kern="0" dirty="0">
+            <a:pPr marL="0" indent="0" algn="ctr">
+              <a:buNone/>
+            </a:pPr>
+            <a:r>
+              <a:rPr lang="en-US" sz="1000" b="1" kern="0" spc="400" dirty="0">
                 <a:solidFill>
                   <a:srgbClr val="FFFFFF"/>
                 </a:solidFill>
@@ -3571,7 +3237,7 @@
                 <a:ea typeface="Arial" pitchFamily="34" charset="-122"/>
                 <a:cs typeface="Arial" pitchFamily="34" charset="-120"/>
               </a:rPr>
-              <a:t>SUGGESTED PROMPT</a:t>
+              <a:t>EXAMPLE PROMPT</a:t>
             </a:r>
             <a:endParaRPr lang="en-US" sz="1000" dirty="0"/>
           </a:p>
@@ -3585,7 +3251,7 @@
         </p:nvSpPr>
         <p:spPr>
           <a:xfrm>
-            <a:off x="731520" y="2468880"/>
+            <a:off x="731520" y="2427784"/>
             <a:ext cx="10698480" cy="3611880"/>
           </a:xfrm>
           <a:prstGeom prst="rect">
@@ -3598,499 +3264,535 @@
           <a:bodyPr wrap="square" lIns="0" tIns="0" rIns="0" bIns="0" rtlCol="0" anchor="ctr"/>
           <a:lstStyle/>
           <a:p>
-            <a:pPr indent="0" marL="0">
-              <a:spcAft>
-                <a:spcPts val="200"/>
-              </a:spcAft>
-              <a:buNone/>
-            </a:pPr>
-            <a:r>
-              <a:rPr lang="en-US" sz="1050" dirty="0">
-                <a:solidFill>
-                  <a:srgbClr val="1E1E1E"/>
-                </a:solidFill>
-                <a:latin typeface="Consolas" pitchFamily="34" charset="0"/>
+            <a:pPr marL="0" indent="0">
+              <a:spcAft>
+                <a:spcPts val="200"/>
+              </a:spcAft>
+              <a:buNone/>
+            </a:pPr>
+            <a:r>
+              <a:rPr lang="en-US" sz="1000" dirty="0">
+                <a:solidFill>
+                  <a:srgbClr val="1E1E1E"/>
+                </a:solidFill>
+                <a:latin typeface="Consolas" panose="020B0609020204030204" pitchFamily="49" charset="0"/>
                 <a:ea typeface="Consolas" pitchFamily="34" charset="-122"/>
-                <a:cs typeface="Consolas" pitchFamily="34" charset="-120"/>
+                <a:cs typeface="Consolas" panose="020B0609020204030204" pitchFamily="49" charset="0"/>
               </a:rPr>
               <a:t>Add two data fetches to the SPA.</a:t>
             </a:r>
-            <a:endParaRPr lang="en-US" sz="1050" dirty="0"/>
-          </a:p>
-          <a:p>
-            <a:pPr indent="0" marL="0">
-              <a:spcAft>
-                <a:spcPts val="200"/>
-              </a:spcAft>
-              <a:buNone/>
-            </a:pPr>
-            <a:endParaRPr lang="en-US" sz="1050" dirty="0"/>
-          </a:p>
-          <a:p>
-            <a:pPr indent="0" marL="0">
-              <a:spcAft>
-                <a:spcPts val="200"/>
-              </a:spcAft>
-              <a:buNone/>
-            </a:pPr>
-            <a:r>
-              <a:rPr lang="en-US" sz="1050" dirty="0">
-                <a:solidFill>
-                  <a:srgbClr val="1E1E1E"/>
-                </a:solidFill>
-                <a:latin typeface="Consolas" pitchFamily="34" charset="0"/>
+            <a:endParaRPr lang="en-US" sz="1000" dirty="0">
+              <a:latin typeface="Consolas" panose="020B0609020204030204" pitchFamily="49" charset="0"/>
+              <a:cs typeface="Consolas" panose="020B0609020204030204" pitchFamily="49" charset="0"/>
+            </a:endParaRPr>
+          </a:p>
+          <a:p>
+            <a:pPr marL="0" indent="0">
+              <a:spcAft>
+                <a:spcPts val="200"/>
+              </a:spcAft>
+              <a:buNone/>
+            </a:pPr>
+            <a:endParaRPr lang="en-US" sz="1000" dirty="0">
+              <a:latin typeface="Consolas" panose="020B0609020204030204" pitchFamily="49" charset="0"/>
+              <a:cs typeface="Consolas" panose="020B0609020204030204" pitchFamily="49" charset="0"/>
+            </a:endParaRPr>
+          </a:p>
+          <a:p>
+            <a:pPr marL="0" indent="0">
+              <a:spcAft>
+                <a:spcPts val="200"/>
+              </a:spcAft>
+              <a:buNone/>
+            </a:pPr>
+            <a:r>
+              <a:rPr lang="en-US" sz="1000" dirty="0">
+                <a:solidFill>
+                  <a:srgbClr val="1E1E1E"/>
+                </a:solidFill>
+                <a:latin typeface="Consolas" panose="020B0609020204030204" pitchFamily="49" charset="0"/>
                 <a:ea typeface="Consolas" pitchFamily="34" charset="-122"/>
-                <a:cs typeface="Consolas" pitchFamily="34" charset="-120"/>
+                <a:cs typeface="Consolas" panose="020B0609020204030204" pitchFamily="49" charset="0"/>
               </a:rPr>
               <a:t>CONTEXT</a:t>
             </a:r>
-            <a:endParaRPr lang="en-US" sz="1050" dirty="0"/>
-          </a:p>
-          <a:p>
-            <a:pPr indent="0" marL="0">
-              <a:spcAft>
-                <a:spcPts val="200"/>
-              </a:spcAft>
-              <a:buNone/>
-            </a:pPr>
-            <a:r>
-              <a:rPr lang="en-US" sz="1050" dirty="0">
-                <a:solidFill>
-                  <a:srgbClr val="1E1E1E"/>
-                </a:solidFill>
-                <a:latin typeface="Consolas" pitchFamily="34" charset="0"/>
+            <a:endParaRPr lang="en-US" sz="1000" dirty="0">
+              <a:latin typeface="Consolas" panose="020B0609020204030204" pitchFamily="49" charset="0"/>
+              <a:cs typeface="Consolas" panose="020B0609020204030204" pitchFamily="49" charset="0"/>
+            </a:endParaRPr>
+          </a:p>
+          <a:p>
+            <a:pPr marL="0" indent="0">
+              <a:spcAft>
+                <a:spcPts val="200"/>
+              </a:spcAft>
+              <a:buNone/>
+            </a:pPr>
+            <a:r>
+              <a:rPr lang="en-US" sz="1000" dirty="0">
+                <a:solidFill>
+                  <a:srgbClr val="1E1E1E"/>
+                </a:solidFill>
+                <a:latin typeface="Consolas" panose="020B0609020204030204" pitchFamily="49" charset="0"/>
                 <a:ea typeface="Consolas" pitchFamily="34" charset="-122"/>
-                <a:cs typeface="Consolas" pitchFamily="34" charset="-120"/>
+                <a:cs typeface="Consolas" panose="020B0609020204030204" pitchFamily="49" charset="0"/>
               </a:rPr>
               <a:t>The transcript is already loaded. We need external context. Two APIs:</a:t>
             </a:r>
-            <a:endParaRPr lang="en-US" sz="1050" dirty="0"/>
-          </a:p>
-          <a:p>
-            <a:pPr indent="0" marL="0">
-              <a:spcAft>
-                <a:spcPts val="200"/>
-              </a:spcAft>
-              <a:buNone/>
-            </a:pPr>
-            <a:r>
-              <a:rPr lang="en-US" sz="1050" dirty="0">
-                <a:solidFill>
-                  <a:srgbClr val="1E1E1E"/>
-                </a:solidFill>
-                <a:latin typeface="Consolas" pitchFamily="34" charset="0"/>
+            <a:endParaRPr lang="en-US" sz="1000" dirty="0">
+              <a:latin typeface="Consolas" panose="020B0609020204030204" pitchFamily="49" charset="0"/>
+              <a:cs typeface="Consolas" panose="020B0609020204030204" pitchFamily="49" charset="0"/>
+            </a:endParaRPr>
+          </a:p>
+          <a:p>
+            <a:pPr marL="0" indent="0">
+              <a:spcAft>
+                <a:spcPts val="200"/>
+              </a:spcAft>
+              <a:buNone/>
+            </a:pPr>
+            <a:r>
+              <a:rPr lang="en-US" sz="1000" dirty="0">
+                <a:solidFill>
+                  <a:srgbClr val="1E1E1E"/>
+                </a:solidFill>
+                <a:latin typeface="Consolas" panose="020B0609020204030204" pitchFamily="49" charset="0"/>
                 <a:ea typeface="Consolas" pitchFamily="34" charset="-122"/>
-                <a:cs typeface="Consolas" pitchFamily="34" charset="-120"/>
+                <a:cs typeface="Consolas" panose="020B0609020204030204" pitchFamily="49" charset="0"/>
               </a:rPr>
               <a:t>- Riskline:  https://api.riskline.com/alerts/latest.json  (no key)</a:t>
             </a:r>
-            <a:endParaRPr lang="en-US" sz="1050" dirty="0"/>
-          </a:p>
-          <a:p>
-            <a:pPr indent="0" marL="0">
-              <a:spcAft>
-                <a:spcPts val="200"/>
-              </a:spcAft>
-              <a:buNone/>
-            </a:pPr>
-            <a:r>
-              <a:rPr lang="en-US" sz="1050" dirty="0">
-                <a:solidFill>
-                  <a:srgbClr val="1E1E1E"/>
-                </a:solidFill>
-                <a:latin typeface="Consolas" pitchFamily="34" charset="0"/>
+            <a:endParaRPr lang="en-US" sz="1000" dirty="0">
+              <a:latin typeface="Consolas" panose="020B0609020204030204" pitchFamily="49" charset="0"/>
+              <a:cs typeface="Consolas" panose="020B0609020204030204" pitchFamily="49" charset="0"/>
+            </a:endParaRPr>
+          </a:p>
+          <a:p>
+            <a:pPr marL="0" indent="0">
+              <a:spcAft>
+                <a:spcPts val="200"/>
+              </a:spcAft>
+              <a:buNone/>
+            </a:pPr>
+            <a:r>
+              <a:rPr lang="en-US" sz="1000" dirty="0">
+                <a:solidFill>
+                  <a:srgbClr val="1E1E1E"/>
+                </a:solidFill>
+                <a:latin typeface="Consolas" panose="020B0609020204030204" pitchFamily="49" charset="0"/>
                 <a:ea typeface="Consolas" pitchFamily="34" charset="-122"/>
-                <a:cs typeface="Consolas" pitchFamily="34" charset="-120"/>
+                <a:cs typeface="Consolas" panose="020B0609020204030204" pitchFamily="49" charset="0"/>
               </a:rPr>
               <a:t>- NewsAPI:   https://newsapi.org/v2/everything  (key from an input field)</a:t>
             </a:r>
-            <a:endParaRPr lang="en-US" sz="1050" dirty="0"/>
-          </a:p>
-          <a:p>
-            <a:pPr indent="0" marL="0">
-              <a:spcAft>
-                <a:spcPts val="200"/>
-              </a:spcAft>
-              <a:buNone/>
-            </a:pPr>
-            <a:endParaRPr lang="en-US" sz="1050" dirty="0"/>
-          </a:p>
-          <a:p>
-            <a:pPr indent="0" marL="0">
-              <a:spcAft>
-                <a:spcPts val="200"/>
-              </a:spcAft>
-              <a:buNone/>
-            </a:pPr>
-            <a:r>
-              <a:rPr lang="en-US" sz="1050" dirty="0">
-                <a:solidFill>
-                  <a:srgbClr val="1E1E1E"/>
-                </a:solidFill>
-                <a:latin typeface="Consolas" pitchFamily="34" charset="0"/>
+            <a:endParaRPr lang="en-US" sz="1000" dirty="0">
+              <a:latin typeface="Consolas" panose="020B0609020204030204" pitchFamily="49" charset="0"/>
+              <a:cs typeface="Consolas" panose="020B0609020204030204" pitchFamily="49" charset="0"/>
+            </a:endParaRPr>
+          </a:p>
+          <a:p>
+            <a:pPr marL="0" indent="0">
+              <a:spcAft>
+                <a:spcPts val="200"/>
+              </a:spcAft>
+              <a:buNone/>
+            </a:pPr>
+            <a:endParaRPr lang="en-US" sz="1000" dirty="0">
+              <a:latin typeface="Consolas" panose="020B0609020204030204" pitchFamily="49" charset="0"/>
+              <a:cs typeface="Consolas" panose="020B0609020204030204" pitchFamily="49" charset="0"/>
+            </a:endParaRPr>
+          </a:p>
+          <a:p>
+            <a:pPr marL="0" indent="0">
+              <a:spcAft>
+                <a:spcPts val="200"/>
+              </a:spcAft>
+              <a:buNone/>
+            </a:pPr>
+            <a:r>
+              <a:rPr lang="en-US" sz="1000" dirty="0">
+                <a:solidFill>
+                  <a:srgbClr val="1E1E1E"/>
+                </a:solidFill>
+                <a:latin typeface="Consolas" panose="020B0609020204030204" pitchFamily="49" charset="0"/>
                 <a:ea typeface="Consolas" pitchFamily="34" charset="-122"/>
-                <a:cs typeface="Consolas" pitchFamily="34" charset="-120"/>
+                <a:cs typeface="Consolas" panose="020B0609020204030204" pitchFamily="49" charset="0"/>
               </a:rPr>
               <a:t>TASK</a:t>
             </a:r>
-            <a:endParaRPr lang="en-US" sz="1050" dirty="0"/>
-          </a:p>
-          <a:p>
-            <a:pPr indent="0" marL="0">
-              <a:spcAft>
-                <a:spcPts val="200"/>
-              </a:spcAft>
-              <a:buNone/>
-            </a:pPr>
-            <a:r>
-              <a:rPr lang="en-US" sz="1050" dirty="0">
-                <a:solidFill>
-                  <a:srgbClr val="1E1E1E"/>
-                </a:solidFill>
-                <a:latin typeface="Consolas" pitchFamily="34" charset="0"/>
+            <a:endParaRPr lang="en-US" sz="1000" dirty="0">
+              <a:latin typeface="Consolas" panose="020B0609020204030204" pitchFamily="49" charset="0"/>
+              <a:cs typeface="Consolas" panose="020B0609020204030204" pitchFamily="49" charset="0"/>
+            </a:endParaRPr>
+          </a:p>
+          <a:p>
+            <a:pPr marL="0" indent="0">
+              <a:spcAft>
+                <a:spcPts val="200"/>
+              </a:spcAft>
+              <a:buNone/>
+            </a:pPr>
+            <a:r>
+              <a:rPr lang="en-US" sz="1000" dirty="0">
+                <a:solidFill>
+                  <a:srgbClr val="1E1E1E"/>
+                </a:solidFill>
+                <a:latin typeface="Consolas" panose="020B0609020204030204" pitchFamily="49" charset="0"/>
                 <a:ea typeface="Consolas" pitchFamily="34" charset="-122"/>
-                <a:cs typeface="Consolas" pitchFamily="34" charset="-120"/>
+                <a:cs typeface="Consolas" panose="020B0609020204030204" pitchFamily="49" charset="0"/>
               </a:rPr>
               <a:t>1. On a "Fetch context" button, call Riskline. Filter the returned alerts to</a:t>
             </a:r>
-            <a:endParaRPr lang="en-US" sz="1050" dirty="0"/>
-          </a:p>
-          <a:p>
-            <a:pPr indent="0" marL="0">
-              <a:spcAft>
-                <a:spcPts val="200"/>
-              </a:spcAft>
-              <a:buNone/>
-            </a:pPr>
-            <a:r>
-              <a:rPr lang="en-US" sz="1050" dirty="0">
-                <a:solidFill>
-                  <a:srgbClr val="1E1E1E"/>
-                </a:solidFill>
-                <a:latin typeface="Consolas" pitchFamily="34" charset="0"/>
+            <a:endParaRPr lang="en-US" sz="1000" dirty="0">
+              <a:latin typeface="Consolas" panose="020B0609020204030204" pitchFamily="49" charset="0"/>
+              <a:cs typeface="Consolas" panose="020B0609020204030204" pitchFamily="49" charset="0"/>
+            </a:endParaRPr>
+          </a:p>
+          <a:p>
+            <a:pPr marL="0" indent="0">
+              <a:spcAft>
+                <a:spcPts val="200"/>
+              </a:spcAft>
+              <a:buNone/>
+            </a:pPr>
+            <a:r>
+              <a:rPr lang="en-US" sz="1000" dirty="0">
+                <a:solidFill>
+                  <a:srgbClr val="1E1E1E"/>
+                </a:solidFill>
+                <a:latin typeface="Consolas" panose="020B0609020204030204" pitchFamily="49" charset="0"/>
                 <a:ea typeface="Consolas" pitchFamily="34" charset="-122"/>
-                <a:cs typeface="Consolas" pitchFamily="34" charset="-120"/>
+                <a:cs typeface="Consolas" panose="020B0609020204030204" pitchFamily="49" charset="0"/>
               </a:rPr>
               <a:t>   COUNTRIES = ["United States", "China", "European Union"]. Render each kept</a:t>
             </a:r>
-            <a:endParaRPr lang="en-US" sz="1050" dirty="0"/>
-          </a:p>
-          <a:p>
-            <a:pPr indent="0" marL="0">
-              <a:spcAft>
-                <a:spcPts val="200"/>
-              </a:spcAft>
-              <a:buNone/>
-            </a:pPr>
-            <a:r>
-              <a:rPr lang="en-US" sz="1050" dirty="0">
-                <a:solidFill>
-                  <a:srgbClr val="1E1E1E"/>
-                </a:solidFill>
-                <a:latin typeface="Consolas" pitchFamily="34" charset="0"/>
+            <a:endParaRPr lang="en-US" sz="1000" dirty="0">
+              <a:latin typeface="Consolas" panose="020B0609020204030204" pitchFamily="49" charset="0"/>
+              <a:cs typeface="Consolas" panose="020B0609020204030204" pitchFamily="49" charset="0"/>
+            </a:endParaRPr>
+          </a:p>
+          <a:p>
+            <a:pPr marL="0" indent="0">
+              <a:spcAft>
+                <a:spcPts val="200"/>
+              </a:spcAft>
+              <a:buNone/>
+            </a:pPr>
+            <a:r>
+              <a:rPr lang="en-US" sz="1000" dirty="0">
+                <a:solidFill>
+                  <a:srgbClr val="1E1E1E"/>
+                </a:solidFill>
+                <a:latin typeface="Consolas" panose="020B0609020204030204" pitchFamily="49" charset="0"/>
                 <a:ea typeface="Consolas" pitchFamily="34" charset="-122"/>
-                <a:cs typeface="Consolas" pitchFamily="34" charset="-120"/>
+                <a:cs typeface="Consolas" panose="020B0609020204030204" pitchFamily="49" charset="0"/>
               </a:rPr>
               <a:t>   alert as: "&lt;date&gt; · &lt;country&gt;: &lt;headline&gt;".</a:t>
             </a:r>
-            <a:endParaRPr lang="en-US" sz="1050" dirty="0"/>
-          </a:p>
-          <a:p>
-            <a:pPr indent="0" marL="0">
-              <a:spcAft>
-                <a:spcPts val="200"/>
-              </a:spcAft>
-              <a:buNone/>
-            </a:pPr>
-            <a:r>
-              <a:rPr lang="en-US" sz="1050" dirty="0">
-                <a:solidFill>
-                  <a:srgbClr val="1E1E1E"/>
-                </a:solidFill>
-                <a:latin typeface="Consolas" pitchFamily="34" charset="0"/>
+            <a:endParaRPr lang="en-US" sz="1000" dirty="0">
+              <a:latin typeface="Consolas" panose="020B0609020204030204" pitchFamily="49" charset="0"/>
+              <a:cs typeface="Consolas" panose="020B0609020204030204" pitchFamily="49" charset="0"/>
+            </a:endParaRPr>
+          </a:p>
+          <a:p>
+            <a:pPr marL="0" indent="0">
+              <a:spcAft>
+                <a:spcPts val="200"/>
+              </a:spcAft>
+              <a:buNone/>
+            </a:pPr>
+            <a:r>
+              <a:rPr lang="en-US" sz="1000" dirty="0">
+                <a:solidFill>
+                  <a:srgbClr val="1E1E1E"/>
+                </a:solidFill>
+                <a:latin typeface="Consolas" panose="020B0609020204030204" pitchFamily="49" charset="0"/>
                 <a:ea typeface="Consolas" pitchFamily="34" charset="-122"/>
-                <a:cs typeface="Consolas" pitchFamily="34" charset="-120"/>
+                <a:cs typeface="Consolas" panose="020B0609020204030204" pitchFamily="49" charset="0"/>
               </a:rPr>
               <a:t>2. Call NewsAPI with the query pattern: '"&lt;companyName&gt;" AND (earnings OR</a:t>
             </a:r>
-            <a:endParaRPr lang="en-US" sz="1050" dirty="0"/>
-          </a:p>
-          <a:p>
-            <a:pPr indent="0" marL="0">
-              <a:spcAft>
-                <a:spcPts val="200"/>
-              </a:spcAft>
-              <a:buNone/>
-            </a:pPr>
-            <a:r>
-              <a:rPr lang="en-US" sz="1050" dirty="0">
-                <a:solidFill>
-                  <a:srgbClr val="1E1E1E"/>
-                </a:solidFill>
-                <a:latin typeface="Consolas" pitchFamily="34" charset="0"/>
+            <a:endParaRPr lang="en-US" sz="1000" dirty="0">
+              <a:latin typeface="Consolas" panose="020B0609020204030204" pitchFamily="49" charset="0"/>
+              <a:cs typeface="Consolas" panose="020B0609020204030204" pitchFamily="49" charset="0"/>
+            </a:endParaRPr>
+          </a:p>
+          <a:p>
+            <a:pPr marL="0" indent="0">
+              <a:spcAft>
+                <a:spcPts val="200"/>
+              </a:spcAft>
+              <a:buNone/>
+            </a:pPr>
+            <a:r>
+              <a:rPr lang="en-US" sz="1000" dirty="0">
+                <a:solidFill>
+                  <a:srgbClr val="1E1E1E"/>
+                </a:solidFill>
+                <a:latin typeface="Consolas" panose="020B0609020204030204" pitchFamily="49" charset="0"/>
                 <a:ea typeface="Consolas" pitchFamily="34" charset="-122"/>
-                <a:cs typeface="Consolas" pitchFamily="34" charset="-120"/>
+                <a:cs typeface="Consolas" panose="020B0609020204030204" pitchFamily="49" charset="0"/>
               </a:rPr>
               <a:t>   revenue OR analyst)', pageSize=10, sortBy=publishedAt. Render each hit as:</a:t>
             </a:r>
-            <a:endParaRPr lang="en-US" sz="1050" dirty="0"/>
-          </a:p>
-          <a:p>
-            <a:pPr indent="0" marL="0">
-              <a:spcAft>
-                <a:spcPts val="200"/>
-              </a:spcAft>
-              <a:buNone/>
-            </a:pPr>
-            <a:r>
-              <a:rPr lang="en-US" sz="1050" dirty="0">
-                <a:solidFill>
-                  <a:srgbClr val="1E1E1E"/>
-                </a:solidFill>
-                <a:latin typeface="Consolas" pitchFamily="34" charset="0"/>
+            <a:endParaRPr lang="en-US" sz="1000" dirty="0">
+              <a:latin typeface="Consolas" panose="020B0609020204030204" pitchFamily="49" charset="0"/>
+              <a:cs typeface="Consolas" panose="020B0609020204030204" pitchFamily="49" charset="0"/>
+            </a:endParaRPr>
+          </a:p>
+          <a:p>
+            <a:pPr marL="0" indent="0">
+              <a:spcAft>
+                <a:spcPts val="200"/>
+              </a:spcAft>
+              <a:buNone/>
+            </a:pPr>
+            <a:r>
+              <a:rPr lang="en-US" sz="1000" dirty="0">
+                <a:solidFill>
+                  <a:srgbClr val="1E1E1E"/>
+                </a:solidFill>
+                <a:latin typeface="Consolas" panose="020B0609020204030204" pitchFamily="49" charset="0"/>
                 <a:ea typeface="Consolas" pitchFamily="34" charset="-122"/>
-                <a:cs typeface="Consolas" pitchFamily="34" charset="-120"/>
+                <a:cs typeface="Consolas" panose="020B0609020204030204" pitchFamily="49" charset="0"/>
               </a:rPr>
               <a:t>   "&lt;publishedAt&gt; · &lt;source&gt;: &lt;title&gt;".</a:t>
             </a:r>
-            <a:endParaRPr lang="en-US" sz="1050" dirty="0"/>
-          </a:p>
-          <a:p>
-            <a:pPr indent="0" marL="0">
-              <a:spcAft>
-                <a:spcPts val="200"/>
-              </a:spcAft>
-              <a:buNone/>
-            </a:pPr>
-            <a:endParaRPr lang="en-US" sz="1050" dirty="0"/>
-          </a:p>
-          <a:p>
-            <a:pPr indent="0" marL="0">
-              <a:spcAft>
-                <a:spcPts val="200"/>
-              </a:spcAft>
-              <a:buNone/>
-            </a:pPr>
-            <a:r>
-              <a:rPr lang="en-US" sz="1050" dirty="0">
-                <a:solidFill>
-                  <a:srgbClr val="1E1E1E"/>
-                </a:solidFill>
-                <a:latin typeface="Consolas" pitchFamily="34" charset="0"/>
+            <a:endParaRPr lang="en-US" sz="1000" dirty="0">
+              <a:latin typeface="Consolas" panose="020B0609020204030204" pitchFamily="49" charset="0"/>
+              <a:cs typeface="Consolas" panose="020B0609020204030204" pitchFamily="49" charset="0"/>
+            </a:endParaRPr>
+          </a:p>
+          <a:p>
+            <a:pPr marL="0" indent="0">
+              <a:spcAft>
+                <a:spcPts val="200"/>
+              </a:spcAft>
+              <a:buNone/>
+            </a:pPr>
+            <a:endParaRPr lang="en-US" sz="1000" dirty="0">
+              <a:latin typeface="Consolas" panose="020B0609020204030204" pitchFamily="49" charset="0"/>
+              <a:cs typeface="Consolas" panose="020B0609020204030204" pitchFamily="49" charset="0"/>
+            </a:endParaRPr>
+          </a:p>
+          <a:p>
+            <a:pPr marL="0" indent="0">
+              <a:spcAft>
+                <a:spcPts val="200"/>
+              </a:spcAft>
+              <a:buNone/>
+            </a:pPr>
+            <a:r>
+              <a:rPr lang="en-US" sz="1000" dirty="0">
+                <a:solidFill>
+                  <a:srgbClr val="1E1E1E"/>
+                </a:solidFill>
+                <a:latin typeface="Consolas" panose="020B0609020204030204" pitchFamily="49" charset="0"/>
                 <a:ea typeface="Consolas" pitchFamily="34" charset="-122"/>
-                <a:cs typeface="Consolas" pitchFamily="34" charset="-120"/>
+                <a:cs typeface="Consolas" panose="020B0609020204030204" pitchFamily="49" charset="0"/>
               </a:rPr>
               <a:t>CONSTRAINT</a:t>
             </a:r>
-            <a:endParaRPr lang="en-US" sz="1050" dirty="0"/>
-          </a:p>
-          <a:p>
-            <a:pPr indent="0" marL="0">
-              <a:spcAft>
-                <a:spcPts val="200"/>
-              </a:spcAft>
-              <a:buNone/>
-            </a:pPr>
-            <a:r>
-              <a:rPr lang="en-US" sz="1050" dirty="0">
-                <a:solidFill>
-                  <a:srgbClr val="1E1E1E"/>
-                </a:solidFill>
-                <a:latin typeface="Consolas" pitchFamily="34" charset="0"/>
+            <a:endParaRPr lang="en-US" sz="1000" dirty="0">
+              <a:latin typeface="Consolas" panose="020B0609020204030204" pitchFamily="49" charset="0"/>
+              <a:cs typeface="Consolas" panose="020B0609020204030204" pitchFamily="49" charset="0"/>
+            </a:endParaRPr>
+          </a:p>
+          <a:p>
+            <a:pPr marL="0" indent="0">
+              <a:spcAft>
+                <a:spcPts val="200"/>
+              </a:spcAft>
+              <a:buNone/>
+            </a:pPr>
+            <a:r>
+              <a:rPr lang="en-US" sz="1000" dirty="0">
+                <a:solidFill>
+                  <a:srgbClr val="1E1E1E"/>
+                </a:solidFill>
+                <a:latin typeface="Consolas" panose="020B0609020204030204" pitchFamily="49" charset="0"/>
                 <a:ea typeface="Consolas" pitchFamily="34" charset="-122"/>
-                <a:cs typeface="Consolas" pitchFamily="34" charset="-120"/>
+                <a:cs typeface="Consolas" panose="020B0609020204030204" pitchFamily="49" charset="0"/>
               </a:rPr>
               <a:t>Check res.ok before parsing every response. If either fetch fails, print</a:t>
             </a:r>
-            <a:endParaRPr lang="en-US" sz="1050" dirty="0"/>
-          </a:p>
-          <a:p>
-            <a:pPr indent="0" marL="0">
-              <a:spcAft>
-                <a:spcPts val="200"/>
-              </a:spcAft>
-              <a:buNone/>
-            </a:pPr>
-            <a:r>
-              <a:rPr lang="en-US" sz="1050" dirty="0">
-                <a:solidFill>
-                  <a:srgbClr val="1E1E1E"/>
-                </a:solidFill>
-                <a:latin typeface="Consolas" pitchFamily="34" charset="0"/>
+            <a:endParaRPr lang="en-US" sz="1000" dirty="0">
+              <a:latin typeface="Consolas" panose="020B0609020204030204" pitchFamily="49" charset="0"/>
+              <a:cs typeface="Consolas" panose="020B0609020204030204" pitchFamily="49" charset="0"/>
+            </a:endParaRPr>
+          </a:p>
+          <a:p>
+            <a:pPr marL="0" indent="0">
+              <a:spcAft>
+                <a:spcPts val="200"/>
+              </a:spcAft>
+              <a:buNone/>
+            </a:pPr>
+            <a:r>
+              <a:rPr lang="en-US" sz="1000" dirty="0">
+                <a:solidFill>
+                  <a:srgbClr val="1E1E1E"/>
+                </a:solidFill>
+                <a:latin typeface="Consolas" panose="020B0609020204030204" pitchFamily="49" charset="0"/>
                 <a:ea typeface="Consolas" pitchFamily="34" charset="-122"/>
-                <a:cs typeface="Consolas" pitchFamily="34" charset="-120"/>
+                <a:cs typeface="Consolas" panose="020B0609020204030204" pitchFamily="49" charset="0"/>
               </a:rPr>
               <a:t>"&lt;source&gt; fetch failed: &lt;status&gt;" to the panel and continue. Never let one</a:t>
             </a:r>
-            <a:endParaRPr lang="en-US" sz="1050" dirty="0"/>
-          </a:p>
-          <a:p>
-            <a:pPr indent="0" marL="0">
-              <a:spcAft>
-                <a:spcPts val="200"/>
-              </a:spcAft>
-              <a:buNone/>
-            </a:pPr>
-            <a:r>
-              <a:rPr lang="en-US" sz="1050" dirty="0">
-                <a:solidFill>
-                  <a:srgbClr val="1E1E1E"/>
-                </a:solidFill>
-                <a:latin typeface="Consolas" pitchFamily="34" charset="0"/>
+            <a:endParaRPr lang="en-US" sz="1000" dirty="0">
+              <a:latin typeface="Consolas" panose="020B0609020204030204" pitchFamily="49" charset="0"/>
+              <a:cs typeface="Consolas" panose="020B0609020204030204" pitchFamily="49" charset="0"/>
+            </a:endParaRPr>
+          </a:p>
+          <a:p>
+            <a:pPr marL="0" indent="0">
+              <a:spcAft>
+                <a:spcPts val="200"/>
+              </a:spcAft>
+              <a:buNone/>
+            </a:pPr>
+            <a:r>
+              <a:rPr lang="en-US" sz="1000" dirty="0">
+                <a:solidFill>
+                  <a:srgbClr val="1E1E1E"/>
+                </a:solidFill>
+                <a:latin typeface="Consolas" panose="020B0609020204030204" pitchFamily="49" charset="0"/>
                 <a:ea typeface="Consolas" pitchFamily="34" charset="-122"/>
-                <a:cs typeface="Consolas" pitchFamily="34" charset="-120"/>
+                <a:cs typeface="Consolas" panose="020B0609020204030204" pitchFamily="49" charset="0"/>
               </a:rPr>
               <a:t>failure block the other. Cache both responses in memory so a reload does not</a:t>
             </a:r>
-            <a:endParaRPr lang="en-US" sz="1050" dirty="0"/>
-          </a:p>
-          <a:p>
-            <a:pPr indent="0" marL="0">
-              <a:spcAft>
-                <a:spcPts val="200"/>
-              </a:spcAft>
-              <a:buNone/>
-            </a:pPr>
-            <a:r>
-              <a:rPr lang="en-US" sz="1050" dirty="0">
-                <a:solidFill>
-                  <a:srgbClr val="1E1E1E"/>
-                </a:solidFill>
-                <a:latin typeface="Consolas" pitchFamily="34" charset="0"/>
+            <a:endParaRPr lang="en-US" sz="1000" dirty="0">
+              <a:latin typeface="Consolas" panose="020B0609020204030204" pitchFamily="49" charset="0"/>
+              <a:cs typeface="Consolas" panose="020B0609020204030204" pitchFamily="49" charset="0"/>
+            </a:endParaRPr>
+          </a:p>
+          <a:p>
+            <a:pPr marL="0" indent="0">
+              <a:spcAft>
+                <a:spcPts val="200"/>
+              </a:spcAft>
+              <a:buNone/>
+            </a:pPr>
+            <a:r>
+              <a:rPr lang="en-US" sz="1000" dirty="0">
+                <a:solidFill>
+                  <a:srgbClr val="1E1E1E"/>
+                </a:solidFill>
+                <a:latin typeface="Consolas" panose="020B0609020204030204" pitchFamily="49" charset="0"/>
                 <a:ea typeface="Consolas" pitchFamily="34" charset="-122"/>
-                <a:cs typeface="Consolas" pitchFamily="34" charset="-120"/>
+                <a:cs typeface="Consolas" panose="020B0609020204030204" pitchFamily="49" charset="0"/>
               </a:rPr>
               <a:t>re-request.</a:t>
             </a:r>
-            <a:endParaRPr lang="en-US" sz="1050" dirty="0"/>
-          </a:p>
-          <a:p>
-            <a:pPr indent="0" marL="0">
-              <a:spcAft>
-                <a:spcPts val="200"/>
-              </a:spcAft>
-              <a:buNone/>
-            </a:pPr>
-            <a:endParaRPr lang="en-US" sz="1050" dirty="0"/>
-          </a:p>
-          <a:p>
-            <a:pPr indent="0" marL="0">
-              <a:spcAft>
-                <a:spcPts val="200"/>
-              </a:spcAft>
-              <a:buNone/>
-            </a:pPr>
-            <a:r>
-              <a:rPr lang="en-US" sz="1050" dirty="0">
-                <a:solidFill>
-                  <a:srgbClr val="1E1E1E"/>
-                </a:solidFill>
-                <a:latin typeface="Consolas" pitchFamily="34" charset="0"/>
+            <a:endParaRPr lang="en-US" sz="1000" dirty="0">
+              <a:latin typeface="Consolas" panose="020B0609020204030204" pitchFamily="49" charset="0"/>
+              <a:cs typeface="Consolas" panose="020B0609020204030204" pitchFamily="49" charset="0"/>
+            </a:endParaRPr>
+          </a:p>
+          <a:p>
+            <a:pPr marL="0" indent="0">
+              <a:spcAft>
+                <a:spcPts val="200"/>
+              </a:spcAft>
+              <a:buNone/>
+            </a:pPr>
+            <a:endParaRPr lang="en-US" sz="1000" dirty="0">
+              <a:latin typeface="Consolas" panose="020B0609020204030204" pitchFamily="49" charset="0"/>
+              <a:cs typeface="Consolas" panose="020B0609020204030204" pitchFamily="49" charset="0"/>
+            </a:endParaRPr>
+          </a:p>
+          <a:p>
+            <a:pPr marL="0" indent="0">
+              <a:spcAft>
+                <a:spcPts val="200"/>
+              </a:spcAft>
+              <a:buNone/>
+            </a:pPr>
+            <a:r>
+              <a:rPr lang="en-US" sz="1000" dirty="0">
+                <a:solidFill>
+                  <a:srgbClr val="1E1E1E"/>
+                </a:solidFill>
+                <a:latin typeface="Consolas" panose="020B0609020204030204" pitchFamily="49" charset="0"/>
                 <a:ea typeface="Consolas" pitchFamily="34" charset="-122"/>
-                <a:cs typeface="Consolas" pitchFamily="34" charset="-120"/>
+                <a:cs typeface="Consolas" panose="020B0609020204030204" pitchFamily="49" charset="0"/>
               </a:rPr>
               <a:t>ACCEPTANCE</a:t>
             </a:r>
-            <a:endParaRPr lang="en-US" sz="1050" dirty="0"/>
-          </a:p>
-          <a:p>
-            <a:pPr indent="0" marL="0">
-              <a:spcAft>
-                <a:spcPts val="200"/>
-              </a:spcAft>
-              <a:buNone/>
-            </a:pPr>
-            <a:r>
-              <a:rPr lang="en-US" sz="1050" dirty="0">
-                <a:solidFill>
-                  <a:srgbClr val="1E1E1E"/>
-                </a:solidFill>
-                <a:latin typeface="Consolas" pitchFamily="34" charset="0"/>
+            <a:endParaRPr lang="en-US" sz="1000" dirty="0">
+              <a:latin typeface="Consolas" panose="020B0609020204030204" pitchFamily="49" charset="0"/>
+              <a:cs typeface="Consolas" panose="020B0609020204030204" pitchFamily="49" charset="0"/>
+            </a:endParaRPr>
+          </a:p>
+          <a:p>
+            <a:pPr marL="0" indent="0">
+              <a:spcAft>
+                <a:spcPts val="200"/>
+              </a:spcAft>
+              <a:buNone/>
+            </a:pPr>
+            <a:r>
+              <a:rPr lang="en-US" sz="1000" dirty="0">
+                <a:solidFill>
+                  <a:srgbClr val="1E1E1E"/>
+                </a:solidFill>
+                <a:latin typeface="Consolas" panose="020B0609020204030204" pitchFamily="49" charset="0"/>
                 <a:ea typeface="Consolas" pitchFamily="34" charset="-122"/>
-                <a:cs typeface="Consolas" pitchFamily="34" charset="-120"/>
+                <a:cs typeface="Consolas" panose="020B0609020204030204" pitchFamily="49" charset="0"/>
               </a:rPr>
               <a:t>I see a "Macro" panel with three to eight sentences, and a "News" panel with</a:t>
             </a:r>
-            <a:endParaRPr lang="en-US" sz="1050" dirty="0"/>
-          </a:p>
-          <a:p>
-            <a:pPr indent="0" marL="0">
-              <a:spcAft>
-                <a:spcPts val="200"/>
-              </a:spcAft>
-              <a:buNone/>
-            </a:pPr>
-            <a:r>
-              <a:rPr lang="en-US" sz="1050" dirty="0">
-                <a:solidFill>
-                  <a:srgbClr val="1E1E1E"/>
-                </a:solidFill>
-                <a:latin typeface="Consolas" pitchFamily="34" charset="0"/>
+            <a:endParaRPr lang="en-US" sz="1000" dirty="0">
+              <a:latin typeface="Consolas" panose="020B0609020204030204" pitchFamily="49" charset="0"/>
+              <a:cs typeface="Consolas" panose="020B0609020204030204" pitchFamily="49" charset="0"/>
+            </a:endParaRPr>
+          </a:p>
+          <a:p>
+            <a:pPr marL="0" indent="0">
+              <a:spcAft>
+                <a:spcPts val="200"/>
+              </a:spcAft>
+              <a:buNone/>
+            </a:pPr>
+            <a:r>
+              <a:rPr lang="en-US" sz="1000" dirty="0">
+                <a:solidFill>
+                  <a:srgbClr val="1E1E1E"/>
+                </a:solidFill>
+                <a:latin typeface="Consolas" panose="020B0609020204030204" pitchFamily="49" charset="0"/>
                 <a:ea typeface="Consolas" pitchFamily="34" charset="-122"/>
-                <a:cs typeface="Consolas" pitchFamily="34" charset="-120"/>
+                <a:cs typeface="Consolas" panose="020B0609020204030204" pitchFamily="49" charset="0"/>
               </a:rPr>
               <a:t>up to ten headlines dated in the last thirty days. If I disable my network</a:t>
             </a:r>
-            <a:endParaRPr lang="en-US" sz="1050" dirty="0"/>
-          </a:p>
-          <a:p>
-            <a:pPr indent="0" marL="0">
-              <a:spcAft>
-                <a:spcPts val="200"/>
-              </a:spcAft>
-              <a:buNone/>
-            </a:pPr>
-            <a:r>
-              <a:rPr lang="en-US" sz="1050" dirty="0">
-                <a:solidFill>
-                  <a:srgbClr val="1E1E1E"/>
-                </a:solidFill>
-                <a:latin typeface="Consolas" pitchFamily="34" charset="0"/>
+            <a:endParaRPr lang="en-US" sz="1000" dirty="0">
+              <a:latin typeface="Consolas" panose="020B0609020204030204" pitchFamily="49" charset="0"/>
+              <a:cs typeface="Consolas" panose="020B0609020204030204" pitchFamily="49" charset="0"/>
+            </a:endParaRPr>
+          </a:p>
+          <a:p>
+            <a:pPr marL="0" indent="0">
+              <a:spcAft>
+                <a:spcPts val="200"/>
+              </a:spcAft>
+              <a:buNone/>
+            </a:pPr>
+            <a:r>
+              <a:rPr lang="en-US" sz="1000" dirty="0">
+                <a:solidFill>
+                  <a:srgbClr val="1E1E1E"/>
+                </a:solidFill>
+                <a:latin typeface="Consolas" panose="020B0609020204030204" pitchFamily="49" charset="0"/>
                 <a:ea typeface="Consolas" pitchFamily="34" charset="-122"/>
-                <a:cs typeface="Consolas" pitchFamily="34" charset="-120"/>
+                <a:cs typeface="Consolas" panose="020B0609020204030204" pitchFamily="49" charset="0"/>
               </a:rPr>
               <a:t>mid-way I see the failure message, not a broken page.</a:t>
             </a:r>
-            <a:endParaRPr lang="en-US" sz="1050" dirty="0"/>
-          </a:p>
-        </p:txBody>
-      </p:sp>
-      <p:sp>
-        <p:nvSpPr>
-          <p:cNvPr id="9" name="Text 7"/>
-          <p:cNvSpPr/>
-          <p:nvPr/>
-        </p:nvSpPr>
-        <p:spPr>
-          <a:xfrm>
-            <a:off x="457200" y="6263640"/>
-            <a:ext cx="11247120" cy="320040"/>
-          </a:xfrm>
-          <a:prstGeom prst="rect">
-            <a:avLst/>
-          </a:prstGeom>
-          <a:noFill/>
-          <a:ln/>
-        </p:spPr>
-        <p:txBody>
-          <a:bodyPr wrap="square" lIns="0" tIns="0" rIns="0" bIns="0" rtlCol="0" anchor="ctr"/>
-          <a:lstStyle/>
-          <a:p>
-            <a:pPr algn="ctr" indent="0" marL="0">
-              <a:buNone/>
-            </a:pPr>
-            <a:r>
-              <a:rPr lang="en-US" sz="1200" i="1" dirty="0">
-                <a:solidFill>
-                  <a:srgbClr val="8996A0"/>
-                </a:solidFill>
-                <a:latin typeface="Arial" pitchFamily="34" charset="0"/>
-                <a:ea typeface="Arial" pitchFamily="34" charset="-122"/>
-                <a:cs typeface="Arial" pitchFamily="34" charset="-120"/>
-              </a:rPr>
-              <a:t>The two panels are separate. One failing is not the other failing.</a:t>
-            </a:r>
-            <a:endParaRPr lang="en-US" sz="1200" dirty="0"/>
+            <a:endParaRPr lang="en-US" sz="1000" dirty="0">
+              <a:latin typeface="Consolas" panose="020B0609020204030204" pitchFamily="49" charset="0"/>
+              <a:cs typeface="Consolas" panose="020B0609020204030204" pitchFamily="49" charset="0"/>
+            </a:endParaRPr>
           </a:p>
         </p:txBody>
       </p:sp>
@@ -4110,6 +3812,7 @@
         <a:solidFill>
           <a:srgbClr val="FFFFFF"/>
         </a:solidFill>
+        <a:effectLst/>
       </p:bgPr>
     </p:bg>
     <p:spTree>
@@ -4147,11 +3850,11 @@
           <a:bodyPr wrap="square" lIns="0" tIns="0" rIns="0" bIns="0" rtlCol="0" anchor="ctr"/>
           <a:lstStyle/>
           <a:p>
-            <a:pPr indent="0" marL="0">
-              <a:buNone/>
-            </a:pPr>
-            <a:r>
-              <a:rPr lang="en-US" sz="1200" b="1" spc="400" kern="0" dirty="0">
+            <a:pPr marL="0" indent="0">
+              <a:buNone/>
+            </a:pPr>
+            <a:r>
+              <a:rPr lang="en-US" sz="1200" b="1" kern="0" spc="400" dirty="0">
                 <a:solidFill>
                   <a:srgbClr val="A51C30"/>
                 </a:solidFill>
@@ -4186,7 +3889,7 @@
           <a:bodyPr wrap="square" lIns="0" tIns="0" rIns="0" bIns="0" rtlCol="0" anchor="ctr"/>
           <a:lstStyle/>
           <a:p>
-            <a:pPr indent="0" marL="0">
+            <a:pPr marL="0" indent="0">
               <a:buNone/>
             </a:pPr>
             <a:r>
@@ -4273,11 +3976,11 @@
           <a:bodyPr wrap="square" lIns="0" tIns="0" rIns="0" bIns="0" rtlCol="0" anchor="ctr"/>
           <a:lstStyle/>
           <a:p>
-            <a:pPr indent="0" marL="0">
-              <a:buNone/>
-            </a:pPr>
-            <a:r>
-              <a:rPr lang="en-US" sz="1200" b="1" spc="500" kern="0" dirty="0">
+            <a:pPr marL="0" indent="0">
+              <a:buNone/>
+            </a:pPr>
+            <a:r>
+              <a:rPr lang="en-US" sz="1200" b="1" kern="0" spc="500" dirty="0">
                 <a:solidFill>
                   <a:srgbClr val="A51C30"/>
                 </a:solidFill>
@@ -4312,7 +4015,7 @@
           <a:bodyPr wrap="square" lIns="0" tIns="0" rIns="0" bIns="0" rtlCol="0" anchor="ctr"/>
           <a:lstStyle/>
           <a:p>
-            <a:pPr indent="0" marL="0">
+            <a:pPr marL="0" indent="0">
               <a:buNone/>
             </a:pPr>
             <a:r>
@@ -4351,7 +4054,7 @@
           <a:bodyPr wrap="square" lIns="0" tIns="0" rIns="0" bIns="0" rtlCol="0" anchor="ctr"/>
           <a:lstStyle/>
           <a:p>
-            <a:pPr indent="0" marL="0">
+            <a:pPr marL="0" indent="0">
               <a:buNone/>
             </a:pPr>
             <a:r>
@@ -4415,11 +4118,11 @@
           <a:bodyPr wrap="square" lIns="0" tIns="0" rIns="0" bIns="0" rtlCol="0" anchor="ctr"/>
           <a:lstStyle/>
           <a:p>
-            <a:pPr indent="0" marL="0">
-              <a:buNone/>
-            </a:pPr>
-            <a:r>
-              <a:rPr lang="en-US" sz="1200" b="1" spc="500" kern="0" dirty="0">
+            <a:pPr marL="0" indent="0">
+              <a:buNone/>
+            </a:pPr>
+            <a:r>
+              <a:rPr lang="en-US" sz="1200" b="1" kern="0" spc="500" dirty="0">
                 <a:solidFill>
                   <a:srgbClr val="F3F3F1"/>
                 </a:solidFill>
@@ -4454,7 +4157,7 @@
           <a:bodyPr wrap="square" lIns="0" tIns="0" rIns="0" bIns="0" rtlCol="0" anchor="ctr"/>
           <a:lstStyle/>
           <a:p>
-            <a:pPr indent="0" marL="0">
+            <a:pPr marL="0" indent="0">
               <a:buNone/>
             </a:pPr>
             <a:r>
@@ -4594,45 +4297,6 @@
                 <a:cs typeface="Arial" pitchFamily="34" charset="-120"/>
               </a:rPr>
               <a:t>Show character count and estimated token count next to it (characters divided by four).</a:t>
-            </a:r>
-            <a:endParaRPr lang="en-US" sz="1300" dirty="0"/>
-          </a:p>
-        </p:txBody>
-      </p:sp>
-      <p:sp>
-        <p:nvSpPr>
-          <p:cNvPr id="13" name="Text 11"/>
-          <p:cNvSpPr/>
-          <p:nvPr/>
-        </p:nvSpPr>
-        <p:spPr>
-          <a:xfrm>
-            <a:off x="457200" y="6126480"/>
-            <a:ext cx="11247120" cy="320040"/>
-          </a:xfrm>
-          <a:prstGeom prst="rect">
-            <a:avLst/>
-          </a:prstGeom>
-          <a:noFill/>
-          <a:ln/>
-        </p:spPr>
-        <p:txBody>
-          <a:bodyPr wrap="square" lIns="0" tIns="0" rIns="0" bIns="0" rtlCol="0" anchor="ctr"/>
-          <a:lstStyle/>
-          <a:p>
-            <a:pPr algn="ctr" indent="0" marL="0">
-              <a:buNone/>
-            </a:pPr>
-            <a:r>
-              <a:rPr lang="en-US" sz="1300" i="1" dirty="0">
-                <a:solidFill>
-                  <a:srgbClr val="8996A0"/>
-                </a:solidFill>
-                <a:latin typeface="Arial" pitchFamily="34" charset="0"/>
-                <a:ea typeface="Arial" pitchFamily="34" charset="-122"/>
-                <a:cs typeface="Arial" pitchFamily="34" charset="-120"/>
-              </a:rPr>
-              <a:t>BUILD TIME  ·  ABOUT 5 MINUTES</a:t>
             </a:r>
             <a:endParaRPr lang="en-US" sz="1300" dirty="0"/>
           </a:p>
@@ -4654,6 +4318,7 @@
         <a:solidFill>
           <a:srgbClr val="FFFFFF"/>
         </a:solidFill>
+        <a:effectLst/>
       </p:bgPr>
     </p:bg>
     <p:spTree>
@@ -4691,11 +4356,11 @@
           <a:bodyPr wrap="square" lIns="0" tIns="0" rIns="0" bIns="0" rtlCol="0" anchor="ctr"/>
           <a:lstStyle/>
           <a:p>
-            <a:pPr indent="0" marL="0">
-              <a:buNone/>
-            </a:pPr>
-            <a:r>
-              <a:rPr lang="en-US" sz="1200" b="1" spc="400" kern="0" dirty="0">
+            <a:pPr marL="0" indent="0">
+              <a:buNone/>
+            </a:pPr>
+            <a:r>
+              <a:rPr lang="en-US" sz="1200" b="1" kern="0" spc="400" dirty="0">
                 <a:solidFill>
                   <a:srgbClr val="A51C30"/>
                 </a:solidFill>
@@ -4718,7 +4383,7 @@
         <p:spPr>
           <a:xfrm>
             <a:off x="457200" y="777240"/>
-            <a:ext cx="11247120" cy="822960"/>
+            <a:ext cx="6036067" cy="822960"/>
           </a:xfrm>
           <a:prstGeom prst="rect">
             <a:avLst/>
@@ -4730,7 +4395,7 @@
           <a:bodyPr wrap="square" lIns="0" tIns="0" rIns="0" bIns="0" rtlCol="0" anchor="ctr"/>
           <a:lstStyle/>
           <a:p>
-            <a:pPr indent="0" marL="0">
+            <a:pPr marL="0" indent="0">
               <a:buNone/>
             </a:pPr>
             <a:r>
@@ -4779,8 +4444,8 @@
         </p:nvSpPr>
         <p:spPr>
           <a:xfrm>
-            <a:off x="457200" y="1965960"/>
-            <a:ext cx="11247120" cy="4160520"/>
+            <a:off x="5496674" y="397608"/>
+            <a:ext cx="6207646" cy="5852160"/>
           </a:xfrm>
           <a:prstGeom prst="rect">
             <a:avLst/>
@@ -4804,7 +4469,7 @@
         </p:nvSpPr>
         <p:spPr>
           <a:xfrm>
-            <a:off x="457200" y="1965960"/>
+            <a:off x="3077110" y="2163738"/>
             <a:ext cx="2194560" cy="365760"/>
           </a:xfrm>
           <a:prstGeom prst="rect">
@@ -4829,7 +4494,7 @@
         </p:nvSpPr>
         <p:spPr>
           <a:xfrm>
-            <a:off x="457200" y="1965960"/>
+            <a:off x="3097658" y="2162710"/>
             <a:ext cx="2194560" cy="365760"/>
           </a:xfrm>
           <a:prstGeom prst="rect">
@@ -4842,11 +4507,11 @@
           <a:bodyPr wrap="square" lIns="0" tIns="0" rIns="0" bIns="0" rtlCol="0" anchor="ctr"/>
           <a:lstStyle/>
           <a:p>
-            <a:pPr algn="ctr" indent="0" marL="0">
-              <a:buNone/>
-            </a:pPr>
-            <a:r>
-              <a:rPr lang="en-US" sz="1000" b="1" spc="400" kern="0" dirty="0">
+            <a:pPr marL="0" indent="0" algn="ctr">
+              <a:buNone/>
+            </a:pPr>
+            <a:r>
+              <a:rPr lang="en-US" sz="1000" b="1" kern="0" spc="400" dirty="0">
                 <a:solidFill>
                   <a:srgbClr val="FFFFFF"/>
                 </a:solidFill>
@@ -4868,8 +4533,8 @@
         </p:nvSpPr>
         <p:spPr>
           <a:xfrm>
-            <a:off x="731520" y="2468880"/>
-            <a:ext cx="10698480" cy="3611880"/>
+            <a:off x="6080760" y="1394459"/>
+            <a:ext cx="4980911" cy="4040567"/>
           </a:xfrm>
           <a:prstGeom prst="rect">
             <a:avLst/>
@@ -4881,14 +4546,14 @@
           <a:bodyPr wrap="square" lIns="0" tIns="0" rIns="0" bIns="0" rtlCol="0" anchor="ctr"/>
           <a:lstStyle/>
           <a:p>
-            <a:pPr indent="0" marL="0">
-              <a:spcAft>
-                <a:spcPts val="200"/>
-              </a:spcAft>
-              <a:buNone/>
-            </a:pPr>
-            <a:r>
-              <a:rPr lang="en-US" sz="1050" dirty="0">
+            <a:pPr marL="0" indent="0">
+              <a:spcAft>
+                <a:spcPts val="200"/>
+              </a:spcAft>
+              <a:buNone/>
+            </a:pPr>
+            <a:r>
+              <a:rPr lang="en-US" sz="900" dirty="0">
                 <a:solidFill>
                   <a:srgbClr val="1E1E1E"/>
                 </a:solidFill>
@@ -4898,26 +4563,26 @@
               </a:rPr>
               <a:t>Assemble a labeled context block from what we have.</a:t>
             </a:r>
-            <a:endParaRPr lang="en-US" sz="1050" dirty="0"/>
-          </a:p>
-          <a:p>
-            <a:pPr indent="0" marL="0">
-              <a:spcAft>
-                <a:spcPts val="200"/>
-              </a:spcAft>
-              <a:buNone/>
-            </a:pPr>
-            <a:endParaRPr lang="en-US" sz="1050" dirty="0"/>
-          </a:p>
-          <a:p>
-            <a:pPr indent="0" marL="0">
-              <a:spcAft>
-                <a:spcPts val="200"/>
-              </a:spcAft>
-              <a:buNone/>
-            </a:pPr>
-            <a:r>
-              <a:rPr lang="en-US" sz="1050" dirty="0">
+            <a:endParaRPr lang="en-US" sz="900" dirty="0"/>
+          </a:p>
+          <a:p>
+            <a:pPr marL="0" indent="0">
+              <a:spcAft>
+                <a:spcPts val="200"/>
+              </a:spcAft>
+              <a:buNone/>
+            </a:pPr>
+            <a:endParaRPr lang="en-US" sz="900" dirty="0"/>
+          </a:p>
+          <a:p>
+            <a:pPr marL="0" indent="0">
+              <a:spcAft>
+                <a:spcPts val="200"/>
+              </a:spcAft>
+              <a:buNone/>
+            </a:pPr>
+            <a:r>
+              <a:rPr lang="en-US" sz="900" dirty="0">
                 <a:solidFill>
                   <a:srgbClr val="1E1E1E"/>
                 </a:solidFill>
@@ -4927,17 +4592,17 @@
               </a:rPr>
               <a:t>CONTEXT</a:t>
             </a:r>
-            <a:endParaRPr lang="en-US" sz="1050" dirty="0"/>
-          </a:p>
-          <a:p>
-            <a:pPr indent="0" marL="0">
-              <a:spcAft>
-                <a:spcPts val="200"/>
-              </a:spcAft>
-              <a:buNone/>
-            </a:pPr>
-            <a:r>
-              <a:rPr lang="en-US" sz="1050" dirty="0">
+            <a:endParaRPr lang="en-US" sz="900" dirty="0"/>
+          </a:p>
+          <a:p>
+            <a:pPr marL="0" indent="0">
+              <a:spcAft>
+                <a:spcPts val="200"/>
+              </a:spcAft>
+              <a:buNone/>
+            </a:pPr>
+            <a:r>
+              <a:rPr lang="en-US" sz="900" dirty="0">
                 <a:solidFill>
                   <a:srgbClr val="1E1E1E"/>
                 </a:solidFill>
@@ -4947,17 +4612,17 @@
               </a:rPr>
               <a:t>We already have: transcript (array of turn objects), news (array of</a:t>
             </a:r>
-            <a:endParaRPr lang="en-US" sz="1050" dirty="0"/>
-          </a:p>
-          <a:p>
-            <a:pPr indent="0" marL="0">
-              <a:spcAft>
-                <a:spcPts val="200"/>
-              </a:spcAft>
-              <a:buNone/>
-            </a:pPr>
-            <a:r>
-              <a:rPr lang="en-US" sz="1050" dirty="0">
+            <a:endParaRPr lang="en-US" sz="900" dirty="0"/>
+          </a:p>
+          <a:p>
+            <a:pPr marL="0" indent="0">
+              <a:spcAft>
+                <a:spcPts val="200"/>
+              </a:spcAft>
+              <a:buNone/>
+            </a:pPr>
+            <a:r>
+              <a:rPr lang="en-US" sz="900" dirty="0">
                 <a:solidFill>
                   <a:srgbClr val="1E1E1E"/>
                 </a:solidFill>
@@ -4967,26 +4632,26 @@
               </a:rPr>
               <a:t>headlines), macro (array of filtered alert sentences).</a:t>
             </a:r>
-            <a:endParaRPr lang="en-US" sz="1050" dirty="0"/>
-          </a:p>
-          <a:p>
-            <a:pPr indent="0" marL="0">
-              <a:spcAft>
-                <a:spcPts val="200"/>
-              </a:spcAft>
-              <a:buNone/>
-            </a:pPr>
-            <a:endParaRPr lang="en-US" sz="1050" dirty="0"/>
-          </a:p>
-          <a:p>
-            <a:pPr indent="0" marL="0">
-              <a:spcAft>
-                <a:spcPts val="200"/>
-              </a:spcAft>
-              <a:buNone/>
-            </a:pPr>
-            <a:r>
-              <a:rPr lang="en-US" sz="1050" dirty="0">
+            <a:endParaRPr lang="en-US" sz="900" dirty="0"/>
+          </a:p>
+          <a:p>
+            <a:pPr marL="0" indent="0">
+              <a:spcAft>
+                <a:spcPts val="200"/>
+              </a:spcAft>
+              <a:buNone/>
+            </a:pPr>
+            <a:endParaRPr lang="en-US" sz="900" dirty="0"/>
+          </a:p>
+          <a:p>
+            <a:pPr marL="0" indent="0">
+              <a:spcAft>
+                <a:spcPts val="200"/>
+              </a:spcAft>
+              <a:buNone/>
+            </a:pPr>
+            <a:r>
+              <a:rPr lang="en-US" sz="900" dirty="0">
                 <a:solidFill>
                   <a:srgbClr val="1E1E1E"/>
                 </a:solidFill>
@@ -4996,17 +4661,17 @@
               </a:rPr>
               <a:t>TASK</a:t>
             </a:r>
-            <a:endParaRPr lang="en-US" sz="1050" dirty="0"/>
-          </a:p>
-          <a:p>
-            <a:pPr indent="0" marL="0">
-              <a:spcAft>
-                <a:spcPts val="200"/>
-              </a:spcAft>
-              <a:buNone/>
-            </a:pPr>
-            <a:r>
-              <a:rPr lang="en-US" sz="1050" dirty="0">
+            <a:endParaRPr lang="en-US" sz="900" dirty="0"/>
+          </a:p>
+          <a:p>
+            <a:pPr marL="0" indent="0">
+              <a:spcAft>
+                <a:spcPts val="200"/>
+              </a:spcAft>
+              <a:buNone/>
+            </a:pPr>
+            <a:r>
+              <a:rPr lang="en-US" sz="900" dirty="0">
                 <a:solidFill>
                   <a:srgbClr val="1E1E1E"/>
                 </a:solidFill>
@@ -5016,17 +4681,17 @@
               </a:rPr>
               <a:t>Build a function assembleContext(transcript, news, macro) that returns one</a:t>
             </a:r>
-            <a:endParaRPr lang="en-US" sz="1050" dirty="0"/>
-          </a:p>
-          <a:p>
-            <a:pPr indent="0" marL="0">
-              <a:spcAft>
-                <a:spcPts val="200"/>
-              </a:spcAft>
-              <a:buNone/>
-            </a:pPr>
-            <a:r>
-              <a:rPr lang="en-US" sz="1050" dirty="0">
+            <a:endParaRPr lang="en-US" sz="900" dirty="0"/>
+          </a:p>
+          <a:p>
+            <a:pPr marL="0" indent="0">
+              <a:spcAft>
+                <a:spcPts val="200"/>
+              </a:spcAft>
+              <a:buNone/>
+            </a:pPr>
+            <a:r>
+              <a:rPr lang="en-US" sz="900" dirty="0">
                 <a:solidFill>
                   <a:srgbClr val="1E1E1E"/>
                 </a:solidFill>
@@ -5036,26 +4701,26 @@
               </a:rPr>
               <a:t>string with these four sections, in this order:</a:t>
             </a:r>
-            <a:endParaRPr lang="en-US" sz="1050" dirty="0"/>
-          </a:p>
-          <a:p>
-            <a:pPr indent="0" marL="0">
-              <a:spcAft>
-                <a:spcPts val="200"/>
-              </a:spcAft>
-              <a:buNone/>
-            </a:pPr>
-            <a:endParaRPr lang="en-US" sz="1050" dirty="0"/>
-          </a:p>
-          <a:p>
-            <a:pPr indent="0" marL="0">
-              <a:spcAft>
-                <a:spcPts val="200"/>
-              </a:spcAft>
-              <a:buNone/>
-            </a:pPr>
-            <a:r>
-              <a:rPr lang="en-US" sz="1050" dirty="0">
+            <a:endParaRPr lang="en-US" sz="900" dirty="0"/>
+          </a:p>
+          <a:p>
+            <a:pPr marL="0" indent="0">
+              <a:spcAft>
+                <a:spcPts val="200"/>
+              </a:spcAft>
+              <a:buNone/>
+            </a:pPr>
+            <a:endParaRPr lang="en-US" sz="900" dirty="0"/>
+          </a:p>
+          <a:p>
+            <a:pPr marL="0" indent="0">
+              <a:spcAft>
+                <a:spcPts val="200"/>
+              </a:spcAft>
+              <a:buNone/>
+            </a:pPr>
+            <a:r>
+              <a:rPr lang="en-US" sz="900" dirty="0">
                 <a:solidFill>
                   <a:srgbClr val="1E1E1E"/>
                 </a:solidFill>
@@ -5065,17 +4730,17 @@
               </a:rPr>
               <a:t>  === PRIMARY SOURCE: COMPANY STATEMENTS ===</a:t>
             </a:r>
-            <a:endParaRPr lang="en-US" sz="1050" dirty="0"/>
-          </a:p>
-          <a:p>
-            <a:pPr indent="0" marL="0">
-              <a:spcAft>
-                <a:spcPts val="200"/>
-              </a:spcAft>
-              <a:buNone/>
-            </a:pPr>
-            <a:r>
-              <a:rPr lang="en-US" sz="1050" dirty="0">
+            <a:endParaRPr lang="en-US" sz="900" dirty="0"/>
+          </a:p>
+          <a:p>
+            <a:pPr marL="0" indent="0">
+              <a:spcAft>
+                <a:spcPts val="200"/>
+              </a:spcAft>
+              <a:buNone/>
+            </a:pPr>
+            <a:r>
+              <a:rPr lang="en-US" sz="900" dirty="0">
                 <a:solidFill>
                   <a:srgbClr val="1E1E1E"/>
                 </a:solidFill>
@@ -5085,17 +4750,17 @@
               </a:rPr>
               <a:t>  first 12 management turns, formatted "&lt;speaker&gt; (&lt;title&gt;): &lt;msg&gt;"</a:t>
             </a:r>
-            <a:endParaRPr lang="en-US" sz="1050" dirty="0"/>
-          </a:p>
-          <a:p>
-            <a:pPr indent="0" marL="0">
-              <a:spcAft>
-                <a:spcPts val="200"/>
-              </a:spcAft>
-              <a:buNone/>
-            </a:pPr>
-            <a:r>
-              <a:rPr lang="en-US" sz="1050" dirty="0">
+            <a:endParaRPr lang="en-US" sz="900" dirty="0"/>
+          </a:p>
+          <a:p>
+            <a:pPr marL="0" indent="0">
+              <a:spcAft>
+                <a:spcPts val="200"/>
+              </a:spcAft>
+              <a:buNone/>
+            </a:pPr>
+            <a:r>
+              <a:rPr lang="en-US" sz="900" dirty="0">
                 <a:solidFill>
                   <a:srgbClr val="1E1E1E"/>
                 </a:solidFill>
@@ -5105,26 +4770,26 @@
               </a:rPr>
               <a:t>  (a management turn is one whose title does NOT match /analyst|research/i)</a:t>
             </a:r>
-            <a:endParaRPr lang="en-US" sz="1050" dirty="0"/>
-          </a:p>
-          <a:p>
-            <a:pPr indent="0" marL="0">
-              <a:spcAft>
-                <a:spcPts val="200"/>
-              </a:spcAft>
-              <a:buNone/>
-            </a:pPr>
-            <a:endParaRPr lang="en-US" sz="1050" dirty="0"/>
-          </a:p>
-          <a:p>
-            <a:pPr indent="0" marL="0">
-              <a:spcAft>
-                <a:spcPts val="200"/>
-              </a:spcAft>
-              <a:buNone/>
-            </a:pPr>
-            <a:r>
-              <a:rPr lang="en-US" sz="1050" dirty="0">
+            <a:endParaRPr lang="en-US" sz="900" dirty="0"/>
+          </a:p>
+          <a:p>
+            <a:pPr marL="0" indent="0">
+              <a:spcAft>
+                <a:spcPts val="200"/>
+              </a:spcAft>
+              <a:buNone/>
+            </a:pPr>
+            <a:endParaRPr lang="en-US" sz="900" dirty="0"/>
+          </a:p>
+          <a:p>
+            <a:pPr marL="0" indent="0">
+              <a:spcAft>
+                <a:spcPts val="200"/>
+              </a:spcAft>
+              <a:buNone/>
+            </a:pPr>
+            <a:r>
+              <a:rPr lang="en-US" sz="900" dirty="0">
                 <a:solidFill>
                   <a:srgbClr val="1E1E1E"/>
                 </a:solidFill>
@@ -5134,17 +4799,17 @@
               </a:rPr>
               <a:t>  === SECONDARY SOURCE: PRESS COVERAGE ===</a:t>
             </a:r>
-            <a:endParaRPr lang="en-US" sz="1050" dirty="0"/>
-          </a:p>
-          <a:p>
-            <a:pPr indent="0" marL="0">
-              <a:spcAft>
-                <a:spcPts val="200"/>
-              </a:spcAft>
-              <a:buNone/>
-            </a:pPr>
-            <a:r>
-              <a:rPr lang="en-US" sz="1050" dirty="0">
+            <a:endParaRPr lang="en-US" sz="900" dirty="0"/>
+          </a:p>
+          <a:p>
+            <a:pPr marL="0" indent="0">
+              <a:spcAft>
+                <a:spcPts val="200"/>
+              </a:spcAft>
+              <a:buNone/>
+            </a:pPr>
+            <a:r>
+              <a:rPr lang="en-US" sz="900" dirty="0">
                 <a:solidFill>
                   <a:srgbClr val="1E1E1E"/>
                 </a:solidFill>
@@ -5154,26 +4819,26 @@
               </a:rPr>
               <a:t>  the headline list</a:t>
             </a:r>
-            <a:endParaRPr lang="en-US" sz="1050" dirty="0"/>
-          </a:p>
-          <a:p>
-            <a:pPr indent="0" marL="0">
-              <a:spcAft>
-                <a:spcPts val="200"/>
-              </a:spcAft>
-              <a:buNone/>
-            </a:pPr>
-            <a:endParaRPr lang="en-US" sz="1050" dirty="0"/>
-          </a:p>
-          <a:p>
-            <a:pPr indent="0" marL="0">
-              <a:spcAft>
-                <a:spcPts val="200"/>
-              </a:spcAft>
-              <a:buNone/>
-            </a:pPr>
-            <a:r>
-              <a:rPr lang="en-US" sz="1050" dirty="0">
+            <a:endParaRPr lang="en-US" sz="900" dirty="0"/>
+          </a:p>
+          <a:p>
+            <a:pPr marL="0" indent="0">
+              <a:spcAft>
+                <a:spcPts val="200"/>
+              </a:spcAft>
+              <a:buNone/>
+            </a:pPr>
+            <a:endParaRPr lang="en-US" sz="900" dirty="0"/>
+          </a:p>
+          <a:p>
+            <a:pPr marL="0" indent="0">
+              <a:spcAft>
+                <a:spcPts val="200"/>
+              </a:spcAft>
+              <a:buNone/>
+            </a:pPr>
+            <a:r>
+              <a:rPr lang="en-US" sz="900" dirty="0">
                 <a:solidFill>
                   <a:srgbClr val="1E1E1E"/>
                 </a:solidFill>
@@ -5183,17 +4848,17 @@
               </a:rPr>
               <a:t>  === ENVIRONMENT: MACRO RISK ===</a:t>
             </a:r>
-            <a:endParaRPr lang="en-US" sz="1050" dirty="0"/>
-          </a:p>
-          <a:p>
-            <a:pPr indent="0" marL="0">
-              <a:spcAft>
-                <a:spcPts val="200"/>
-              </a:spcAft>
-              <a:buNone/>
-            </a:pPr>
-            <a:r>
-              <a:rPr lang="en-US" sz="1050" dirty="0">
+            <a:endParaRPr lang="en-US" sz="900" dirty="0"/>
+          </a:p>
+          <a:p>
+            <a:pPr marL="0" indent="0">
+              <a:spcAft>
+                <a:spcPts val="200"/>
+              </a:spcAft>
+              <a:buNone/>
+            </a:pPr>
+            <a:r>
+              <a:rPr lang="en-US" sz="900" dirty="0">
                 <a:solidFill>
                   <a:srgbClr val="1E1E1E"/>
                 </a:solidFill>
@@ -5203,26 +4868,26 @@
               </a:rPr>
               <a:t>  the filtered alert sentences</a:t>
             </a:r>
-            <a:endParaRPr lang="en-US" sz="1050" dirty="0"/>
-          </a:p>
-          <a:p>
-            <a:pPr indent="0" marL="0">
-              <a:spcAft>
-                <a:spcPts val="200"/>
-              </a:spcAft>
-              <a:buNone/>
-            </a:pPr>
-            <a:endParaRPr lang="en-US" sz="1050" dirty="0"/>
-          </a:p>
-          <a:p>
-            <a:pPr indent="0" marL="0">
-              <a:spcAft>
-                <a:spcPts val="200"/>
-              </a:spcAft>
-              <a:buNone/>
-            </a:pPr>
-            <a:r>
-              <a:rPr lang="en-US" sz="1050" dirty="0">
+            <a:endParaRPr lang="en-US" sz="900" dirty="0"/>
+          </a:p>
+          <a:p>
+            <a:pPr marL="0" indent="0">
+              <a:spcAft>
+                <a:spcPts val="200"/>
+              </a:spcAft>
+              <a:buNone/>
+            </a:pPr>
+            <a:endParaRPr lang="en-US" sz="900" dirty="0"/>
+          </a:p>
+          <a:p>
+            <a:pPr marL="0" indent="0">
+              <a:spcAft>
+                <a:spcPts val="200"/>
+              </a:spcAft>
+              <a:buNone/>
+            </a:pPr>
+            <a:r>
+              <a:rPr lang="en-US" sz="900" dirty="0">
                 <a:solidFill>
                   <a:srgbClr val="1E1E1E"/>
                 </a:solidFill>
@@ -5232,17 +4897,17 @@
               </a:rPr>
               <a:t>  === QUESTION ===</a:t>
             </a:r>
-            <a:endParaRPr lang="en-US" sz="1050" dirty="0"/>
-          </a:p>
-          <a:p>
-            <a:pPr indent="0" marL="0">
-              <a:spcAft>
-                <a:spcPts val="200"/>
-              </a:spcAft>
-              <a:buNone/>
-            </a:pPr>
-            <a:r>
-              <a:rPr lang="en-US" sz="1050" dirty="0">
+            <a:endParaRPr lang="en-US" sz="900" dirty="0"/>
+          </a:p>
+          <a:p>
+            <a:pPr marL="0" indent="0">
+              <a:spcAft>
+                <a:spcPts val="200"/>
+              </a:spcAft>
+              <a:buNone/>
+            </a:pPr>
+            <a:r>
+              <a:rPr lang="en-US" sz="900" dirty="0">
                 <a:solidFill>
                   <a:srgbClr val="1E1E1E"/>
                 </a:solidFill>
@@ -5252,17 +4917,17 @@
               </a:rPr>
               <a:t>  "Summarize what management emphasized this quarter, what analysts should</a:t>
             </a:r>
-            <a:endParaRPr lang="en-US" sz="1050" dirty="0"/>
-          </a:p>
-          <a:p>
-            <a:pPr indent="0" marL="0">
-              <a:spcAft>
-                <a:spcPts val="200"/>
-              </a:spcAft>
-              <a:buNone/>
-            </a:pPr>
-            <a:r>
-              <a:rPr lang="en-US" sz="1050" dirty="0">
+            <a:endParaRPr lang="en-US" sz="900" dirty="0"/>
+          </a:p>
+          <a:p>
+            <a:pPr marL="0" indent="0">
+              <a:spcAft>
+                <a:spcPts val="200"/>
+              </a:spcAft>
+              <a:buNone/>
+            </a:pPr>
+            <a:r>
+              <a:rPr lang="en-US" sz="900" dirty="0">
                 <a:solidFill>
                   <a:srgbClr val="1E1E1E"/>
                 </a:solidFill>
@@ -5272,26 +4937,26 @@
               </a:rPr>
               <a:t>   watch, and any macro risk that could affect it."</a:t>
             </a:r>
-            <a:endParaRPr lang="en-US" sz="1050" dirty="0"/>
-          </a:p>
-          <a:p>
-            <a:pPr indent="0" marL="0">
-              <a:spcAft>
-                <a:spcPts val="200"/>
-              </a:spcAft>
-              <a:buNone/>
-            </a:pPr>
-            <a:endParaRPr lang="en-US" sz="1050" dirty="0"/>
-          </a:p>
-          <a:p>
-            <a:pPr indent="0" marL="0">
-              <a:spcAft>
-                <a:spcPts val="200"/>
-              </a:spcAft>
-              <a:buNone/>
-            </a:pPr>
-            <a:r>
-              <a:rPr lang="en-US" sz="1050" dirty="0">
+            <a:endParaRPr lang="en-US" sz="900" dirty="0"/>
+          </a:p>
+          <a:p>
+            <a:pPr marL="0" indent="0">
+              <a:spcAft>
+                <a:spcPts val="200"/>
+              </a:spcAft>
+              <a:buNone/>
+            </a:pPr>
+            <a:endParaRPr lang="en-US" sz="900" dirty="0"/>
+          </a:p>
+          <a:p>
+            <a:pPr marL="0" indent="0">
+              <a:spcAft>
+                <a:spcPts val="200"/>
+              </a:spcAft>
+              <a:buNone/>
+            </a:pPr>
+            <a:r>
+              <a:rPr lang="en-US" sz="900" dirty="0">
                 <a:solidFill>
                   <a:srgbClr val="1E1E1E"/>
                 </a:solidFill>
@@ -5301,17 +4966,17 @@
               </a:rPr>
               <a:t>Render the returned string in a monospace panel on the page. Below it, show</a:t>
             </a:r>
-            <a:endParaRPr lang="en-US" sz="1050" dirty="0"/>
-          </a:p>
-          <a:p>
-            <a:pPr indent="0" marL="0">
-              <a:spcAft>
-                <a:spcPts val="200"/>
-              </a:spcAft>
-              <a:buNone/>
-            </a:pPr>
-            <a:r>
-              <a:rPr lang="en-US" sz="1050" dirty="0">
+            <a:endParaRPr lang="en-US" sz="900" dirty="0"/>
+          </a:p>
+          <a:p>
+            <a:pPr marL="0" indent="0">
+              <a:spcAft>
+                <a:spcPts val="200"/>
+              </a:spcAft>
+              <a:buNone/>
+            </a:pPr>
+            <a:r>
+              <a:rPr lang="en-US" sz="900" dirty="0">
                 <a:solidFill>
                   <a:srgbClr val="1E1E1E"/>
                 </a:solidFill>
@@ -5321,26 +4986,26 @@
               </a:rPr>
               <a:t>character count and estimated token count (chars / 4).</a:t>
             </a:r>
-            <a:endParaRPr lang="en-US" sz="1050" dirty="0"/>
-          </a:p>
-          <a:p>
-            <a:pPr indent="0" marL="0">
-              <a:spcAft>
-                <a:spcPts val="200"/>
-              </a:spcAft>
-              <a:buNone/>
-            </a:pPr>
-            <a:endParaRPr lang="en-US" sz="1050" dirty="0"/>
-          </a:p>
-          <a:p>
-            <a:pPr indent="0" marL="0">
-              <a:spcAft>
-                <a:spcPts val="200"/>
-              </a:spcAft>
-              <a:buNone/>
-            </a:pPr>
-            <a:r>
-              <a:rPr lang="en-US" sz="1050" dirty="0">
+            <a:endParaRPr lang="en-US" sz="900" dirty="0"/>
+          </a:p>
+          <a:p>
+            <a:pPr marL="0" indent="0">
+              <a:spcAft>
+                <a:spcPts val="200"/>
+              </a:spcAft>
+              <a:buNone/>
+            </a:pPr>
+            <a:endParaRPr lang="en-US" sz="900" dirty="0"/>
+          </a:p>
+          <a:p>
+            <a:pPr marL="0" indent="0">
+              <a:spcAft>
+                <a:spcPts val="200"/>
+              </a:spcAft>
+              <a:buNone/>
+            </a:pPr>
+            <a:r>
+              <a:rPr lang="en-US" sz="900" dirty="0">
                 <a:solidFill>
                   <a:srgbClr val="1E1E1E"/>
                 </a:solidFill>
@@ -5350,17 +5015,17 @@
               </a:rPr>
               <a:t>CONSTRAINT</a:t>
             </a:r>
-            <a:endParaRPr lang="en-US" sz="1050" dirty="0"/>
-          </a:p>
-          <a:p>
-            <a:pPr indent="0" marL="0">
-              <a:spcAft>
-                <a:spcPts val="200"/>
-              </a:spcAft>
-              <a:buNone/>
-            </a:pPr>
-            <a:r>
-              <a:rPr lang="en-US" sz="1050" dirty="0">
+            <a:endParaRPr lang="en-US" sz="900" dirty="0"/>
+          </a:p>
+          <a:p>
+            <a:pPr marL="0" indent="0">
+              <a:spcAft>
+                <a:spcPts val="200"/>
+              </a:spcAft>
+              <a:buNone/>
+            </a:pPr>
+            <a:r>
+              <a:rPr lang="en-US" sz="900" dirty="0">
                 <a:solidFill>
                   <a:srgbClr val="1E1E1E"/>
                 </a:solidFill>
@@ -5370,17 +5035,17 @@
               </a:rPr>
               <a:t>Do not call the model in this step. This step is purely display. The reader</a:t>
             </a:r>
-            <a:endParaRPr lang="en-US" sz="1050" dirty="0"/>
-          </a:p>
-          <a:p>
-            <a:pPr indent="0" marL="0">
-              <a:spcAft>
-                <a:spcPts val="200"/>
-              </a:spcAft>
-              <a:buNone/>
-            </a:pPr>
-            <a:r>
-              <a:rPr lang="en-US" sz="1050" dirty="0">
+            <a:endParaRPr lang="en-US" sz="900" dirty="0"/>
+          </a:p>
+          <a:p>
+            <a:pPr marL="0" indent="0">
+              <a:spcAft>
+                <a:spcPts val="200"/>
+              </a:spcAft>
+              <a:buNone/>
+            </a:pPr>
+            <a:r>
+              <a:rPr lang="en-US" sz="900" dirty="0">
                 <a:solidFill>
                   <a:srgbClr val="1E1E1E"/>
                 </a:solidFill>
@@ -5390,26 +5055,26 @@
               </a:rPr>
               <a:t>must be able to inspect the input before any spend happens.</a:t>
             </a:r>
-            <a:endParaRPr lang="en-US" sz="1050" dirty="0"/>
-          </a:p>
-          <a:p>
-            <a:pPr indent="0" marL="0">
-              <a:spcAft>
-                <a:spcPts val="200"/>
-              </a:spcAft>
-              <a:buNone/>
-            </a:pPr>
-            <a:endParaRPr lang="en-US" sz="1050" dirty="0"/>
-          </a:p>
-          <a:p>
-            <a:pPr indent="0" marL="0">
-              <a:spcAft>
-                <a:spcPts val="200"/>
-              </a:spcAft>
-              <a:buNone/>
-            </a:pPr>
-            <a:r>
-              <a:rPr lang="en-US" sz="1050" dirty="0">
+            <a:endParaRPr lang="en-US" sz="900" dirty="0"/>
+          </a:p>
+          <a:p>
+            <a:pPr marL="0" indent="0">
+              <a:spcAft>
+                <a:spcPts val="200"/>
+              </a:spcAft>
+              <a:buNone/>
+            </a:pPr>
+            <a:endParaRPr lang="en-US" sz="900" dirty="0"/>
+          </a:p>
+          <a:p>
+            <a:pPr marL="0" indent="0">
+              <a:spcAft>
+                <a:spcPts val="200"/>
+              </a:spcAft>
+              <a:buNone/>
+            </a:pPr>
+            <a:r>
+              <a:rPr lang="en-US" sz="900" dirty="0">
                 <a:solidFill>
                   <a:srgbClr val="1E1E1E"/>
                 </a:solidFill>
@@ -5419,17 +5084,17 @@
               </a:rPr>
               <a:t>ACCEPTANCE</a:t>
             </a:r>
-            <a:endParaRPr lang="en-US" sz="1050" dirty="0"/>
-          </a:p>
-          <a:p>
-            <a:pPr indent="0" marL="0">
-              <a:spcAft>
-                <a:spcPts val="200"/>
-              </a:spcAft>
-              <a:buNone/>
-            </a:pPr>
-            <a:r>
-              <a:rPr lang="en-US" sz="1050" dirty="0">
+            <a:endParaRPr lang="en-US" sz="900" dirty="0"/>
+          </a:p>
+          <a:p>
+            <a:pPr marL="0" indent="0">
+              <a:spcAft>
+                <a:spcPts val="200"/>
+              </a:spcAft>
+              <a:buNone/>
+            </a:pPr>
+            <a:r>
+              <a:rPr lang="en-US" sz="900" dirty="0">
                 <a:solidFill>
                   <a:srgbClr val="1E1E1E"/>
                 </a:solidFill>
@@ -5439,17 +5104,17 @@
               </a:rPr>
               <a:t>I see the four labeled sections rendered on screen. The token estimate is a</a:t>
             </a:r>
-            <a:endParaRPr lang="en-US" sz="1050" dirty="0"/>
-          </a:p>
-          <a:p>
-            <a:pPr indent="0" marL="0">
-              <a:spcAft>
-                <a:spcPts val="200"/>
-              </a:spcAft>
-              <a:buNone/>
-            </a:pPr>
-            <a:r>
-              <a:rPr lang="en-US" sz="1050" dirty="0">
+            <a:endParaRPr lang="en-US" sz="900" dirty="0"/>
+          </a:p>
+          <a:p>
+            <a:pPr marL="0" indent="0">
+              <a:spcAft>
+                <a:spcPts val="200"/>
+              </a:spcAft>
+              <a:buNone/>
+            </a:pPr>
+            <a:r>
+              <a:rPr lang="en-US" sz="900" dirty="0">
                 <a:solidFill>
                   <a:srgbClr val="1E1E1E"/>
                 </a:solidFill>
@@ -5459,7 +5124,7 @@
               </a:rPr>
               <a:t>visible number, not hidden in a console log.</a:t>
             </a:r>
-            <a:endParaRPr lang="en-US" sz="1050" dirty="0"/>
+            <a:endParaRPr lang="en-US" sz="900" dirty="0"/>
           </a:p>
         </p:txBody>
       </p:sp>
@@ -5484,7 +5149,7 @@
           <a:bodyPr wrap="square" lIns="0" tIns="0" rIns="0" bIns="0" rtlCol="0" anchor="ctr"/>
           <a:lstStyle/>
           <a:p>
-            <a:pPr algn="ctr" indent="0" marL="0">
+            <a:pPr marL="0" indent="0" algn="ctr">
               <a:buNone/>
             </a:pPr>
             <a:r>
@@ -5518,6 +5183,7 @@
         <a:solidFill>
           <a:srgbClr val="FFFFFF"/>
         </a:solidFill>
+        <a:effectLst/>
       </p:bgPr>
     </p:bg>
     <p:spTree>
@@ -5555,11 +5221,11 @@
           <a:bodyPr wrap="square" lIns="0" tIns="0" rIns="0" bIns="0" rtlCol="0" anchor="ctr"/>
           <a:lstStyle/>
           <a:p>
-            <a:pPr indent="0" marL="0">
-              <a:buNone/>
-            </a:pPr>
-            <a:r>
-              <a:rPr lang="en-US" sz="1200" b="1" spc="400" kern="0" dirty="0">
+            <a:pPr marL="0" indent="0">
+              <a:buNone/>
+            </a:pPr>
+            <a:r>
+              <a:rPr lang="en-US" sz="1200" b="1" kern="0" spc="400" dirty="0">
                 <a:solidFill>
                   <a:srgbClr val="A51C30"/>
                 </a:solidFill>
@@ -5594,7 +5260,7 @@
           <a:bodyPr wrap="square" lIns="0" tIns="0" rIns="0" bIns="0" rtlCol="0" anchor="ctr"/>
           <a:lstStyle/>
           <a:p>
-            <a:pPr indent="0" marL="0">
+            <a:pPr marL="0" indent="0">
               <a:buNone/>
             </a:pPr>
             <a:r>
@@ -5681,11 +5347,11 @@
           <a:bodyPr wrap="square" lIns="0" tIns="0" rIns="0" bIns="0" rtlCol="0" anchor="ctr"/>
           <a:lstStyle/>
           <a:p>
-            <a:pPr indent="0" marL="0">
-              <a:buNone/>
-            </a:pPr>
-            <a:r>
-              <a:rPr lang="en-US" sz="1200" b="1" spc="500" kern="0" dirty="0">
+            <a:pPr marL="0" indent="0">
+              <a:buNone/>
+            </a:pPr>
+            <a:r>
+              <a:rPr lang="en-US" sz="1200" b="1" kern="0" spc="500" dirty="0">
                 <a:solidFill>
                   <a:srgbClr val="A51C30"/>
                 </a:solidFill>
@@ -5720,7 +5386,7 @@
           <a:bodyPr wrap="square" lIns="0" tIns="0" rIns="0" bIns="0" rtlCol="0" anchor="ctr"/>
           <a:lstStyle/>
           <a:p>
-            <a:pPr indent="0" marL="0">
+            <a:pPr marL="0" indent="0">
               <a:buNone/>
             </a:pPr>
             <a:r>
@@ -5759,7 +5425,7 @@
           <a:bodyPr wrap="square" lIns="0" tIns="0" rIns="0" bIns="0" rtlCol="0" anchor="ctr"/>
           <a:lstStyle/>
           <a:p>
-            <a:pPr indent="0" marL="0">
+            <a:pPr marL="0" indent="0">
               <a:buNone/>
             </a:pPr>
             <a:r>
@@ -5823,11 +5489,11 @@
           <a:bodyPr wrap="square" lIns="0" tIns="0" rIns="0" bIns="0" rtlCol="0" anchor="ctr"/>
           <a:lstStyle/>
           <a:p>
-            <a:pPr indent="0" marL="0">
-              <a:buNone/>
-            </a:pPr>
-            <a:r>
-              <a:rPr lang="en-US" sz="1200" b="1" spc="500" kern="0" dirty="0">
+            <a:pPr marL="0" indent="0">
+              <a:buNone/>
+            </a:pPr>
+            <a:r>
+              <a:rPr lang="en-US" sz="1200" b="1" kern="0" spc="500" dirty="0">
                 <a:solidFill>
                   <a:srgbClr val="F3F3F1"/>
                 </a:solidFill>
@@ -5862,7 +5528,7 @@
           <a:bodyPr wrap="square" lIns="0" tIns="0" rIns="0" bIns="0" rtlCol="0" anchor="ctr"/>
           <a:lstStyle/>
           <a:p>
-            <a:pPr indent="0" marL="0">
+            <a:pPr marL="0" indent="0">
               <a:buNone/>
             </a:pPr>
             <a:r>
@@ -6023,45 +5689,6 @@
                 <a:cs typeface="Arial" pitchFamily="34" charset="-120"/>
               </a:rPr>
               <a:t>Aggregate: per speaker, per role group, one overall row.</a:t>
-            </a:r>
-            <a:endParaRPr lang="en-US" sz="1300" dirty="0"/>
-          </a:p>
-        </p:txBody>
-      </p:sp>
-      <p:sp>
-        <p:nvSpPr>
-          <p:cNvPr id="13" name="Text 11"/>
-          <p:cNvSpPr/>
-          <p:nvPr/>
-        </p:nvSpPr>
-        <p:spPr>
-          <a:xfrm>
-            <a:off x="457200" y="6126480"/>
-            <a:ext cx="11247120" cy="320040"/>
-          </a:xfrm>
-          <a:prstGeom prst="rect">
-            <a:avLst/>
-          </a:prstGeom>
-          <a:noFill/>
-          <a:ln/>
-        </p:spPr>
-        <p:txBody>
-          <a:bodyPr wrap="square" lIns="0" tIns="0" rIns="0" bIns="0" rtlCol="0" anchor="ctr"/>
-          <a:lstStyle/>
-          <a:p>
-            <a:pPr algn="ctr" indent="0" marL="0">
-              <a:buNone/>
-            </a:pPr>
-            <a:r>
-              <a:rPr lang="en-US" sz="1300" i="1" dirty="0">
-                <a:solidFill>
-                  <a:srgbClr val="8996A0"/>
-                </a:solidFill>
-                <a:latin typeface="Arial" pitchFamily="34" charset="0"/>
-                <a:ea typeface="Arial" pitchFamily="34" charset="-122"/>
-                <a:cs typeface="Arial" pitchFamily="34" charset="-120"/>
-              </a:rPr>
-              <a:t>BUILD TIME  ·  ABOUT 8 MINUTES</a:t>
             </a:r>
             <a:endParaRPr lang="en-US" sz="1300" dirty="0"/>
           </a:p>
@@ -6083,6 +5710,7 @@
         <a:solidFill>
           <a:srgbClr val="FFFFFF"/>
         </a:solidFill>
+        <a:effectLst/>
       </p:bgPr>
     </p:bg>
     <p:spTree>
@@ -6120,11 +5748,11 @@
           <a:bodyPr wrap="square" lIns="0" tIns="0" rIns="0" bIns="0" rtlCol="0" anchor="ctr"/>
           <a:lstStyle/>
           <a:p>
-            <a:pPr indent="0" marL="0">
-              <a:buNone/>
-            </a:pPr>
-            <a:r>
-              <a:rPr lang="en-US" sz="1200" b="1" spc="400" kern="0" dirty="0">
+            <a:pPr marL="0" indent="0">
+              <a:buNone/>
+            </a:pPr>
+            <a:r>
+              <a:rPr lang="en-US" sz="1200" b="1" kern="0" spc="400" dirty="0">
                 <a:solidFill>
                   <a:srgbClr val="A51C30"/>
                 </a:solidFill>
@@ -6159,7 +5787,7 @@
           <a:bodyPr wrap="square" lIns="0" tIns="0" rIns="0" bIns="0" rtlCol="0" anchor="ctr"/>
           <a:lstStyle/>
           <a:p>
-            <a:pPr indent="0" marL="0">
+            <a:pPr marL="0" indent="0">
               <a:buNone/>
             </a:pPr>
             <a:r>
@@ -6208,8 +5836,8 @@
         </p:nvSpPr>
         <p:spPr>
           <a:xfrm>
-            <a:off x="457200" y="1965960"/>
-            <a:ext cx="11247120" cy="4160520"/>
+            <a:off x="6709024" y="195209"/>
+            <a:ext cx="4995295" cy="6585731"/>
           </a:xfrm>
           <a:prstGeom prst="rect">
             <a:avLst/>
@@ -6271,11 +5899,11 @@
           <a:bodyPr wrap="square" lIns="0" tIns="0" rIns="0" bIns="0" rtlCol="0" anchor="ctr"/>
           <a:lstStyle/>
           <a:p>
-            <a:pPr algn="ctr" indent="0" marL="0">
-              <a:buNone/>
-            </a:pPr>
-            <a:r>
-              <a:rPr lang="en-US" sz="1000" b="1" spc="400" kern="0" dirty="0">
+            <a:pPr marL="0" indent="0" algn="ctr">
+              <a:buNone/>
+            </a:pPr>
+            <a:r>
+              <a:rPr lang="en-US" sz="1000" b="1" kern="0" spc="400" dirty="0">
                 <a:solidFill>
                   <a:srgbClr val="FFFFFF"/>
                 </a:solidFill>
@@ -6283,7 +5911,7 @@
                 <a:ea typeface="Arial" pitchFamily="34" charset="-122"/>
                 <a:cs typeface="Arial" pitchFamily="34" charset="-120"/>
               </a:rPr>
-              <a:t>SUGGESTED PROMPT</a:t>
+              <a:t>EXAMPLE PROMPT</a:t>
             </a:r>
             <a:endParaRPr lang="en-US" sz="1000" dirty="0"/>
           </a:p>
@@ -6297,8 +5925,8 @@
         </p:nvSpPr>
         <p:spPr>
           <a:xfrm>
-            <a:off x="731520" y="2468880"/>
-            <a:ext cx="10698480" cy="3611880"/>
+            <a:off x="6887280" y="1737360"/>
+            <a:ext cx="4638782" cy="3611880"/>
           </a:xfrm>
           <a:prstGeom prst="rect">
             <a:avLst/>
@@ -6310,14 +5938,14 @@
           <a:bodyPr wrap="square" lIns="0" tIns="0" rIns="0" bIns="0" rtlCol="0" anchor="ctr"/>
           <a:lstStyle/>
           <a:p>
-            <a:pPr indent="0" marL="0">
-              <a:spcAft>
-                <a:spcPts val="200"/>
-              </a:spcAft>
-              <a:buNone/>
-            </a:pPr>
-            <a:r>
-              <a:rPr lang="en-US" sz="1050" dirty="0">
+            <a:pPr marL="0" indent="0">
+              <a:spcAft>
+                <a:spcPts val="200"/>
+              </a:spcAft>
+              <a:buNone/>
+            </a:pPr>
+            <a:r>
+              <a:rPr lang="en-US" sz="900" dirty="0">
                 <a:solidFill>
                   <a:srgbClr val="1E1E1E"/>
                 </a:solidFill>
@@ -6327,26 +5955,26 @@
               </a:rPr>
               <a:t>Score sentiment across every transcript turn.</a:t>
             </a:r>
-            <a:endParaRPr lang="en-US" sz="1050" dirty="0"/>
-          </a:p>
-          <a:p>
-            <a:pPr indent="0" marL="0">
-              <a:spcAft>
-                <a:spcPts val="200"/>
-              </a:spcAft>
-              <a:buNone/>
-            </a:pPr>
-            <a:endParaRPr lang="en-US" sz="1050" dirty="0"/>
-          </a:p>
-          <a:p>
-            <a:pPr indent="0" marL="0">
-              <a:spcAft>
-                <a:spcPts val="200"/>
-              </a:spcAft>
-              <a:buNone/>
-            </a:pPr>
-            <a:r>
-              <a:rPr lang="en-US" sz="1050" dirty="0">
+            <a:endParaRPr lang="en-US" sz="900" dirty="0"/>
+          </a:p>
+          <a:p>
+            <a:pPr marL="0" indent="0">
+              <a:spcAft>
+                <a:spcPts val="200"/>
+              </a:spcAft>
+              <a:buNone/>
+            </a:pPr>
+            <a:endParaRPr lang="en-US" sz="900" dirty="0"/>
+          </a:p>
+          <a:p>
+            <a:pPr marL="0" indent="0">
+              <a:spcAft>
+                <a:spcPts val="200"/>
+              </a:spcAft>
+              <a:buNone/>
+            </a:pPr>
+            <a:r>
+              <a:rPr lang="en-US" sz="900" dirty="0">
                 <a:solidFill>
                   <a:srgbClr val="1E1E1E"/>
                 </a:solidFill>
@@ -6356,17 +5984,17 @@
               </a:rPr>
               <a:t>CONTEXT</a:t>
             </a:r>
-            <a:endParaRPr lang="en-US" sz="1050" dirty="0"/>
-          </a:p>
-          <a:p>
-            <a:pPr indent="0" marL="0">
-              <a:spcAft>
-                <a:spcPts val="200"/>
-              </a:spcAft>
-              <a:buNone/>
-            </a:pPr>
-            <a:r>
-              <a:rPr lang="en-US" sz="1050" dirty="0">
+            <a:endParaRPr lang="en-US" sz="900" dirty="0"/>
+          </a:p>
+          <a:p>
+            <a:pPr marL="0" indent="0">
+              <a:spcAft>
+                <a:spcPts val="200"/>
+              </a:spcAft>
+              <a:buNone/>
+            </a:pPr>
+            <a:r>
+              <a:rPr lang="en-US" sz="900" dirty="0">
                 <a:solidFill>
                   <a:srgbClr val="1E1E1E"/>
                 </a:solidFill>
@@ -6376,17 +6004,17 @@
               </a:rPr>
               <a:t>The parsed transcript is in the `transcript` array. Each row has a msg</a:t>
             </a:r>
-            <a:endParaRPr lang="en-US" sz="1050" dirty="0"/>
-          </a:p>
-          <a:p>
-            <a:pPr indent="0" marL="0">
-              <a:spcAft>
-                <a:spcPts val="200"/>
-              </a:spcAft>
-              <a:buNone/>
-            </a:pPr>
-            <a:r>
-              <a:rPr lang="en-US" sz="1050" dirty="0">
+            <a:endParaRPr lang="en-US" sz="900" dirty="0"/>
+          </a:p>
+          <a:p>
+            <a:pPr marL="0" indent="0">
+              <a:spcAft>
+                <a:spcPts val="200"/>
+              </a:spcAft>
+              <a:buNone/>
+            </a:pPr>
+            <a:r>
+              <a:rPr lang="en-US" sz="900" dirty="0">
                 <a:solidFill>
                   <a:srgbClr val="1E1E1E"/>
                 </a:solidFill>
@@ -6396,26 +6024,26 @@
               </a:rPr>
               <a:t>field (the speaker's text) and word count is msg.split(/\s+/).length.</a:t>
             </a:r>
-            <a:endParaRPr lang="en-US" sz="1050" dirty="0"/>
-          </a:p>
-          <a:p>
-            <a:pPr indent="0" marL="0">
-              <a:spcAft>
-                <a:spcPts val="200"/>
-              </a:spcAft>
-              <a:buNone/>
-            </a:pPr>
-            <a:endParaRPr lang="en-US" sz="1050" dirty="0"/>
-          </a:p>
-          <a:p>
-            <a:pPr indent="0" marL="0">
-              <a:spcAft>
-                <a:spcPts val="200"/>
-              </a:spcAft>
-              <a:buNone/>
-            </a:pPr>
-            <a:r>
-              <a:rPr lang="en-US" sz="1050" dirty="0">
+            <a:endParaRPr lang="en-US" sz="900" dirty="0"/>
+          </a:p>
+          <a:p>
+            <a:pPr marL="0" indent="0">
+              <a:spcAft>
+                <a:spcPts val="200"/>
+              </a:spcAft>
+              <a:buNone/>
+            </a:pPr>
+            <a:endParaRPr lang="en-US" sz="900" dirty="0"/>
+          </a:p>
+          <a:p>
+            <a:pPr marL="0" indent="0">
+              <a:spcAft>
+                <a:spcPts val="200"/>
+              </a:spcAft>
+              <a:buNone/>
+            </a:pPr>
+            <a:r>
+              <a:rPr lang="en-US" sz="900" dirty="0">
                 <a:solidFill>
                   <a:srgbClr val="1E1E1E"/>
                 </a:solidFill>
@@ -6425,17 +6053,17 @@
               </a:rPr>
               <a:t>TASK</a:t>
             </a:r>
-            <a:endParaRPr lang="en-US" sz="1050" dirty="0"/>
-          </a:p>
-          <a:p>
-            <a:pPr indent="0" marL="0">
-              <a:spcAft>
-                <a:spcPts val="200"/>
-              </a:spcAft>
-              <a:buNone/>
-            </a:pPr>
-            <a:r>
-              <a:rPr lang="en-US" sz="1050" dirty="0">
+            <a:endParaRPr lang="en-US" sz="900" dirty="0"/>
+          </a:p>
+          <a:p>
+            <a:pPr marL="0" indent="0">
+              <a:spcAft>
+                <a:spcPts val="200"/>
+              </a:spcAft>
+              <a:buNone/>
+            </a:pPr>
+            <a:r>
+              <a:rPr lang="en-US" sz="900" dirty="0">
                 <a:solidFill>
                   <a:srgbClr val="1E1E1E"/>
                 </a:solidFill>
@@ -6445,17 +6073,17 @@
               </a:rPr>
               <a:t>For each row, call OpenRouter (model: "mistralai/mistral-small-3.2-24b")</a:t>
             </a:r>
-            <a:endParaRPr lang="en-US" sz="1050" dirty="0"/>
-          </a:p>
-          <a:p>
-            <a:pPr indent="0" marL="0">
-              <a:spcAft>
-                <a:spcPts val="200"/>
-              </a:spcAft>
-              <a:buNone/>
-            </a:pPr>
-            <a:r>
-              <a:rPr lang="en-US" sz="1050" dirty="0">
+            <a:endParaRPr lang="en-US" sz="900" dirty="0"/>
+          </a:p>
+          <a:p>
+            <a:pPr marL="0" indent="0">
+              <a:spcAft>
+                <a:spcPts val="200"/>
+              </a:spcAft>
+              <a:buNone/>
+            </a:pPr>
+            <a:r>
+              <a:rPr lang="en-US" sz="900" dirty="0">
                 <a:solidFill>
                   <a:srgbClr val="1E1E1E"/>
                 </a:solidFill>
@@ -6465,17 +6093,17 @@
               </a:rPr>
               <a:t>with response_format = json_schema, requiring exactly:</a:t>
             </a:r>
-            <a:endParaRPr lang="en-US" sz="1050" dirty="0"/>
-          </a:p>
-          <a:p>
-            <a:pPr indent="0" marL="0">
-              <a:spcAft>
-                <a:spcPts val="200"/>
-              </a:spcAft>
-              <a:buNone/>
-            </a:pPr>
-            <a:r>
-              <a:rPr lang="en-US" sz="1050" dirty="0">
+            <a:endParaRPr lang="en-US" sz="900" dirty="0"/>
+          </a:p>
+          <a:p>
+            <a:pPr marL="0" indent="0">
+              <a:spcAft>
+                <a:spcPts val="200"/>
+              </a:spcAft>
+              <a:buNone/>
+            </a:pPr>
+            <a:r>
+              <a:rPr lang="en-US" sz="900" dirty="0">
                 <a:solidFill>
                   <a:srgbClr val="1E1E1E"/>
                 </a:solidFill>
@@ -6485,17 +6113,17 @@
               </a:rPr>
               <a:t>  { positive_phrases: string[], negative_phrases: string[] }</a:t>
             </a:r>
-            <a:endParaRPr lang="en-US" sz="1050" dirty="0"/>
-          </a:p>
-          <a:p>
-            <a:pPr indent="0" marL="0">
-              <a:spcAft>
-                <a:spcPts val="200"/>
-              </a:spcAft>
-              <a:buNone/>
-            </a:pPr>
-            <a:r>
-              <a:rPr lang="en-US" sz="1050" dirty="0">
+            <a:endParaRPr lang="en-US" sz="900" dirty="0"/>
+          </a:p>
+          <a:p>
+            <a:pPr marL="0" indent="0">
+              <a:spcAft>
+                <a:spcPts val="200"/>
+              </a:spcAft>
+              <a:buNone/>
+            </a:pPr>
+            <a:r>
+              <a:rPr lang="en-US" sz="900" dirty="0">
                 <a:solidFill>
                   <a:srgbClr val="1E1E1E"/>
                 </a:solidFill>
@@ -6505,17 +6133,17 @@
               </a:rPr>
               <a:t>additionalProperties: false, strict: true. Each phrase is one to five words,</a:t>
             </a:r>
-            <a:endParaRPr lang="en-US" sz="1050" dirty="0"/>
-          </a:p>
-          <a:p>
-            <a:pPr indent="0" marL="0">
-              <a:spcAft>
-                <a:spcPts val="200"/>
-              </a:spcAft>
-              <a:buNone/>
-            </a:pPr>
-            <a:r>
-              <a:rPr lang="en-US" sz="1050" dirty="0">
+            <a:endParaRPr lang="en-US" sz="900" dirty="0"/>
+          </a:p>
+          <a:p>
+            <a:pPr marL="0" indent="0">
+              <a:spcAft>
+                <a:spcPts val="200"/>
+              </a:spcAft>
+              <a:buNone/>
+            </a:pPr>
+            <a:r>
+              <a:rPr lang="en-US" sz="900" dirty="0">
                 <a:solidFill>
                   <a:srgbClr val="1E1E1E"/>
                 </a:solidFill>
@@ -6525,26 +6153,26 @@
               </a:rPr>
               <a:t>taken from the passage.</a:t>
             </a:r>
-            <a:endParaRPr lang="en-US" sz="1050" dirty="0"/>
-          </a:p>
-          <a:p>
-            <a:pPr indent="0" marL="0">
-              <a:spcAft>
-                <a:spcPts val="200"/>
-              </a:spcAft>
-              <a:buNone/>
-            </a:pPr>
-            <a:endParaRPr lang="en-US" sz="1050" dirty="0"/>
-          </a:p>
-          <a:p>
-            <a:pPr indent="0" marL="0">
-              <a:spcAft>
-                <a:spcPts val="200"/>
-              </a:spcAft>
-              <a:buNone/>
-            </a:pPr>
-            <a:r>
-              <a:rPr lang="en-US" sz="1050" dirty="0">
+            <a:endParaRPr lang="en-US" sz="900" dirty="0"/>
+          </a:p>
+          <a:p>
+            <a:pPr marL="0" indent="0">
+              <a:spcAft>
+                <a:spcPts val="200"/>
+              </a:spcAft>
+              <a:buNone/>
+            </a:pPr>
+            <a:endParaRPr lang="en-US" sz="900" dirty="0"/>
+          </a:p>
+          <a:p>
+            <a:pPr marL="0" indent="0">
+              <a:spcAft>
+                <a:spcPts val="200"/>
+              </a:spcAft>
+              <a:buNone/>
+            </a:pPr>
+            <a:r>
+              <a:rPr lang="en-US" sz="900" dirty="0">
                 <a:solidFill>
                   <a:srgbClr val="1E1E1E"/>
                 </a:solidFill>
@@ -6554,17 +6182,17 @@
               </a:rPr>
               <a:t>For each returned response, JavaScript computes:</a:t>
             </a:r>
-            <a:endParaRPr lang="en-US" sz="1050" dirty="0"/>
-          </a:p>
-          <a:p>
-            <a:pPr indent="0" marL="0">
-              <a:spcAft>
-                <a:spcPts val="200"/>
-              </a:spcAft>
-              <a:buNone/>
-            </a:pPr>
-            <a:r>
-              <a:rPr lang="en-US" sz="1050" dirty="0">
+            <a:endParaRPr lang="en-US" sz="900" dirty="0"/>
+          </a:p>
+          <a:p>
+            <a:pPr marL="0" indent="0">
+              <a:spcAft>
+                <a:spcPts val="200"/>
+              </a:spcAft>
+              <a:buNone/>
+            </a:pPr>
+            <a:r>
+              <a:rPr lang="en-US" sz="900" dirty="0">
                 <a:solidFill>
                   <a:srgbClr val="1E1E1E"/>
                 </a:solidFill>
@@ -6574,17 +6202,17 @@
               </a:rPr>
               <a:t>  positive_count  = positive_phrases.length</a:t>
             </a:r>
-            <a:endParaRPr lang="en-US" sz="1050" dirty="0"/>
-          </a:p>
-          <a:p>
-            <a:pPr indent="0" marL="0">
-              <a:spcAft>
-                <a:spcPts val="200"/>
-              </a:spcAft>
-              <a:buNone/>
-            </a:pPr>
-            <a:r>
-              <a:rPr lang="en-US" sz="1050" dirty="0">
+            <a:endParaRPr lang="en-US" sz="900" dirty="0"/>
+          </a:p>
+          <a:p>
+            <a:pPr marL="0" indent="0">
+              <a:spcAft>
+                <a:spcPts val="200"/>
+              </a:spcAft>
+              <a:buNone/>
+            </a:pPr>
+            <a:r>
+              <a:rPr lang="en-US" sz="900" dirty="0">
                 <a:solidFill>
                   <a:srgbClr val="1E1E1E"/>
                 </a:solidFill>
@@ -6594,17 +6222,17 @@
               </a:rPr>
               <a:t>  negative_count  = negative_phrases.length</a:t>
             </a:r>
-            <a:endParaRPr lang="en-US" sz="1050" dirty="0"/>
-          </a:p>
-          <a:p>
-            <a:pPr indent="0" marL="0">
-              <a:spcAft>
-                <a:spcPts val="200"/>
-              </a:spcAft>
-              <a:buNone/>
-            </a:pPr>
-            <a:r>
-              <a:rPr lang="en-US" sz="1050" dirty="0">
+            <a:endParaRPr lang="en-US" sz="900" dirty="0"/>
+          </a:p>
+          <a:p>
+            <a:pPr marL="0" indent="0">
+              <a:spcAft>
+                <a:spcPts val="200"/>
+              </a:spcAft>
+              <a:buNone/>
+            </a:pPr>
+            <a:r>
+              <a:rPr lang="en-US" sz="900" dirty="0">
                 <a:solidFill>
                   <a:srgbClr val="1E1E1E"/>
                 </a:solidFill>
@@ -6614,17 +6242,17 @@
               </a:rPr>
               <a:t>  density         = (positive_count - negative_count) / word_count</a:t>
             </a:r>
-            <a:endParaRPr lang="en-US" sz="1050" dirty="0"/>
-          </a:p>
-          <a:p>
-            <a:pPr indent="0" marL="0">
-              <a:spcAft>
-                <a:spcPts val="200"/>
-              </a:spcAft>
-              <a:buNone/>
-            </a:pPr>
-            <a:r>
-              <a:rPr lang="en-US" sz="1050" dirty="0">
+            <a:endParaRPr lang="en-US" sz="900" dirty="0"/>
+          </a:p>
+          <a:p>
+            <a:pPr marL="0" indent="0">
+              <a:spcAft>
+                <a:spcPts val="200"/>
+              </a:spcAft>
+              <a:buNone/>
+            </a:pPr>
+            <a:r>
+              <a:rPr lang="en-US" sz="900" dirty="0">
                 <a:solidFill>
                   <a:srgbClr val="1E1E1E"/>
                 </a:solidFill>
@@ -6634,17 +6262,17 @@
               </a:rPr>
               <a:t>  label           = density &gt;  0.005 ? "positive"</a:t>
             </a:r>
-            <a:endParaRPr lang="en-US" sz="1050" dirty="0"/>
-          </a:p>
-          <a:p>
-            <a:pPr indent="0" marL="0">
-              <a:spcAft>
-                <a:spcPts val="200"/>
-              </a:spcAft>
-              <a:buNone/>
-            </a:pPr>
-            <a:r>
-              <a:rPr lang="en-US" sz="1050" dirty="0">
+            <a:endParaRPr lang="en-US" sz="900" dirty="0"/>
+          </a:p>
+          <a:p>
+            <a:pPr marL="0" indent="0">
+              <a:spcAft>
+                <a:spcPts val="200"/>
+              </a:spcAft>
+              <a:buNone/>
+            </a:pPr>
+            <a:r>
+              <a:rPr lang="en-US" sz="900" dirty="0">
                 <a:solidFill>
                   <a:srgbClr val="1E1E1E"/>
                 </a:solidFill>
@@ -6654,17 +6282,17 @@
               </a:rPr>
               <a:t>                  : density &lt; -0.005 ? "negative"</a:t>
             </a:r>
-            <a:endParaRPr lang="en-US" sz="1050" dirty="0"/>
-          </a:p>
-          <a:p>
-            <a:pPr indent="0" marL="0">
-              <a:spcAft>
-                <a:spcPts val="200"/>
-              </a:spcAft>
-              <a:buNone/>
-            </a:pPr>
-            <a:r>
-              <a:rPr lang="en-US" sz="1050" dirty="0">
+            <a:endParaRPr lang="en-US" sz="900" dirty="0"/>
+          </a:p>
+          <a:p>
+            <a:pPr marL="0" indent="0">
+              <a:spcAft>
+                <a:spcPts val="200"/>
+              </a:spcAft>
+              <a:buNone/>
+            </a:pPr>
+            <a:r>
+              <a:rPr lang="en-US" sz="900" dirty="0">
                 <a:solidFill>
                   <a:srgbClr val="1E1E1E"/>
                 </a:solidFill>
@@ -6674,26 +6302,26 @@
               </a:rPr>
               <a:t>                  : "neutral"</a:t>
             </a:r>
-            <a:endParaRPr lang="en-US" sz="1050" dirty="0"/>
-          </a:p>
-          <a:p>
-            <a:pPr indent="0" marL="0">
-              <a:spcAft>
-                <a:spcPts val="200"/>
-              </a:spcAft>
-              <a:buNone/>
-            </a:pPr>
-            <a:endParaRPr lang="en-US" sz="1050" dirty="0"/>
-          </a:p>
-          <a:p>
-            <a:pPr indent="0" marL="0">
-              <a:spcAft>
-                <a:spcPts val="200"/>
-              </a:spcAft>
-              <a:buNone/>
-            </a:pPr>
-            <a:r>
-              <a:rPr lang="en-US" sz="1050" dirty="0">
+            <a:endParaRPr lang="en-US" sz="900" dirty="0"/>
+          </a:p>
+          <a:p>
+            <a:pPr marL="0" indent="0">
+              <a:spcAft>
+                <a:spcPts val="200"/>
+              </a:spcAft>
+              <a:buNone/>
+            </a:pPr>
+            <a:endParaRPr lang="en-US" sz="900" dirty="0"/>
+          </a:p>
+          <a:p>
+            <a:pPr marL="0" indent="0">
+              <a:spcAft>
+                <a:spcPts val="200"/>
+              </a:spcAft>
+              <a:buNone/>
+            </a:pPr>
+            <a:r>
+              <a:rPr lang="en-US" sz="900" dirty="0">
                 <a:solidFill>
                   <a:srgbClr val="1E1E1E"/>
                 </a:solidFill>
@@ -6703,17 +6331,17 @@
               </a:rPr>
               <a:t>Wrap each fetch in retry: three tries, exponential backoff (1s, 2s, 4s). On</a:t>
             </a:r>
-            <a:endParaRPr lang="en-US" sz="1050" dirty="0"/>
-          </a:p>
-          <a:p>
-            <a:pPr indent="0" marL="0">
-              <a:spcAft>
-                <a:spcPts val="200"/>
-              </a:spcAft>
-              <a:buNone/>
-            </a:pPr>
-            <a:r>
-              <a:rPr lang="en-US" sz="1050" dirty="0">
+            <a:endParaRPr lang="en-US" sz="900" dirty="0"/>
+          </a:p>
+          <a:p>
+            <a:pPr marL="0" indent="0">
+              <a:spcAft>
+                <a:spcPts val="200"/>
+              </a:spcAft>
+              <a:buNone/>
+            </a:pPr>
+            <a:r>
+              <a:rPr lang="en-US" sz="900" dirty="0">
                 <a:solidFill>
                   <a:srgbClr val="1E1E1E"/>
                 </a:solidFill>
@@ -6723,26 +6351,26 @@
               </a:rPr>
               <a:t>final failure, log the row index and continue.</a:t>
             </a:r>
-            <a:endParaRPr lang="en-US" sz="1050" dirty="0"/>
-          </a:p>
-          <a:p>
-            <a:pPr indent="0" marL="0">
-              <a:spcAft>
-                <a:spcPts val="200"/>
-              </a:spcAft>
-              <a:buNone/>
-            </a:pPr>
-            <a:endParaRPr lang="en-US" sz="1050" dirty="0"/>
-          </a:p>
-          <a:p>
-            <a:pPr indent="0" marL="0">
-              <a:spcAft>
-                <a:spcPts val="200"/>
-              </a:spcAft>
-              <a:buNone/>
-            </a:pPr>
-            <a:r>
-              <a:rPr lang="en-US" sz="1050" dirty="0">
+            <a:endParaRPr lang="en-US" sz="900" dirty="0"/>
+          </a:p>
+          <a:p>
+            <a:pPr marL="0" indent="0">
+              <a:spcAft>
+                <a:spcPts val="200"/>
+              </a:spcAft>
+              <a:buNone/>
+            </a:pPr>
+            <a:endParaRPr lang="en-US" sz="900" dirty="0"/>
+          </a:p>
+          <a:p>
+            <a:pPr marL="0" indent="0">
+              <a:spcAft>
+                <a:spcPts val="200"/>
+              </a:spcAft>
+              <a:buNone/>
+            </a:pPr>
+            <a:r>
+              <a:rPr lang="en-US" sz="900" dirty="0">
                 <a:solidFill>
                   <a:srgbClr val="1E1E1E"/>
                 </a:solidFill>
@@ -6752,17 +6380,17 @@
               </a:rPr>
               <a:t>Render a table: speaker | title | density | label | phrases. Under it,</a:t>
             </a:r>
-            <a:endParaRPr lang="en-US" sz="1050" dirty="0"/>
-          </a:p>
-          <a:p>
-            <a:pPr indent="0" marL="0">
-              <a:spcAft>
-                <a:spcPts val="200"/>
-              </a:spcAft>
-              <a:buNone/>
-            </a:pPr>
-            <a:r>
-              <a:rPr lang="en-US" sz="1050" dirty="0">
+            <a:endParaRPr lang="en-US" sz="900" dirty="0"/>
+          </a:p>
+          <a:p>
+            <a:pPr marL="0" indent="0">
+              <a:spcAft>
+                <a:spcPts val="200"/>
+              </a:spcAft>
+              <a:buNone/>
+            </a:pPr>
+            <a:r>
+              <a:rPr lang="en-US" sz="900" dirty="0">
                 <a:solidFill>
                   <a:srgbClr val="1E1E1E"/>
                 </a:solidFill>
@@ -6772,17 +6400,17 @@
               </a:rPr>
               <a:t>aggregate rows: per speaker (sum counts, re-derive density and label), per</a:t>
             </a:r>
-            <a:endParaRPr lang="en-US" sz="1050" dirty="0"/>
-          </a:p>
-          <a:p>
-            <a:pPr indent="0" marL="0">
-              <a:spcAft>
-                <a:spcPts val="200"/>
-              </a:spcAft>
-              <a:buNone/>
-            </a:pPr>
-            <a:r>
-              <a:rPr lang="en-US" sz="1050" dirty="0">
+            <a:endParaRPr lang="en-US" sz="900" dirty="0"/>
+          </a:p>
+          <a:p>
+            <a:pPr marL="0" indent="0">
+              <a:spcAft>
+                <a:spcPts val="200"/>
+              </a:spcAft>
+              <a:buNone/>
+            </a:pPr>
+            <a:r>
+              <a:rPr lang="en-US" sz="900" dirty="0">
                 <a:solidFill>
                   <a:srgbClr val="1E1E1E"/>
                 </a:solidFill>
@@ -6792,26 +6420,26 @@
               </a:rPr>
               <a:t>role group (Management vs Analyst), and one overall row.</a:t>
             </a:r>
-            <a:endParaRPr lang="en-US" sz="1050" dirty="0"/>
-          </a:p>
-          <a:p>
-            <a:pPr indent="0" marL="0">
-              <a:spcAft>
-                <a:spcPts val="200"/>
-              </a:spcAft>
-              <a:buNone/>
-            </a:pPr>
-            <a:endParaRPr lang="en-US" sz="1050" dirty="0"/>
-          </a:p>
-          <a:p>
-            <a:pPr indent="0" marL="0">
-              <a:spcAft>
-                <a:spcPts val="200"/>
-              </a:spcAft>
-              <a:buNone/>
-            </a:pPr>
-            <a:r>
-              <a:rPr lang="en-US" sz="1050" dirty="0">
+            <a:endParaRPr lang="en-US" sz="900" dirty="0"/>
+          </a:p>
+          <a:p>
+            <a:pPr marL="0" indent="0">
+              <a:spcAft>
+                <a:spcPts val="200"/>
+              </a:spcAft>
+              <a:buNone/>
+            </a:pPr>
+            <a:endParaRPr lang="en-US" sz="900" dirty="0"/>
+          </a:p>
+          <a:p>
+            <a:pPr marL="0" indent="0">
+              <a:spcAft>
+                <a:spcPts val="200"/>
+              </a:spcAft>
+              <a:buNone/>
+            </a:pPr>
+            <a:r>
+              <a:rPr lang="en-US" sz="900" dirty="0">
                 <a:solidFill>
                   <a:srgbClr val="1E1E1E"/>
                 </a:solidFill>
@@ -6821,17 +6449,17 @@
               </a:rPr>
               <a:t>CONSTRAINT</a:t>
             </a:r>
-            <a:endParaRPr lang="en-US" sz="1050" dirty="0"/>
-          </a:p>
-          <a:p>
-            <a:pPr indent="0" marL="0">
-              <a:spcAft>
-                <a:spcPts val="200"/>
-              </a:spcAft>
-              <a:buNone/>
-            </a:pPr>
-            <a:r>
-              <a:rPr lang="en-US" sz="1050" dirty="0">
+            <a:endParaRPr lang="en-US" sz="900" dirty="0"/>
+          </a:p>
+          <a:p>
+            <a:pPr marL="0" indent="0">
+              <a:spcAft>
+                <a:spcPts val="200"/>
+              </a:spcAft>
+              <a:buNone/>
+            </a:pPr>
+            <a:r>
+              <a:rPr lang="en-US" sz="900" dirty="0">
                 <a:solidFill>
                   <a:srgbClr val="1E1E1E"/>
                 </a:solidFill>
@@ -6841,17 +6469,17 @@
               </a:rPr>
               <a:t>The model returns phrases only. Every count, ratio, and label is JavaScript.</a:t>
             </a:r>
-            <a:endParaRPr lang="en-US" sz="1050" dirty="0"/>
-          </a:p>
-          <a:p>
-            <a:pPr indent="0" marL="0">
-              <a:spcAft>
-                <a:spcPts val="200"/>
-              </a:spcAft>
-              <a:buNone/>
-            </a:pPr>
-            <a:r>
-              <a:rPr lang="en-US" sz="1050" dirty="0">
+            <a:endParaRPr lang="en-US" sz="900" dirty="0"/>
+          </a:p>
+          <a:p>
+            <a:pPr marL="0" indent="0">
+              <a:spcAft>
+                <a:spcPts val="200"/>
+              </a:spcAft>
+              <a:buNone/>
+            </a:pPr>
+            <a:r>
+              <a:rPr lang="en-US" sz="900" dirty="0">
                 <a:solidFill>
                   <a:srgbClr val="1E1E1E"/>
                 </a:solidFill>
@@ -6861,26 +6489,26 @@
               </a:rPr>
               <a:t>Show progress text: "Scored N of M turns" that updates as the loop runs.</a:t>
             </a:r>
-            <a:endParaRPr lang="en-US" sz="1050" dirty="0"/>
-          </a:p>
-          <a:p>
-            <a:pPr indent="0" marL="0">
-              <a:spcAft>
-                <a:spcPts val="200"/>
-              </a:spcAft>
-              <a:buNone/>
-            </a:pPr>
-            <a:endParaRPr lang="en-US" sz="1050" dirty="0"/>
-          </a:p>
-          <a:p>
-            <a:pPr indent="0" marL="0">
-              <a:spcAft>
-                <a:spcPts val="200"/>
-              </a:spcAft>
-              <a:buNone/>
-            </a:pPr>
-            <a:r>
-              <a:rPr lang="en-US" sz="1050" dirty="0">
+            <a:endParaRPr lang="en-US" sz="900" dirty="0"/>
+          </a:p>
+          <a:p>
+            <a:pPr marL="0" indent="0">
+              <a:spcAft>
+                <a:spcPts val="200"/>
+              </a:spcAft>
+              <a:buNone/>
+            </a:pPr>
+            <a:endParaRPr lang="en-US" sz="900" dirty="0"/>
+          </a:p>
+          <a:p>
+            <a:pPr marL="0" indent="0">
+              <a:spcAft>
+                <a:spcPts val="200"/>
+              </a:spcAft>
+              <a:buNone/>
+            </a:pPr>
+            <a:r>
+              <a:rPr lang="en-US" sz="900" dirty="0">
                 <a:solidFill>
                   <a:srgbClr val="1E1E1E"/>
                 </a:solidFill>
@@ -6890,17 +6518,17 @@
               </a:rPr>
               <a:t>ACCEPTANCE</a:t>
             </a:r>
-            <a:endParaRPr lang="en-US" sz="1050" dirty="0"/>
-          </a:p>
-          <a:p>
-            <a:pPr indent="0" marL="0">
-              <a:spcAft>
-                <a:spcPts val="200"/>
-              </a:spcAft>
-              <a:buNone/>
-            </a:pPr>
-            <a:r>
-              <a:rPr lang="en-US" sz="1050" dirty="0">
+            <a:endParaRPr lang="en-US" sz="900" dirty="0"/>
+          </a:p>
+          <a:p>
+            <a:pPr marL="0" indent="0">
+              <a:spcAft>
+                <a:spcPts val="200"/>
+              </a:spcAft>
+              <a:buNone/>
+            </a:pPr>
+            <a:r>
+              <a:rPr lang="en-US" sz="900" dirty="0">
                 <a:solidFill>
                   <a:srgbClr val="1E1E1E"/>
                 </a:solidFill>
@@ -6910,17 +6538,17 @@
               </a:rPr>
               <a:t>The table renders one row per turn plus the aggregate rows. If I stop the</a:t>
             </a:r>
-            <a:endParaRPr lang="en-US" sz="1050" dirty="0"/>
-          </a:p>
-          <a:p>
-            <a:pPr indent="0" marL="0">
-              <a:spcAft>
-                <a:spcPts val="200"/>
-              </a:spcAft>
-              <a:buNone/>
-            </a:pPr>
-            <a:r>
-              <a:rPr lang="en-US" sz="1050" dirty="0">
+            <a:endParaRPr lang="en-US" sz="900" dirty="0"/>
+          </a:p>
+          <a:p>
+            <a:pPr marL="0" indent="0">
+              <a:spcAft>
+                <a:spcPts val="200"/>
+              </a:spcAft>
+              <a:buNone/>
+            </a:pPr>
+            <a:r>
+              <a:rPr lang="en-US" sz="900" dirty="0">
                 <a:solidFill>
                   <a:srgbClr val="1E1E1E"/>
                 </a:solidFill>
@@ -6930,7 +6558,7 @@
               </a:rPr>
               <a:t>network mid-loop, the rows already scored stay on screen.</a:t>
             </a:r>
-            <a:endParaRPr lang="en-US" sz="1050" dirty="0"/>
+            <a:endParaRPr lang="en-US" sz="900" dirty="0"/>
           </a:p>
         </p:txBody>
       </p:sp>
@@ -6942,8 +6570,8 @@
         </p:nvSpPr>
         <p:spPr>
           <a:xfrm>
-            <a:off x="457200" y="6263640"/>
-            <a:ext cx="11247120" cy="320040"/>
+            <a:off x="313362" y="3801949"/>
+            <a:ext cx="5861407" cy="320040"/>
           </a:xfrm>
           <a:prstGeom prst="rect">
             <a:avLst/>
@@ -6955,7 +6583,7 @@
           <a:bodyPr wrap="square" lIns="0" tIns="0" rIns="0" bIns="0" rtlCol="0" anchor="ctr"/>
           <a:lstStyle/>
           <a:p>
-            <a:pPr algn="ctr" indent="0" marL="0">
+            <a:pPr marL="0" indent="0" algn="ctr">
               <a:buNone/>
             </a:pPr>
             <a:r>
@@ -6989,6 +6617,7 @@
         <a:solidFill>
           <a:srgbClr val="FFFFFF"/>
         </a:solidFill>
+        <a:effectLst/>
       </p:bgPr>
     </p:bg>
     <p:spTree>
@@ -7026,11 +6655,11 @@
           <a:bodyPr wrap="square" lIns="0" tIns="0" rIns="0" bIns="0" rtlCol="0" anchor="ctr"/>
           <a:lstStyle/>
           <a:p>
-            <a:pPr indent="0" marL="0">
-              <a:buNone/>
-            </a:pPr>
-            <a:r>
-              <a:rPr lang="en-US" sz="1200" b="1" spc="400" kern="0" dirty="0">
+            <a:pPr marL="0" indent="0">
+              <a:buNone/>
+            </a:pPr>
+            <a:r>
+              <a:rPr lang="en-US" sz="1200" b="1" kern="0" spc="400" dirty="0">
                 <a:solidFill>
                   <a:srgbClr val="A51C30"/>
                 </a:solidFill>
@@ -7065,7 +6694,7 @@
           <a:bodyPr wrap="square" lIns="0" tIns="0" rIns="0" bIns="0" rtlCol="0" anchor="ctr"/>
           <a:lstStyle/>
           <a:p>
-            <a:pPr indent="0" marL="0">
+            <a:pPr marL="0" indent="0">
               <a:buNone/>
             </a:pPr>
             <a:r>
@@ -7152,11 +6781,11 @@
           <a:bodyPr wrap="square" lIns="0" tIns="0" rIns="0" bIns="0" rtlCol="0" anchor="ctr"/>
           <a:lstStyle/>
           <a:p>
-            <a:pPr indent="0" marL="0">
-              <a:buNone/>
-            </a:pPr>
-            <a:r>
-              <a:rPr lang="en-US" sz="1200" b="1" spc="500" kern="0" dirty="0">
+            <a:pPr marL="0" indent="0">
+              <a:buNone/>
+            </a:pPr>
+            <a:r>
+              <a:rPr lang="en-US" sz="1200" b="1" kern="0" spc="500" dirty="0">
                 <a:solidFill>
                   <a:srgbClr val="A51C30"/>
                 </a:solidFill>
@@ -7191,7 +6820,7 @@
           <a:bodyPr wrap="square" lIns="0" tIns="0" rIns="0" bIns="0" rtlCol="0" anchor="ctr"/>
           <a:lstStyle/>
           <a:p>
-            <a:pPr indent="0" marL="0">
+            <a:pPr marL="0" indent="0">
               <a:buNone/>
             </a:pPr>
             <a:r>
@@ -7230,7 +6859,7 @@
           <a:bodyPr wrap="square" lIns="0" tIns="0" rIns="0" bIns="0" rtlCol="0" anchor="ctr"/>
           <a:lstStyle/>
           <a:p>
-            <a:pPr indent="0" marL="0">
+            <a:pPr marL="0" indent="0">
               <a:buNone/>
             </a:pPr>
             <a:r>
@@ -7294,11 +6923,11 @@
           <a:bodyPr wrap="square" lIns="0" tIns="0" rIns="0" bIns="0" rtlCol="0" anchor="ctr"/>
           <a:lstStyle/>
           <a:p>
-            <a:pPr indent="0" marL="0">
-              <a:buNone/>
-            </a:pPr>
-            <a:r>
-              <a:rPr lang="en-US" sz="1200" b="1" spc="500" kern="0" dirty="0">
+            <a:pPr marL="0" indent="0">
+              <a:buNone/>
+            </a:pPr>
+            <a:r>
+              <a:rPr lang="en-US" sz="1200" b="1" kern="0" spc="500" dirty="0">
                 <a:solidFill>
                   <a:srgbClr val="F3F3F1"/>
                 </a:solidFill>
@@ -7333,7 +6962,7 @@
           <a:bodyPr wrap="square" lIns="0" tIns="0" rIns="0" bIns="0" rtlCol="0" anchor="ctr"/>
           <a:lstStyle/>
           <a:p>
-            <a:pPr indent="0" marL="0">
+            <a:pPr marL="0" indent="0">
               <a:buNone/>
             </a:pPr>
             <a:r>
@@ -7473,45 +7102,6 @@
                 <a:cs typeface="Arial" pitchFamily="34" charset="-120"/>
               </a:rPr>
               <a:t>Render two panels: an entities panel and a claims panel.</a:t>
-            </a:r>
-            <a:endParaRPr lang="en-US" sz="1300" dirty="0"/>
-          </a:p>
-        </p:txBody>
-      </p:sp>
-      <p:sp>
-        <p:nvSpPr>
-          <p:cNvPr id="13" name="Text 11"/>
-          <p:cNvSpPr/>
-          <p:nvPr/>
-        </p:nvSpPr>
-        <p:spPr>
-          <a:xfrm>
-            <a:off x="457200" y="6126480"/>
-            <a:ext cx="11247120" cy="320040"/>
-          </a:xfrm>
-          <a:prstGeom prst="rect">
-            <a:avLst/>
-          </a:prstGeom>
-          <a:noFill/>
-          <a:ln/>
-        </p:spPr>
-        <p:txBody>
-          <a:bodyPr wrap="square" lIns="0" tIns="0" rIns="0" bIns="0" rtlCol="0" anchor="ctr"/>
-          <a:lstStyle/>
-          <a:p>
-            <a:pPr algn="ctr" indent="0" marL="0">
-              <a:buNone/>
-            </a:pPr>
-            <a:r>
-              <a:rPr lang="en-US" sz="1300" i="1" dirty="0">
-                <a:solidFill>
-                  <a:srgbClr val="8996A0"/>
-                </a:solidFill>
-                <a:latin typeface="Arial" pitchFamily="34" charset="0"/>
-                <a:ea typeface="Arial" pitchFamily="34" charset="-122"/>
-                <a:cs typeface="Arial" pitchFamily="34" charset="-120"/>
-              </a:rPr>
-              <a:t>BUILD TIME  ·  ABOUT 8 MINUTES</a:t>
             </a:r>
             <a:endParaRPr lang="en-US" sz="1300" dirty="0"/>
           </a:p>
@@ -7533,6 +7123,7 @@
         <a:solidFill>
           <a:srgbClr val="FFFFFF"/>
         </a:solidFill>
+        <a:effectLst/>
       </p:bgPr>
     </p:bg>
     <p:spTree>
@@ -7570,11 +7161,11 @@
           <a:bodyPr wrap="square" lIns="0" tIns="0" rIns="0" bIns="0" rtlCol="0" anchor="ctr"/>
           <a:lstStyle/>
           <a:p>
-            <a:pPr indent="0" marL="0">
-              <a:buNone/>
-            </a:pPr>
-            <a:r>
-              <a:rPr lang="en-US" sz="1200" b="1" spc="400" kern="0" dirty="0">
+            <a:pPr marL="0" indent="0">
+              <a:buNone/>
+            </a:pPr>
+            <a:r>
+              <a:rPr lang="en-US" sz="1200" b="1" kern="0" spc="400" dirty="0">
                 <a:solidFill>
                   <a:srgbClr val="A51C30"/>
                 </a:solidFill>
@@ -7597,7 +7188,7 @@
         <p:spPr>
           <a:xfrm>
             <a:off x="457200" y="777240"/>
-            <a:ext cx="11247120" cy="822960"/>
+            <a:ext cx="6395663" cy="822960"/>
           </a:xfrm>
           <a:prstGeom prst="rect">
             <a:avLst/>
@@ -7609,7 +7200,7 @@
           <a:bodyPr wrap="square" lIns="0" tIns="0" rIns="0" bIns="0" rtlCol="0" anchor="ctr"/>
           <a:lstStyle/>
           <a:p>
-            <a:pPr indent="0" marL="0">
+            <a:pPr marL="0" indent="0">
               <a:buNone/>
             </a:pPr>
             <a:r>
@@ -7658,8 +7249,8 @@
         </p:nvSpPr>
         <p:spPr>
           <a:xfrm>
-            <a:off x="457200" y="1965960"/>
-            <a:ext cx="11247120" cy="4160520"/>
+            <a:off x="6852863" y="184937"/>
+            <a:ext cx="4851457" cy="6398737"/>
           </a:xfrm>
           <a:prstGeom prst="rect">
             <a:avLst/>
@@ -7721,11 +7312,11 @@
           <a:bodyPr wrap="square" lIns="0" tIns="0" rIns="0" bIns="0" rtlCol="0" anchor="ctr"/>
           <a:lstStyle/>
           <a:p>
-            <a:pPr algn="ctr" indent="0" marL="0">
-              <a:buNone/>
-            </a:pPr>
-            <a:r>
-              <a:rPr lang="en-US" sz="1000" b="1" spc="400" kern="0" dirty="0">
+            <a:pPr marL="0" indent="0" algn="ctr">
+              <a:buNone/>
+            </a:pPr>
+            <a:r>
+              <a:rPr lang="en-US" sz="1000" b="1" kern="0" spc="400" dirty="0">
                 <a:solidFill>
                   <a:srgbClr val="FFFFFF"/>
                 </a:solidFill>
@@ -7733,7 +7324,7 @@
                 <a:ea typeface="Arial" pitchFamily="34" charset="-122"/>
                 <a:cs typeface="Arial" pitchFamily="34" charset="-120"/>
               </a:rPr>
-              <a:t>SUGGESTED PROMPT</a:t>
+              <a:t>EXAMPLE PROMPT</a:t>
             </a:r>
             <a:endParaRPr lang="en-US" sz="1000" dirty="0"/>
           </a:p>
@@ -7747,8 +7338,8 @@
         </p:nvSpPr>
         <p:spPr>
           <a:xfrm>
-            <a:off x="731520" y="2468880"/>
-            <a:ext cx="10698480" cy="3611880"/>
+            <a:off x="7072215" y="1349768"/>
+            <a:ext cx="4412751" cy="3611880"/>
           </a:xfrm>
           <a:prstGeom prst="rect">
             <a:avLst/>
@@ -7760,14 +7351,14 @@
           <a:bodyPr wrap="square" lIns="0" tIns="0" rIns="0" bIns="0" rtlCol="0" anchor="ctr"/>
           <a:lstStyle/>
           <a:p>
-            <a:pPr indent="0" marL="0">
-              <a:spcAft>
-                <a:spcPts val="200"/>
-              </a:spcAft>
-              <a:buNone/>
-            </a:pPr>
-            <a:r>
-              <a:rPr lang="en-US" sz="1050" dirty="0">
+            <a:pPr marL="0" indent="0">
+              <a:spcAft>
+                <a:spcPts val="200"/>
+              </a:spcAft>
+              <a:buNone/>
+            </a:pPr>
+            <a:r>
+              <a:rPr lang="en-US" sz="800" dirty="0">
                 <a:solidFill>
                   <a:srgbClr val="1E1E1E"/>
                 </a:solidFill>
@@ -7777,26 +7368,26 @@
               </a:rPr>
               <a:t>Extract structured facts from every transcript turn.</a:t>
             </a:r>
-            <a:endParaRPr lang="en-US" sz="1050" dirty="0"/>
-          </a:p>
-          <a:p>
-            <a:pPr indent="0" marL="0">
-              <a:spcAft>
-                <a:spcPts val="200"/>
-              </a:spcAft>
-              <a:buNone/>
-            </a:pPr>
-            <a:endParaRPr lang="en-US" sz="1050" dirty="0"/>
-          </a:p>
-          <a:p>
-            <a:pPr indent="0" marL="0">
-              <a:spcAft>
-                <a:spcPts val="200"/>
-              </a:spcAft>
-              <a:buNone/>
-            </a:pPr>
-            <a:r>
-              <a:rPr lang="en-US" sz="1050" dirty="0">
+            <a:endParaRPr lang="en-US" sz="800" dirty="0"/>
+          </a:p>
+          <a:p>
+            <a:pPr marL="0" indent="0">
+              <a:spcAft>
+                <a:spcPts val="200"/>
+              </a:spcAft>
+              <a:buNone/>
+            </a:pPr>
+            <a:endParaRPr lang="en-US" sz="800" dirty="0"/>
+          </a:p>
+          <a:p>
+            <a:pPr marL="0" indent="0">
+              <a:spcAft>
+                <a:spcPts val="200"/>
+              </a:spcAft>
+              <a:buNone/>
+            </a:pPr>
+            <a:r>
+              <a:rPr lang="en-US" sz="800" dirty="0">
                 <a:solidFill>
                   <a:srgbClr val="1E1E1E"/>
                 </a:solidFill>
@@ -7806,17 +7397,17 @@
               </a:rPr>
               <a:t>CONTEXT</a:t>
             </a:r>
-            <a:endParaRPr lang="en-US" sz="1050" dirty="0"/>
-          </a:p>
-          <a:p>
-            <a:pPr indent="0" marL="0">
-              <a:spcAft>
-                <a:spcPts val="200"/>
-              </a:spcAft>
-              <a:buNone/>
-            </a:pPr>
-            <a:r>
-              <a:rPr lang="en-US" sz="1050" dirty="0">
+            <a:endParaRPr lang="en-US" sz="800" dirty="0"/>
+          </a:p>
+          <a:p>
+            <a:pPr marL="0" indent="0">
+              <a:spcAft>
+                <a:spcPts val="200"/>
+              </a:spcAft>
+              <a:buNone/>
+            </a:pPr>
+            <a:r>
+              <a:rPr lang="en-US" sz="800" dirty="0">
                 <a:solidFill>
                   <a:srgbClr val="1E1E1E"/>
                 </a:solidFill>
@@ -7826,26 +7417,26 @@
               </a:rPr>
               <a:t>Same loop shape as the sentiment step, different schema.</a:t>
             </a:r>
-            <a:endParaRPr lang="en-US" sz="1050" dirty="0"/>
-          </a:p>
-          <a:p>
-            <a:pPr indent="0" marL="0">
-              <a:spcAft>
-                <a:spcPts val="200"/>
-              </a:spcAft>
-              <a:buNone/>
-            </a:pPr>
-            <a:endParaRPr lang="en-US" sz="1050" dirty="0"/>
-          </a:p>
-          <a:p>
-            <a:pPr indent="0" marL="0">
-              <a:spcAft>
-                <a:spcPts val="200"/>
-              </a:spcAft>
-              <a:buNone/>
-            </a:pPr>
-            <a:r>
-              <a:rPr lang="en-US" sz="1050" dirty="0">
+            <a:endParaRPr lang="en-US" sz="800" dirty="0"/>
+          </a:p>
+          <a:p>
+            <a:pPr marL="0" indent="0">
+              <a:spcAft>
+                <a:spcPts val="200"/>
+              </a:spcAft>
+              <a:buNone/>
+            </a:pPr>
+            <a:endParaRPr lang="en-US" sz="800" dirty="0"/>
+          </a:p>
+          <a:p>
+            <a:pPr marL="0" indent="0">
+              <a:spcAft>
+                <a:spcPts val="200"/>
+              </a:spcAft>
+              <a:buNone/>
+            </a:pPr>
+            <a:r>
+              <a:rPr lang="en-US" sz="800" dirty="0">
                 <a:solidFill>
                   <a:srgbClr val="1E1E1E"/>
                 </a:solidFill>
@@ -7855,17 +7446,17 @@
               </a:rPr>
               <a:t>TASK</a:t>
             </a:r>
-            <a:endParaRPr lang="en-US" sz="1050" dirty="0"/>
-          </a:p>
-          <a:p>
-            <a:pPr indent="0" marL="0">
-              <a:spcAft>
-                <a:spcPts val="200"/>
-              </a:spcAft>
-              <a:buNone/>
-            </a:pPr>
-            <a:r>
-              <a:rPr lang="en-US" sz="1050" dirty="0">
+            <a:endParaRPr lang="en-US" sz="800" dirty="0"/>
+          </a:p>
+          <a:p>
+            <a:pPr marL="0" indent="0">
+              <a:spcAft>
+                <a:spcPts val="200"/>
+              </a:spcAft>
+              <a:buNone/>
+            </a:pPr>
+            <a:r>
+              <a:rPr lang="en-US" sz="800" dirty="0">
                 <a:solidFill>
                   <a:srgbClr val="1E1E1E"/>
                 </a:solidFill>
@@ -7875,17 +7466,17 @@
               </a:rPr>
               <a:t>For each transcript row, call OpenRouter with response_format = json_schema</a:t>
             </a:r>
-            <a:endParaRPr lang="en-US" sz="1050" dirty="0"/>
-          </a:p>
-          <a:p>
-            <a:pPr indent="0" marL="0">
-              <a:spcAft>
-                <a:spcPts val="200"/>
-              </a:spcAft>
-              <a:buNone/>
-            </a:pPr>
-            <a:r>
-              <a:rPr lang="en-US" sz="1050" dirty="0">
+            <a:endParaRPr lang="en-US" sz="800" dirty="0"/>
+          </a:p>
+          <a:p>
+            <a:pPr marL="0" indent="0">
+              <a:spcAft>
+                <a:spcPts val="200"/>
+              </a:spcAft>
+              <a:buNone/>
+            </a:pPr>
+            <a:r>
+              <a:rPr lang="en-US" sz="800" dirty="0">
                 <a:solidFill>
                   <a:srgbClr val="1E1E1E"/>
                 </a:solidFill>
@@ -7895,17 +7486,17 @@
               </a:rPr>
               <a:t>requiring exactly:</a:t>
             </a:r>
-            <a:endParaRPr lang="en-US" sz="1050" dirty="0"/>
-          </a:p>
-          <a:p>
-            <a:pPr indent="0" marL="0">
-              <a:spcAft>
-                <a:spcPts val="200"/>
-              </a:spcAft>
-              <a:buNone/>
-            </a:pPr>
-            <a:r>
-              <a:rPr lang="en-US" sz="1050" dirty="0">
+            <a:endParaRPr lang="en-US" sz="800" dirty="0"/>
+          </a:p>
+          <a:p>
+            <a:pPr marL="0" indent="0">
+              <a:spcAft>
+                <a:spcPts val="200"/>
+              </a:spcAft>
+              <a:buNone/>
+            </a:pPr>
+            <a:r>
+              <a:rPr lang="en-US" sz="800" dirty="0">
                 <a:solidFill>
                   <a:srgbClr val="1E1E1E"/>
                 </a:solidFill>
@@ -7915,17 +7506,17 @@
               </a:rPr>
               <a:t>  companies:                  string[]   (named third parties only, NEVER</a:t>
             </a:r>
-            <a:endParaRPr lang="en-US" sz="1050" dirty="0"/>
-          </a:p>
-          <a:p>
-            <a:pPr indent="0" marL="0">
-              <a:spcAft>
-                <a:spcPts val="200"/>
-              </a:spcAft>
-              <a:buNone/>
-            </a:pPr>
-            <a:r>
-              <a:rPr lang="en-US" sz="1050" dirty="0">
+            <a:endParaRPr lang="en-US" sz="800" dirty="0"/>
+          </a:p>
+          <a:p>
+            <a:pPr marL="0" indent="0">
+              <a:spcAft>
+                <a:spcPts val="200"/>
+              </a:spcAft>
+              <a:buNone/>
+            </a:pPr>
+            <a:r>
+              <a:rPr lang="en-US" sz="800" dirty="0">
                 <a:solidFill>
                   <a:srgbClr val="1E1E1E"/>
                 </a:solidFill>
@@ -7935,17 +7526,17 @@
               </a:rPr>
               <a:t>                                          the reporting company itself)</a:t>
             </a:r>
-            <a:endParaRPr lang="en-US" sz="1050" dirty="0"/>
-          </a:p>
-          <a:p>
-            <a:pPr indent="0" marL="0">
-              <a:spcAft>
-                <a:spcPts val="200"/>
-              </a:spcAft>
-              <a:buNone/>
-            </a:pPr>
-            <a:r>
-              <a:rPr lang="en-US" sz="1050" dirty="0">
+            <a:endParaRPr lang="en-US" sz="800" dirty="0"/>
+          </a:p>
+          <a:p>
+            <a:pPr marL="0" indent="0">
+              <a:spcAft>
+                <a:spcPts val="200"/>
+              </a:spcAft>
+              <a:buNone/>
+            </a:pPr>
+            <a:r>
+              <a:rPr lang="en-US" sz="800" dirty="0">
                 <a:solidFill>
                   <a:srgbClr val="1E1E1E"/>
                 </a:solidFill>
@@ -7955,17 +7546,17 @@
               </a:rPr>
               <a:t>  executives:                 { name: string, role: string }[]</a:t>
             </a:r>
-            <a:endParaRPr lang="en-US" sz="1050" dirty="0"/>
-          </a:p>
-          <a:p>
-            <a:pPr indent="0" marL="0">
-              <a:spcAft>
-                <a:spcPts val="200"/>
-              </a:spcAft>
-              <a:buNone/>
-            </a:pPr>
-            <a:r>
-              <a:rPr lang="en-US" sz="1050" dirty="0">
+            <a:endParaRPr lang="en-US" sz="800" dirty="0"/>
+          </a:p>
+          <a:p>
+            <a:pPr marL="0" indent="0">
+              <a:spcAft>
+                <a:spcPts val="200"/>
+              </a:spcAft>
+              <a:buNone/>
+            </a:pPr>
+            <a:r>
+              <a:rPr lang="en-US" sz="800" dirty="0">
                 <a:solidFill>
                   <a:srgbClr val="1E1E1E"/>
                 </a:solidFill>
@@ -7975,17 +7566,17 @@
               </a:rPr>
               <a:t>  products:                   string[]   (distinct products, services,</a:t>
             </a:r>
-            <a:endParaRPr lang="en-US" sz="1050" dirty="0"/>
-          </a:p>
-          <a:p>
-            <a:pPr indent="0" marL="0">
-              <a:spcAft>
-                <a:spcPts val="200"/>
-              </a:spcAft>
-              <a:buNone/>
-            </a:pPr>
-            <a:r>
-              <a:rPr lang="en-US" sz="1050" dirty="0">
+            <a:endParaRPr lang="en-US" sz="800" dirty="0"/>
+          </a:p>
+          <a:p>
+            <a:pPr marL="0" indent="0">
+              <a:spcAft>
+                <a:spcPts val="200"/>
+              </a:spcAft>
+              <a:buNone/>
+            </a:pPr>
+            <a:r>
+              <a:rPr lang="en-US" sz="800" dirty="0">
                 <a:solidFill>
                   <a:srgbClr val="1E1E1E"/>
                 </a:solidFill>
@@ -7995,17 +7586,17 @@
               </a:rPr>
               <a:t>                                          business segments)</a:t>
             </a:r>
-            <a:endParaRPr lang="en-US" sz="1050" dirty="0"/>
-          </a:p>
-          <a:p>
-            <a:pPr indent="0" marL="0">
-              <a:spcAft>
-                <a:spcPts val="200"/>
-              </a:spcAft>
-              <a:buNone/>
-            </a:pPr>
-            <a:r>
-              <a:rPr lang="en-US" sz="1050" dirty="0">
+            <a:endParaRPr lang="en-US" sz="800" dirty="0"/>
+          </a:p>
+          <a:p>
+            <a:pPr marL="0" indent="0">
+              <a:spcAft>
+                <a:spcPts val="200"/>
+              </a:spcAft>
+              <a:buNone/>
+            </a:pPr>
+            <a:r>
+              <a:rPr lang="en-US" sz="800" dirty="0">
                 <a:solidFill>
                   <a:srgbClr val="1E1E1E"/>
                 </a:solidFill>
@@ -8015,17 +7606,17 @@
               </a:rPr>
               <a:t>  financial_figures:          { figure: string, metric: string }[]</a:t>
             </a:r>
-            <a:endParaRPr lang="en-US" sz="1050" dirty="0"/>
-          </a:p>
-          <a:p>
-            <a:pPr indent="0" marL="0">
-              <a:spcAft>
-                <a:spcPts val="200"/>
-              </a:spcAft>
-              <a:buNone/>
-            </a:pPr>
-            <a:r>
-              <a:rPr lang="en-US" sz="1050" dirty="0">
+            <a:endParaRPr lang="en-US" sz="800" dirty="0"/>
+          </a:p>
+          <a:p>
+            <a:pPr marL="0" indent="0">
+              <a:spcAft>
+                <a:spcPts val="200"/>
+              </a:spcAft>
+              <a:buNone/>
+            </a:pPr>
+            <a:r>
+              <a:rPr lang="en-US" sz="800" dirty="0">
                 <a:solidFill>
                   <a:srgbClr val="1E1E1E"/>
                 </a:solidFill>
@@ -8035,17 +7626,17 @@
               </a:rPr>
               <a:t>                              A bare "$51B" fails. "$51B in iPhone revenue"</a:t>
             </a:r>
-            <a:endParaRPr lang="en-US" sz="1050" dirty="0"/>
-          </a:p>
-          <a:p>
-            <a:pPr indent="0" marL="0">
-              <a:spcAft>
-                <a:spcPts val="200"/>
-              </a:spcAft>
-              <a:buNone/>
-            </a:pPr>
-            <a:r>
-              <a:rPr lang="en-US" sz="1050" dirty="0">
+            <a:endParaRPr lang="en-US" sz="800" dirty="0"/>
+          </a:p>
+          <a:p>
+            <a:pPr marL="0" indent="0">
+              <a:spcAft>
+                <a:spcPts val="200"/>
+              </a:spcAft>
+              <a:buNone/>
+            </a:pPr>
+            <a:r>
+              <a:rPr lang="en-US" sz="800" dirty="0">
                 <a:solidFill>
                   <a:srgbClr val="1E1E1E"/>
                 </a:solidFill>
@@ -8055,17 +7646,17 @@
               </a:rPr>
               <a:t>                              qualifies.</a:t>
             </a:r>
-            <a:endParaRPr lang="en-US" sz="1050" dirty="0"/>
-          </a:p>
-          <a:p>
-            <a:pPr indent="0" marL="0">
-              <a:spcAft>
-                <a:spcPts val="200"/>
-              </a:spcAft>
-              <a:buNone/>
-            </a:pPr>
-            <a:r>
-              <a:rPr lang="en-US" sz="1050" dirty="0">
+            <a:endParaRPr lang="en-US" sz="800" dirty="0"/>
+          </a:p>
+          <a:p>
+            <a:pPr marL="0" indent="0">
+              <a:spcAft>
+                <a:spcPts val="200"/>
+              </a:spcAft>
+              <a:buNone/>
+            </a:pPr>
+            <a:r>
+              <a:rPr lang="en-US" sz="800" dirty="0">
                 <a:solidFill>
                   <a:srgbClr val="1E1E1E"/>
                 </a:solidFill>
@@ -8075,17 +7666,17 @@
               </a:rPr>
               <a:t>  forward_looking_statements: string[]   (verbatim claims about the future)</a:t>
             </a:r>
-            <a:endParaRPr lang="en-US" sz="1050" dirty="0"/>
-          </a:p>
-          <a:p>
-            <a:pPr indent="0" marL="0">
-              <a:spcAft>
-                <a:spcPts val="200"/>
-              </a:spcAft>
-              <a:buNone/>
-            </a:pPr>
-            <a:r>
-              <a:rPr lang="en-US" sz="1050" dirty="0">
+            <a:endParaRPr lang="en-US" sz="800" dirty="0"/>
+          </a:p>
+          <a:p>
+            <a:pPr marL="0" indent="0">
+              <a:spcAft>
+                <a:spcPts val="200"/>
+              </a:spcAft>
+              <a:buNone/>
+            </a:pPr>
+            <a:r>
+              <a:rPr lang="en-US" sz="800" dirty="0">
                 <a:solidFill>
                   <a:srgbClr val="1E1E1E"/>
                 </a:solidFill>
@@ -8095,17 +7686,17 @@
               </a:rPr>
               <a:t>additionalProperties: false everywhere. All five fields required. Empty</a:t>
             </a:r>
-            <a:endParaRPr lang="en-US" sz="1050" dirty="0"/>
-          </a:p>
-          <a:p>
-            <a:pPr indent="0" marL="0">
-              <a:spcAft>
-                <a:spcPts val="200"/>
-              </a:spcAft>
-              <a:buNone/>
-            </a:pPr>
-            <a:r>
-              <a:rPr lang="en-US" sz="1050" dirty="0">
+            <a:endParaRPr lang="en-US" sz="800" dirty="0"/>
+          </a:p>
+          <a:p>
+            <a:pPr marL="0" indent="0">
+              <a:spcAft>
+                <a:spcPts val="200"/>
+              </a:spcAft>
+              <a:buNone/>
+            </a:pPr>
+            <a:r>
+              <a:rPr lang="en-US" sz="800" dirty="0">
                 <a:solidFill>
                   <a:srgbClr val="1E1E1E"/>
                 </a:solidFill>
@@ -8115,26 +7706,26 @@
               </a:rPr>
               <a:t>arrays allowed.</a:t>
             </a:r>
-            <a:endParaRPr lang="en-US" sz="1050" dirty="0"/>
-          </a:p>
-          <a:p>
-            <a:pPr indent="0" marL="0">
-              <a:spcAft>
-                <a:spcPts val="200"/>
-              </a:spcAft>
-              <a:buNone/>
-            </a:pPr>
-            <a:endParaRPr lang="en-US" sz="1050" dirty="0"/>
-          </a:p>
-          <a:p>
-            <a:pPr indent="0" marL="0">
-              <a:spcAft>
-                <a:spcPts val="200"/>
-              </a:spcAft>
-              <a:buNone/>
-            </a:pPr>
-            <a:r>
-              <a:rPr lang="en-US" sz="1050" dirty="0">
+            <a:endParaRPr lang="en-US" sz="800" dirty="0"/>
+          </a:p>
+          <a:p>
+            <a:pPr marL="0" indent="0">
+              <a:spcAft>
+                <a:spcPts val="200"/>
+              </a:spcAft>
+              <a:buNone/>
+            </a:pPr>
+            <a:endParaRPr lang="en-US" sz="800" dirty="0"/>
+          </a:p>
+          <a:p>
+            <a:pPr marL="0" indent="0">
+              <a:spcAft>
+                <a:spcPts val="200"/>
+              </a:spcAft>
+              <a:buNone/>
+            </a:pPr>
+            <a:r>
+              <a:rPr lang="en-US" sz="800" dirty="0">
                 <a:solidFill>
                   <a:srgbClr val="1E1E1E"/>
                 </a:solidFill>
@@ -8144,17 +7735,17 @@
               </a:rPr>
               <a:t>After the loop, JavaScript aggregates:</a:t>
             </a:r>
-            <a:endParaRPr lang="en-US" sz="1050" dirty="0"/>
-          </a:p>
-          <a:p>
-            <a:pPr indent="0" marL="0">
-              <a:spcAft>
-                <a:spcPts val="200"/>
-              </a:spcAft>
-              <a:buNone/>
-            </a:pPr>
-            <a:r>
-              <a:rPr lang="en-US" sz="1050" dirty="0">
+            <a:endParaRPr lang="en-US" sz="800" dirty="0"/>
+          </a:p>
+          <a:p>
+            <a:pPr marL="0" indent="0">
+              <a:spcAft>
+                <a:spcPts val="200"/>
+              </a:spcAft>
+              <a:buNone/>
+            </a:pPr>
+            <a:r>
+              <a:rPr lang="en-US" sz="800" dirty="0">
                 <a:solidFill>
                   <a:srgbClr val="1E1E1E"/>
                 </a:solidFill>
@@ -8164,17 +7755,17 @@
               </a:rPr>
               <a:t>  Entities: dedupe companies, executives (by name), products across turns.</a:t>
             </a:r>
-            <a:endParaRPr lang="en-US" sz="1050" dirty="0"/>
-          </a:p>
-          <a:p>
-            <a:pPr indent="0" marL="0">
-              <a:spcAft>
-                <a:spcPts val="200"/>
-              </a:spcAft>
-              <a:buNone/>
-            </a:pPr>
-            <a:r>
-              <a:rPr lang="en-US" sz="1050" dirty="0">
+            <a:endParaRPr lang="en-US" sz="800" dirty="0"/>
+          </a:p>
+          <a:p>
+            <a:pPr marL="0" indent="0">
+              <a:spcAft>
+                <a:spcPts val="200"/>
+              </a:spcAft>
+              <a:buNone/>
+            </a:pPr>
+            <a:r>
+              <a:rPr lang="en-US" sz="800" dirty="0">
                 <a:solidFill>
                   <a:srgbClr val="1E1E1E"/>
                 </a:solidFill>
@@ -8184,17 +7775,17 @@
               </a:rPr>
               <a:t>  Claims:   keep every financial_figure and every forward_looking_statement,</a:t>
             </a:r>
-            <a:endParaRPr lang="en-US" sz="1050" dirty="0"/>
-          </a:p>
-          <a:p>
-            <a:pPr indent="0" marL="0">
-              <a:spcAft>
-                <a:spcPts val="200"/>
-              </a:spcAft>
-              <a:buNone/>
-            </a:pPr>
-            <a:r>
-              <a:rPr lang="en-US" sz="1050" dirty="0">
+            <a:endParaRPr lang="en-US" sz="800" dirty="0"/>
+          </a:p>
+          <a:p>
+            <a:pPr marL="0" indent="0">
+              <a:spcAft>
+                <a:spcPts val="200"/>
+              </a:spcAft>
+              <a:buNone/>
+            </a:pPr>
+            <a:r>
+              <a:rPr lang="en-US" sz="800" dirty="0">
                 <a:solidFill>
                   <a:srgbClr val="1E1E1E"/>
                 </a:solidFill>
@@ -8204,26 +7795,26 @@
               </a:rPr>
               <a:t>            each attributed to the speaker who said it.</a:t>
             </a:r>
-            <a:endParaRPr lang="en-US" sz="1050" dirty="0"/>
-          </a:p>
-          <a:p>
-            <a:pPr indent="0" marL="0">
-              <a:spcAft>
-                <a:spcPts val="200"/>
-              </a:spcAft>
-              <a:buNone/>
-            </a:pPr>
-            <a:endParaRPr lang="en-US" sz="1050" dirty="0"/>
-          </a:p>
-          <a:p>
-            <a:pPr indent="0" marL="0">
-              <a:spcAft>
-                <a:spcPts val="200"/>
-              </a:spcAft>
-              <a:buNone/>
-            </a:pPr>
-            <a:r>
-              <a:rPr lang="en-US" sz="1050" dirty="0">
+            <a:endParaRPr lang="en-US" sz="800" dirty="0"/>
+          </a:p>
+          <a:p>
+            <a:pPr marL="0" indent="0">
+              <a:spcAft>
+                <a:spcPts val="200"/>
+              </a:spcAft>
+              <a:buNone/>
+            </a:pPr>
+            <a:endParaRPr lang="en-US" sz="800" dirty="0"/>
+          </a:p>
+          <a:p>
+            <a:pPr marL="0" indent="0">
+              <a:spcAft>
+                <a:spcPts val="200"/>
+              </a:spcAft>
+              <a:buNone/>
+            </a:pPr>
+            <a:r>
+              <a:rPr lang="en-US" sz="800" dirty="0">
                 <a:solidFill>
                   <a:srgbClr val="1E1E1E"/>
                 </a:solidFill>
@@ -8233,17 +7824,17 @@
               </a:rPr>
               <a:t>Render two panels on the page:</a:t>
             </a:r>
-            <a:endParaRPr lang="en-US" sz="1050" dirty="0"/>
-          </a:p>
-          <a:p>
-            <a:pPr indent="0" marL="0">
-              <a:spcAft>
-                <a:spcPts val="200"/>
-              </a:spcAft>
-              <a:buNone/>
-            </a:pPr>
-            <a:r>
-              <a:rPr lang="en-US" sz="1050" dirty="0">
+            <a:endParaRPr lang="en-US" sz="800" dirty="0"/>
+          </a:p>
+          <a:p>
+            <a:pPr marL="0" indent="0">
+              <a:spcAft>
+                <a:spcPts val="200"/>
+              </a:spcAft>
+              <a:buNone/>
+            </a:pPr>
+            <a:r>
+              <a:rPr lang="en-US" sz="800" dirty="0">
                 <a:solidFill>
                   <a:srgbClr val="1E1E1E"/>
                 </a:solidFill>
@@ -8253,17 +7844,17 @@
               </a:rPr>
               <a:t>  ENTITIES: three deduped lists.</a:t>
             </a:r>
-            <a:endParaRPr lang="en-US" sz="1050" dirty="0"/>
-          </a:p>
-          <a:p>
-            <a:pPr indent="0" marL="0">
-              <a:spcAft>
-                <a:spcPts val="200"/>
-              </a:spcAft>
-              <a:buNone/>
-            </a:pPr>
-            <a:r>
-              <a:rPr lang="en-US" sz="1050" dirty="0">
+            <a:endParaRPr lang="en-US" sz="800" dirty="0"/>
+          </a:p>
+          <a:p>
+            <a:pPr marL="0" indent="0">
+              <a:spcAft>
+                <a:spcPts val="200"/>
+              </a:spcAft>
+              <a:buNone/>
+            </a:pPr>
+            <a:r>
+              <a:rPr lang="en-US" sz="800" dirty="0">
                 <a:solidFill>
                   <a:srgbClr val="1E1E1E"/>
                 </a:solidFill>
@@ -8273,17 +7864,17 @@
               </a:rPr>
               <a:t>  CLAIMS:   every figure and every forward looking statement, with speaker</a:t>
             </a:r>
-            <a:endParaRPr lang="en-US" sz="1050" dirty="0"/>
-          </a:p>
-          <a:p>
-            <a:pPr indent="0" marL="0">
-              <a:spcAft>
-                <a:spcPts val="200"/>
-              </a:spcAft>
-              <a:buNone/>
-            </a:pPr>
-            <a:r>
-              <a:rPr lang="en-US" sz="1050" dirty="0">
+            <a:endParaRPr lang="en-US" sz="800" dirty="0"/>
+          </a:p>
+          <a:p>
+            <a:pPr marL="0" indent="0">
+              <a:spcAft>
+                <a:spcPts val="200"/>
+              </a:spcAft>
+              <a:buNone/>
+            </a:pPr>
+            <a:r>
+              <a:rPr lang="en-US" sz="800" dirty="0">
                 <a:solidFill>
                   <a:srgbClr val="1E1E1E"/>
                 </a:solidFill>
@@ -8293,26 +7884,26 @@
               </a:rPr>
               <a:t>            name attached.</a:t>
             </a:r>
-            <a:endParaRPr lang="en-US" sz="1050" dirty="0"/>
-          </a:p>
-          <a:p>
-            <a:pPr indent="0" marL="0">
-              <a:spcAft>
-                <a:spcPts val="200"/>
-              </a:spcAft>
-              <a:buNone/>
-            </a:pPr>
-            <a:endParaRPr lang="en-US" sz="1050" dirty="0"/>
-          </a:p>
-          <a:p>
-            <a:pPr indent="0" marL="0">
-              <a:spcAft>
-                <a:spcPts val="200"/>
-              </a:spcAft>
-              <a:buNone/>
-            </a:pPr>
-            <a:r>
-              <a:rPr lang="en-US" sz="1050" dirty="0">
+            <a:endParaRPr lang="en-US" sz="800" dirty="0"/>
+          </a:p>
+          <a:p>
+            <a:pPr marL="0" indent="0">
+              <a:spcAft>
+                <a:spcPts val="200"/>
+              </a:spcAft>
+              <a:buNone/>
+            </a:pPr>
+            <a:endParaRPr lang="en-US" sz="800" dirty="0"/>
+          </a:p>
+          <a:p>
+            <a:pPr marL="0" indent="0">
+              <a:spcAft>
+                <a:spcPts val="200"/>
+              </a:spcAft>
+              <a:buNone/>
+            </a:pPr>
+            <a:r>
+              <a:rPr lang="en-US" sz="800" dirty="0">
                 <a:solidFill>
                   <a:srgbClr val="1E1E1E"/>
                 </a:solidFill>
@@ -8322,17 +7913,17 @@
               </a:rPr>
               <a:t>CONSTRAINT</a:t>
             </a:r>
-            <a:endParaRPr lang="en-US" sz="1050" dirty="0"/>
-          </a:p>
-          <a:p>
-            <a:pPr indent="0" marL="0">
-              <a:spcAft>
-                <a:spcPts val="200"/>
-              </a:spcAft>
-              <a:buNone/>
-            </a:pPr>
-            <a:r>
-              <a:rPr lang="en-US" sz="1050" dirty="0">
+            <a:endParaRPr lang="en-US" sz="800" dirty="0"/>
+          </a:p>
+          <a:p>
+            <a:pPr marL="0" indent="0">
+              <a:spcAft>
+                <a:spcPts val="200"/>
+              </a:spcAft>
+              <a:buNone/>
+            </a:pPr>
+            <a:r>
+              <a:rPr lang="en-US" sz="800" dirty="0">
                 <a:solidFill>
                   <a:srgbClr val="1E1E1E"/>
                 </a:solidFill>
@@ -8342,17 +7933,17 @@
               </a:rPr>
               <a:t>Include a worked example inside the system prompt showing one input passage</a:t>
             </a:r>
-            <a:endParaRPr lang="en-US" sz="1050" dirty="0"/>
-          </a:p>
-          <a:p>
-            <a:pPr indent="0" marL="0">
-              <a:spcAft>
-                <a:spcPts val="200"/>
-              </a:spcAft>
-              <a:buNone/>
-            </a:pPr>
-            <a:r>
-              <a:rPr lang="en-US" sz="1050" dirty="0">
+            <a:endParaRPr lang="en-US" sz="800" dirty="0"/>
+          </a:p>
+          <a:p>
+            <a:pPr marL="0" indent="0">
+              <a:spcAft>
+                <a:spcPts val="200"/>
+              </a:spcAft>
+              <a:buNone/>
+            </a:pPr>
+            <a:r>
+              <a:rPr lang="en-US" sz="800" dirty="0">
                 <a:solidFill>
                   <a:srgbClr val="1E1E1E"/>
                 </a:solidFill>
@@ -8362,17 +7953,17 @@
               </a:rPr>
               <a:t>and the exact JSON expected. That single example does more than a paragraph</a:t>
             </a:r>
-            <a:endParaRPr lang="en-US" sz="1050" dirty="0"/>
-          </a:p>
-          <a:p>
-            <a:pPr indent="0" marL="0">
-              <a:spcAft>
-                <a:spcPts val="200"/>
-              </a:spcAft>
-              <a:buNone/>
-            </a:pPr>
-            <a:r>
-              <a:rPr lang="en-US" sz="1050" dirty="0">
+            <a:endParaRPr lang="en-US" sz="800" dirty="0"/>
+          </a:p>
+          <a:p>
+            <a:pPr marL="0" indent="0">
+              <a:spcAft>
+                <a:spcPts val="200"/>
+              </a:spcAft>
+              <a:buNone/>
+            </a:pPr>
+            <a:r>
+              <a:rPr lang="en-US" sz="800" dirty="0">
                 <a:solidFill>
                   <a:srgbClr val="1E1E1E"/>
                 </a:solidFill>
@@ -8382,26 +7973,26 @@
               </a:rPr>
               <a:t>of instructions.</a:t>
             </a:r>
-            <a:endParaRPr lang="en-US" sz="1050" dirty="0"/>
-          </a:p>
-          <a:p>
-            <a:pPr indent="0" marL="0">
-              <a:spcAft>
-                <a:spcPts val="200"/>
-              </a:spcAft>
-              <a:buNone/>
-            </a:pPr>
-            <a:endParaRPr lang="en-US" sz="1050" dirty="0"/>
-          </a:p>
-          <a:p>
-            <a:pPr indent="0" marL="0">
-              <a:spcAft>
-                <a:spcPts val="200"/>
-              </a:spcAft>
-              <a:buNone/>
-            </a:pPr>
-            <a:r>
-              <a:rPr lang="en-US" sz="1050" dirty="0">
+            <a:endParaRPr lang="en-US" sz="800" dirty="0"/>
+          </a:p>
+          <a:p>
+            <a:pPr marL="0" indent="0">
+              <a:spcAft>
+                <a:spcPts val="200"/>
+              </a:spcAft>
+              <a:buNone/>
+            </a:pPr>
+            <a:endParaRPr lang="en-US" sz="800" dirty="0"/>
+          </a:p>
+          <a:p>
+            <a:pPr marL="0" indent="0">
+              <a:spcAft>
+                <a:spcPts val="200"/>
+              </a:spcAft>
+              <a:buNone/>
+            </a:pPr>
+            <a:r>
+              <a:rPr lang="en-US" sz="800" dirty="0">
                 <a:solidFill>
                   <a:srgbClr val="1E1E1E"/>
                 </a:solidFill>
@@ -8411,17 +8002,17 @@
               </a:rPr>
               <a:t>ACCEPTANCE</a:t>
             </a:r>
-            <a:endParaRPr lang="en-US" sz="1050" dirty="0"/>
-          </a:p>
-          <a:p>
-            <a:pPr indent="0" marL="0">
-              <a:spcAft>
-                <a:spcPts val="200"/>
-              </a:spcAft>
-              <a:buNone/>
-            </a:pPr>
-            <a:r>
-              <a:rPr lang="en-US" sz="1050" dirty="0">
+            <a:endParaRPr lang="en-US" sz="800" dirty="0"/>
+          </a:p>
+          <a:p>
+            <a:pPr marL="0" indent="0">
+              <a:spcAft>
+                <a:spcPts val="200"/>
+              </a:spcAft>
+              <a:buNone/>
+            </a:pPr>
+            <a:r>
+              <a:rPr lang="en-US" sz="800" dirty="0">
                 <a:solidFill>
                   <a:srgbClr val="1E1E1E"/>
                 </a:solidFill>
@@ -8431,17 +8022,17 @@
               </a:rPr>
               <a:t>The entities panel has no duplicates. Every figure and every statement in</a:t>
             </a:r>
-            <a:endParaRPr lang="en-US" sz="1050" dirty="0"/>
-          </a:p>
-          <a:p>
-            <a:pPr indent="0" marL="0">
-              <a:spcAft>
-                <a:spcPts val="200"/>
-              </a:spcAft>
-              <a:buNone/>
-            </a:pPr>
-            <a:r>
-              <a:rPr lang="en-US" sz="1050" dirty="0">
+            <a:endParaRPr lang="en-US" sz="800" dirty="0"/>
+          </a:p>
+          <a:p>
+            <a:pPr marL="0" indent="0">
+              <a:spcAft>
+                <a:spcPts val="200"/>
+              </a:spcAft>
+              <a:buNone/>
+            </a:pPr>
+            <a:r>
+              <a:rPr lang="en-US" sz="800" dirty="0">
                 <a:solidFill>
                   <a:srgbClr val="1E1E1E"/>
                 </a:solidFill>
@@ -8451,7 +8042,7 @@
               </a:rPr>
               <a:t>the claims panel shows a speaker name next to it.</a:t>
             </a:r>
-            <a:endParaRPr lang="en-US" sz="1050" dirty="0"/>
+            <a:endParaRPr lang="en-US" sz="800" dirty="0"/>
           </a:p>
         </p:txBody>
       </p:sp>
@@ -8463,8 +8054,8 @@
         </p:nvSpPr>
         <p:spPr>
           <a:xfrm>
-            <a:off x="457200" y="6263640"/>
-            <a:ext cx="11247120" cy="320040"/>
+            <a:off x="457200" y="3703316"/>
+            <a:ext cx="4712584" cy="320040"/>
           </a:xfrm>
           <a:prstGeom prst="rect">
             <a:avLst/>
@@ -8476,7 +8067,7 @@
           <a:bodyPr wrap="square" lIns="0" tIns="0" rIns="0" bIns="0" rtlCol="0" anchor="ctr"/>
           <a:lstStyle/>
           <a:p>
-            <a:pPr algn="ctr" indent="0" marL="0">
+            <a:pPr marL="0" indent="0" algn="ctr">
               <a:buNone/>
             </a:pPr>
             <a:r>
@@ -8510,6 +8101,7 @@
         <a:solidFill>
           <a:srgbClr val="FFFFFF"/>
         </a:solidFill>
+        <a:effectLst/>
       </p:bgPr>
     </p:bg>
     <p:spTree>
@@ -8547,11 +8139,11 @@
           <a:bodyPr wrap="square" lIns="0" tIns="0" rIns="0" bIns="0" rtlCol="0" anchor="ctr"/>
           <a:lstStyle/>
           <a:p>
-            <a:pPr indent="0" marL="0">
-              <a:buNone/>
-            </a:pPr>
-            <a:r>
-              <a:rPr lang="en-US" sz="1200" b="1" spc="400" kern="0" dirty="0">
+            <a:pPr marL="0" indent="0">
+              <a:buNone/>
+            </a:pPr>
+            <a:r>
+              <a:rPr lang="en-US" sz="1200" b="1" kern="0" spc="400" dirty="0">
                 <a:solidFill>
                   <a:srgbClr val="A51C30"/>
                 </a:solidFill>
@@ -8586,7 +8178,7 @@
           <a:bodyPr wrap="square" lIns="0" tIns="0" rIns="0" bIns="0" rtlCol="0" anchor="ctr"/>
           <a:lstStyle/>
           <a:p>
-            <a:pPr indent="0" marL="0">
+            <a:pPr marL="0" indent="0">
               <a:buNone/>
             </a:pPr>
             <a:r>
@@ -8673,11 +8265,11 @@
           <a:bodyPr wrap="square" lIns="0" tIns="0" rIns="0" bIns="0" rtlCol="0" anchor="ctr"/>
           <a:lstStyle/>
           <a:p>
-            <a:pPr indent="0" marL="0">
-              <a:buNone/>
-            </a:pPr>
-            <a:r>
-              <a:rPr lang="en-US" sz="1200" b="1" spc="500" kern="0" dirty="0">
+            <a:pPr marL="0" indent="0">
+              <a:buNone/>
+            </a:pPr>
+            <a:r>
+              <a:rPr lang="en-US" sz="1200" b="1" kern="0" spc="500" dirty="0">
                 <a:solidFill>
                   <a:srgbClr val="A51C30"/>
                 </a:solidFill>
@@ -8712,7 +8304,7 @@
           <a:bodyPr wrap="square" lIns="0" tIns="0" rIns="0" bIns="0" rtlCol="0" anchor="ctr"/>
           <a:lstStyle/>
           <a:p>
-            <a:pPr indent="0" marL="0">
+            <a:pPr marL="0" indent="0">
               <a:buNone/>
             </a:pPr>
             <a:r>
@@ -8751,7 +8343,7 @@
           <a:bodyPr wrap="square" lIns="0" tIns="0" rIns="0" bIns="0" rtlCol="0" anchor="ctr"/>
           <a:lstStyle/>
           <a:p>
-            <a:pPr indent="0" marL="0">
+            <a:pPr marL="0" indent="0">
               <a:buNone/>
             </a:pPr>
             <a:r>
@@ -8815,11 +8407,11 @@
           <a:bodyPr wrap="square" lIns="0" tIns="0" rIns="0" bIns="0" rtlCol="0" anchor="ctr"/>
           <a:lstStyle/>
           <a:p>
-            <a:pPr indent="0" marL="0">
-              <a:buNone/>
-            </a:pPr>
-            <a:r>
-              <a:rPr lang="en-US" sz="1200" b="1" spc="500" kern="0" dirty="0">
+            <a:pPr marL="0" indent="0">
+              <a:buNone/>
+            </a:pPr>
+            <a:r>
+              <a:rPr lang="en-US" sz="1200" b="1" kern="0" spc="500" dirty="0">
                 <a:solidFill>
                   <a:srgbClr val="F3F3F1"/>
                 </a:solidFill>
@@ -8854,7 +8446,7 @@
           <a:bodyPr wrap="square" lIns="0" tIns="0" rIns="0" bIns="0" rtlCol="0" anchor="ctr"/>
           <a:lstStyle/>
           <a:p>
-            <a:pPr indent="0" marL="0">
+            <a:pPr marL="0" indent="0">
               <a:buNone/>
             </a:pPr>
             <a:r>
@@ -8994,45 +8586,6 @@
                 <a:cs typeface="Arial" pitchFamily="34" charset="-120"/>
               </a:rPr>
               <a:t>System prompt: use only provided sources, attribute every claim, no investment advice, be concise.</a:t>
-            </a:r>
-            <a:endParaRPr lang="en-US" sz="1300" dirty="0"/>
-          </a:p>
-        </p:txBody>
-      </p:sp>
-      <p:sp>
-        <p:nvSpPr>
-          <p:cNvPr id="13" name="Text 11"/>
-          <p:cNvSpPr/>
-          <p:nvPr/>
-        </p:nvSpPr>
-        <p:spPr>
-          <a:xfrm>
-            <a:off x="457200" y="6126480"/>
-            <a:ext cx="11247120" cy="320040"/>
-          </a:xfrm>
-          <a:prstGeom prst="rect">
-            <a:avLst/>
-          </a:prstGeom>
-          <a:noFill/>
-          <a:ln/>
-        </p:spPr>
-        <p:txBody>
-          <a:bodyPr wrap="square" lIns="0" tIns="0" rIns="0" bIns="0" rtlCol="0" anchor="ctr"/>
-          <a:lstStyle/>
-          <a:p>
-            <a:pPr algn="ctr" indent="0" marL="0">
-              <a:buNone/>
-            </a:pPr>
-            <a:r>
-              <a:rPr lang="en-US" sz="1300" i="1" dirty="0">
-                <a:solidFill>
-                  <a:srgbClr val="8996A0"/>
-                </a:solidFill>
-                <a:latin typeface="Arial" pitchFamily="34" charset="0"/>
-                <a:ea typeface="Arial" pitchFamily="34" charset="-122"/>
-                <a:cs typeface="Arial" pitchFamily="34" charset="-120"/>
-              </a:rPr>
-              <a:t>BUILD TIME  ·  ABOUT 7 MINUTES</a:t>
             </a:r>
             <a:endParaRPr lang="en-US" sz="1300" dirty="0"/>
           </a:p>
@@ -9054,6 +8607,7 @@
         <a:solidFill>
           <a:srgbClr val="FFFFFF"/>
         </a:solidFill>
+        <a:effectLst/>
       </p:bgPr>
     </p:bg>
     <p:spTree>
@@ -9091,11 +8645,11 @@
           <a:bodyPr wrap="square" lIns="0" tIns="0" rIns="0" bIns="0" rtlCol="0" anchor="ctr"/>
           <a:lstStyle/>
           <a:p>
-            <a:pPr indent="0" marL="0">
-              <a:buNone/>
-            </a:pPr>
-            <a:r>
-              <a:rPr lang="en-US" sz="1200" b="1" spc="400" kern="0" dirty="0">
+            <a:pPr marL="0" indent="0">
+              <a:buNone/>
+            </a:pPr>
+            <a:r>
+              <a:rPr lang="en-US" sz="1200" b="1" kern="0" spc="400" dirty="0">
                 <a:solidFill>
                   <a:srgbClr val="A51C30"/>
                 </a:solidFill>
@@ -9118,7 +8672,7 @@
         <p:spPr>
           <a:xfrm>
             <a:off x="457200" y="777240"/>
-            <a:ext cx="11247120" cy="822960"/>
+            <a:ext cx="6426485" cy="822960"/>
           </a:xfrm>
           <a:prstGeom prst="rect">
             <a:avLst/>
@@ -9130,7 +8684,7 @@
           <a:bodyPr wrap="square" lIns="0" tIns="0" rIns="0" bIns="0" rtlCol="0" anchor="ctr"/>
           <a:lstStyle/>
           <a:p>
-            <a:pPr indent="0" marL="0">
+            <a:pPr marL="0" indent="0">
               <a:buNone/>
             </a:pPr>
             <a:r>
@@ -9179,8 +8733,8 @@
         </p:nvSpPr>
         <p:spPr>
           <a:xfrm>
-            <a:off x="457200" y="1965960"/>
-            <a:ext cx="11247120" cy="4160520"/>
+            <a:off x="6513816" y="274319"/>
+            <a:ext cx="5190504" cy="6126471"/>
           </a:xfrm>
           <a:prstGeom prst="rect">
             <a:avLst/>
@@ -9242,11 +8796,11 @@
           <a:bodyPr wrap="square" lIns="0" tIns="0" rIns="0" bIns="0" rtlCol="0" anchor="ctr"/>
           <a:lstStyle/>
           <a:p>
-            <a:pPr algn="ctr" indent="0" marL="0">
-              <a:buNone/>
-            </a:pPr>
-            <a:r>
-              <a:rPr lang="en-US" sz="1000" b="1" spc="400" kern="0" dirty="0">
+            <a:pPr marL="0" indent="0" algn="ctr">
+              <a:buNone/>
+            </a:pPr>
+            <a:r>
+              <a:rPr lang="en-US" sz="1000" b="1" kern="0" spc="400" dirty="0">
                 <a:solidFill>
                   <a:srgbClr val="FFFFFF"/>
                 </a:solidFill>
@@ -9254,7 +8808,7 @@
                 <a:ea typeface="Arial" pitchFamily="34" charset="-122"/>
                 <a:cs typeface="Arial" pitchFamily="34" charset="-120"/>
               </a:rPr>
-              <a:t>SUGGESTED PROMPT</a:t>
+              <a:t>EXAMPLE PROMPT</a:t>
             </a:r>
             <a:endParaRPr lang="en-US" sz="1000" dirty="0"/>
           </a:p>
@@ -9268,8 +8822,8 @@
         </p:nvSpPr>
         <p:spPr>
           <a:xfrm>
-            <a:off x="731520" y="2468880"/>
-            <a:ext cx="10698480" cy="3611880"/>
+            <a:off x="6733169" y="1562702"/>
+            <a:ext cx="4751798" cy="3611880"/>
           </a:xfrm>
           <a:prstGeom prst="rect">
             <a:avLst/>
@@ -9281,14 +8835,14 @@
           <a:bodyPr wrap="square" lIns="0" tIns="0" rIns="0" bIns="0" rtlCol="0" anchor="ctr"/>
           <a:lstStyle/>
           <a:p>
-            <a:pPr indent="0" marL="0">
-              <a:spcAft>
-                <a:spcPts val="200"/>
-              </a:spcAft>
-              <a:buNone/>
-            </a:pPr>
-            <a:r>
-              <a:rPr lang="en-US" sz="1050" dirty="0">
+            <a:pPr marL="0" indent="0">
+              <a:spcAft>
+                <a:spcPts val="200"/>
+              </a:spcAft>
+              <a:buNone/>
+            </a:pPr>
+            <a:r>
+              <a:rPr lang="en-US" sz="900" dirty="0">
                 <a:solidFill>
                   <a:srgbClr val="1E1E1E"/>
                 </a:solidFill>
@@ -9298,26 +8852,26 @@
               </a:rPr>
               <a:t>Assemble the human review surface, then produce the research note.</a:t>
             </a:r>
-            <a:endParaRPr lang="en-US" sz="1050" dirty="0"/>
-          </a:p>
-          <a:p>
-            <a:pPr indent="0" marL="0">
-              <a:spcAft>
-                <a:spcPts val="200"/>
-              </a:spcAft>
-              <a:buNone/>
-            </a:pPr>
-            <a:endParaRPr lang="en-US" sz="1050" dirty="0"/>
-          </a:p>
-          <a:p>
-            <a:pPr indent="0" marL="0">
-              <a:spcAft>
-                <a:spcPts val="200"/>
-              </a:spcAft>
-              <a:buNone/>
-            </a:pPr>
-            <a:r>
-              <a:rPr lang="en-US" sz="1050" dirty="0">
+            <a:endParaRPr lang="en-US" sz="900" dirty="0"/>
+          </a:p>
+          <a:p>
+            <a:pPr marL="0" indent="0">
+              <a:spcAft>
+                <a:spcPts val="200"/>
+              </a:spcAft>
+              <a:buNone/>
+            </a:pPr>
+            <a:endParaRPr lang="en-US" sz="900" dirty="0"/>
+          </a:p>
+          <a:p>
+            <a:pPr marL="0" indent="0">
+              <a:spcAft>
+                <a:spcPts val="200"/>
+              </a:spcAft>
+              <a:buNone/>
+            </a:pPr>
+            <a:r>
+              <a:rPr lang="en-US" sz="900" dirty="0">
                 <a:solidFill>
                   <a:srgbClr val="1E1E1E"/>
                 </a:solidFill>
@@ -9327,17 +8881,17 @@
               </a:rPr>
               <a:t>CONTEXT</a:t>
             </a:r>
-            <a:endParaRPr lang="en-US" sz="1050" dirty="0"/>
-          </a:p>
-          <a:p>
-            <a:pPr indent="0" marL="0">
-              <a:spcAft>
-                <a:spcPts val="200"/>
-              </a:spcAft>
-              <a:buNone/>
-            </a:pPr>
-            <a:r>
-              <a:rPr lang="en-US" sz="1050" dirty="0">
+            <a:endParaRPr lang="en-US" sz="900" dirty="0"/>
+          </a:p>
+          <a:p>
+            <a:pPr marL="0" indent="0">
+              <a:spcAft>
+                <a:spcPts val="200"/>
+              </a:spcAft>
+              <a:buNone/>
+            </a:pPr>
+            <a:r>
+              <a:rPr lang="en-US" sz="900" dirty="0">
                 <a:solidFill>
                   <a:srgbClr val="1E1E1E"/>
                 </a:solidFill>
@@ -9347,17 +8901,17 @@
               </a:rPr>
               <a:t>Everything is in memory: assembledContext (string), sentiment (per turn +</a:t>
             </a:r>
-            <a:endParaRPr lang="en-US" sz="1050" dirty="0"/>
-          </a:p>
-          <a:p>
-            <a:pPr indent="0" marL="0">
-              <a:spcAft>
-                <a:spcPts val="200"/>
-              </a:spcAft>
-              <a:buNone/>
-            </a:pPr>
-            <a:r>
-              <a:rPr lang="en-US" sz="1050" dirty="0">
+            <a:endParaRPr lang="en-US" sz="900" dirty="0"/>
+          </a:p>
+          <a:p>
+            <a:pPr marL="0" indent="0">
+              <a:spcAft>
+                <a:spcPts val="200"/>
+              </a:spcAft>
+              <a:buNone/>
+            </a:pPr>
+            <a:r>
+              <a:rPr lang="en-US" sz="900" dirty="0">
                 <a:solidFill>
                   <a:srgbClr val="1E1E1E"/>
                 </a:solidFill>
@@ -9367,26 +8921,26 @@
               </a:rPr>
               <a:t>aggregates), extraction (entities + claims), news, macro.</a:t>
             </a:r>
-            <a:endParaRPr lang="en-US" sz="1050" dirty="0"/>
-          </a:p>
-          <a:p>
-            <a:pPr indent="0" marL="0">
-              <a:spcAft>
-                <a:spcPts val="200"/>
-              </a:spcAft>
-              <a:buNone/>
-            </a:pPr>
-            <a:endParaRPr lang="en-US" sz="1050" dirty="0"/>
-          </a:p>
-          <a:p>
-            <a:pPr indent="0" marL="0">
-              <a:spcAft>
-                <a:spcPts val="200"/>
-              </a:spcAft>
-              <a:buNone/>
-            </a:pPr>
-            <a:r>
-              <a:rPr lang="en-US" sz="1050" dirty="0">
+            <a:endParaRPr lang="en-US" sz="900" dirty="0"/>
+          </a:p>
+          <a:p>
+            <a:pPr marL="0" indent="0">
+              <a:spcAft>
+                <a:spcPts val="200"/>
+              </a:spcAft>
+              <a:buNone/>
+            </a:pPr>
+            <a:endParaRPr lang="en-US" sz="900" dirty="0"/>
+          </a:p>
+          <a:p>
+            <a:pPr marL="0" indent="0">
+              <a:spcAft>
+                <a:spcPts val="200"/>
+              </a:spcAft>
+              <a:buNone/>
+            </a:pPr>
+            <a:r>
+              <a:rPr lang="en-US" sz="900" dirty="0">
                 <a:solidFill>
                   <a:srgbClr val="1E1E1E"/>
                 </a:solidFill>
@@ -9396,17 +8950,17 @@
               </a:rPr>
               <a:t>TASK</a:t>
             </a:r>
-            <a:endParaRPr lang="en-US" sz="1050" dirty="0"/>
-          </a:p>
-          <a:p>
-            <a:pPr indent="0" marL="0">
-              <a:spcAft>
-                <a:spcPts val="200"/>
-              </a:spcAft>
-              <a:buNone/>
-            </a:pPr>
-            <a:r>
-              <a:rPr lang="en-US" sz="1050" dirty="0">
+            <a:endParaRPr lang="en-US" sz="900" dirty="0"/>
+          </a:p>
+          <a:p>
+            <a:pPr marL="0" indent="0">
+              <a:spcAft>
+                <a:spcPts val="200"/>
+              </a:spcAft>
+              <a:buNone/>
+            </a:pPr>
+            <a:r>
+              <a:rPr lang="en-US" sz="900" dirty="0">
                 <a:solidFill>
                   <a:srgbClr val="1E1E1E"/>
                 </a:solidFill>
@@ -9416,17 +8970,17 @@
               </a:rPr>
               <a:t>1. Build reviewSurface = { assembledContext, sentiment, extraction, news,</a:t>
             </a:r>
-            <a:endParaRPr lang="en-US" sz="1050" dirty="0"/>
-          </a:p>
-          <a:p>
-            <a:pPr indent="0" marL="0">
-              <a:spcAft>
-                <a:spcPts val="200"/>
-              </a:spcAft>
-              <a:buNone/>
-            </a:pPr>
-            <a:r>
-              <a:rPr lang="en-US" sz="1050" dirty="0">
+            <a:endParaRPr lang="en-US" sz="900" dirty="0"/>
+          </a:p>
+          <a:p>
+            <a:pPr marL="0" indent="0">
+              <a:spcAft>
+                <a:spcPts val="200"/>
+              </a:spcAft>
+              <a:buNone/>
+            </a:pPr>
+            <a:r>
+              <a:rPr lang="en-US" sz="900" dirty="0">
                 <a:solidFill>
                   <a:srgbClr val="1E1E1E"/>
                 </a:solidFill>
@@ -9436,17 +8990,17 @@
               </a:rPr>
               <a:t>   macro }. Render it as a readable panel on the page. Include a coverage</a:t>
             </a:r>
-            <a:endParaRPr lang="en-US" sz="1050" dirty="0"/>
-          </a:p>
-          <a:p>
-            <a:pPr indent="0" marL="0">
-              <a:spcAft>
-                <a:spcPts val="200"/>
-              </a:spcAft>
-              <a:buNone/>
-            </a:pPr>
-            <a:r>
-              <a:rPr lang="en-US" sz="1050" dirty="0">
+            <a:endParaRPr lang="en-US" sz="900" dirty="0"/>
+          </a:p>
+          <a:p>
+            <a:pPr marL="0" indent="0">
+              <a:spcAft>
+                <a:spcPts val="200"/>
+              </a:spcAft>
+              <a:buNone/>
+            </a:pPr>
+            <a:r>
+              <a:rPr lang="en-US" sz="900" dirty="0">
                 <a:solidFill>
                   <a:srgbClr val="1E1E1E"/>
                 </a:solidFill>
@@ -9456,26 +9010,26 @@
               </a:rPr>
               <a:t>   line: "Scored N of M turns. Extracted from N of M turns." Show any gaps.</a:t>
             </a:r>
-            <a:endParaRPr lang="en-US" sz="1050" dirty="0"/>
-          </a:p>
-          <a:p>
-            <a:pPr indent="0" marL="0">
-              <a:spcAft>
-                <a:spcPts val="200"/>
-              </a:spcAft>
-              <a:buNone/>
-            </a:pPr>
-            <a:endParaRPr lang="en-US" sz="1050" dirty="0"/>
-          </a:p>
-          <a:p>
-            <a:pPr indent="0" marL="0">
-              <a:spcAft>
-                <a:spcPts val="200"/>
-              </a:spcAft>
-              <a:buNone/>
-            </a:pPr>
-            <a:r>
-              <a:rPr lang="en-US" sz="1050" dirty="0">
+            <a:endParaRPr lang="en-US" sz="900" dirty="0"/>
+          </a:p>
+          <a:p>
+            <a:pPr marL="0" indent="0">
+              <a:spcAft>
+                <a:spcPts val="200"/>
+              </a:spcAft>
+              <a:buNone/>
+            </a:pPr>
+            <a:endParaRPr lang="en-US" sz="900" dirty="0"/>
+          </a:p>
+          <a:p>
+            <a:pPr marL="0" indent="0">
+              <a:spcAft>
+                <a:spcPts val="200"/>
+              </a:spcAft>
+              <a:buNone/>
+            </a:pPr>
+            <a:r>
+              <a:rPr lang="en-US" sz="900" dirty="0">
                 <a:solidFill>
                   <a:srgbClr val="1E1E1E"/>
                 </a:solidFill>
@@ -9485,17 +9039,17 @@
               </a:rPr>
               <a:t>2. Add a "Generate research note" button, disabled until a checkbox reading</a:t>
             </a:r>
-            <a:endParaRPr lang="en-US" sz="1050" dirty="0"/>
-          </a:p>
-          <a:p>
-            <a:pPr indent="0" marL="0">
-              <a:spcAft>
-                <a:spcPts val="200"/>
-              </a:spcAft>
-              <a:buNone/>
-            </a:pPr>
-            <a:r>
-              <a:rPr lang="en-US" sz="1050" dirty="0">
+            <a:endParaRPr lang="en-US" sz="900" dirty="0"/>
+          </a:p>
+          <a:p>
+            <a:pPr marL="0" indent="0">
+              <a:spcAft>
+                <a:spcPts val="200"/>
+              </a:spcAft>
+              <a:buNone/>
+            </a:pPr>
+            <a:r>
+              <a:rPr lang="en-US" sz="900" dirty="0">
                 <a:solidFill>
                   <a:srgbClr val="1E1E1E"/>
                 </a:solidFill>
@@ -9505,26 +9059,26 @@
               </a:rPr>
               <a:t>   "I have reviewed the surface" is ticked. This gate is deliberate.</a:t>
             </a:r>
-            <a:endParaRPr lang="en-US" sz="1050" dirty="0"/>
-          </a:p>
-          <a:p>
-            <a:pPr indent="0" marL="0">
-              <a:spcAft>
-                <a:spcPts val="200"/>
-              </a:spcAft>
-              <a:buNone/>
-            </a:pPr>
-            <a:endParaRPr lang="en-US" sz="1050" dirty="0"/>
-          </a:p>
-          <a:p>
-            <a:pPr indent="0" marL="0">
-              <a:spcAft>
-                <a:spcPts val="200"/>
-              </a:spcAft>
-              <a:buNone/>
-            </a:pPr>
-            <a:r>
-              <a:rPr lang="en-US" sz="1050" dirty="0">
+            <a:endParaRPr lang="en-US" sz="900" dirty="0"/>
+          </a:p>
+          <a:p>
+            <a:pPr marL="0" indent="0">
+              <a:spcAft>
+                <a:spcPts val="200"/>
+              </a:spcAft>
+              <a:buNone/>
+            </a:pPr>
+            <a:endParaRPr lang="en-US" sz="900" dirty="0"/>
+          </a:p>
+          <a:p>
+            <a:pPr marL="0" indent="0">
+              <a:spcAft>
+                <a:spcPts val="200"/>
+              </a:spcAft>
+              <a:buNone/>
+            </a:pPr>
+            <a:r>
+              <a:rPr lang="en-US" sz="900" dirty="0">
                 <a:solidFill>
                   <a:srgbClr val="1E1E1E"/>
                 </a:solidFill>
@@ -9534,17 +9088,17 @@
               </a:rPr>
               <a:t>3. On click, send reviewSurface plus the system prompt below to OpenRouter</a:t>
             </a:r>
-            <a:endParaRPr lang="en-US" sz="1050" dirty="0"/>
-          </a:p>
-          <a:p>
-            <a:pPr indent="0" marL="0">
-              <a:spcAft>
-                <a:spcPts val="200"/>
-              </a:spcAft>
-              <a:buNone/>
-            </a:pPr>
-            <a:r>
-              <a:rPr lang="en-US" sz="1050" dirty="0">
+            <a:endParaRPr lang="en-US" sz="900" dirty="0"/>
+          </a:p>
+          <a:p>
+            <a:pPr marL="0" indent="0">
+              <a:spcAft>
+                <a:spcPts val="200"/>
+              </a:spcAft>
+              <a:buNone/>
+            </a:pPr>
+            <a:r>
+              <a:rPr lang="en-US" sz="900" dirty="0">
                 <a:solidFill>
                   <a:srgbClr val="1E1E1E"/>
                 </a:solidFill>
@@ -9554,26 +9108,26 @@
               </a:rPr>
               <a:t>   (google/gemini-2.0-flash-001). Render the returned note under the surface.</a:t>
             </a:r>
-            <a:endParaRPr lang="en-US" sz="1050" dirty="0"/>
-          </a:p>
-          <a:p>
-            <a:pPr indent="0" marL="0">
-              <a:spcAft>
-                <a:spcPts val="200"/>
-              </a:spcAft>
-              <a:buNone/>
-            </a:pPr>
-            <a:endParaRPr lang="en-US" sz="1050" dirty="0"/>
-          </a:p>
-          <a:p>
-            <a:pPr indent="0" marL="0">
-              <a:spcAft>
-                <a:spcPts val="200"/>
-              </a:spcAft>
-              <a:buNone/>
-            </a:pPr>
-            <a:r>
-              <a:rPr lang="en-US" sz="1050" dirty="0">
+            <a:endParaRPr lang="en-US" sz="900" dirty="0"/>
+          </a:p>
+          <a:p>
+            <a:pPr marL="0" indent="0">
+              <a:spcAft>
+                <a:spcPts val="200"/>
+              </a:spcAft>
+              <a:buNone/>
+            </a:pPr>
+            <a:endParaRPr lang="en-US" sz="900" dirty="0"/>
+          </a:p>
+          <a:p>
+            <a:pPr marL="0" indent="0">
+              <a:spcAft>
+                <a:spcPts val="200"/>
+              </a:spcAft>
+              <a:buNone/>
+            </a:pPr>
+            <a:r>
+              <a:rPr lang="en-US" sz="900" dirty="0">
                 <a:solidFill>
                   <a:srgbClr val="1E1E1E"/>
                 </a:solidFill>
@@ -9583,17 +9137,17 @@
               </a:rPr>
               <a:t>SYSTEM PROMPT (rules the model must follow)</a:t>
             </a:r>
-            <a:endParaRPr lang="en-US" sz="1050" dirty="0"/>
-          </a:p>
-          <a:p>
-            <a:pPr indent="0" marL="0">
-              <a:spcAft>
-                <a:spcPts val="200"/>
-              </a:spcAft>
-              <a:buNone/>
-            </a:pPr>
-            <a:r>
-              <a:rPr lang="en-US" sz="1050" dirty="0">
+            <a:endParaRPr lang="en-US" sz="900" dirty="0"/>
+          </a:p>
+          <a:p>
+            <a:pPr marL="0" indent="0">
+              <a:spcAft>
+                <a:spcPts val="200"/>
+              </a:spcAft>
+              <a:buNone/>
+            </a:pPr>
+            <a:r>
+              <a:rPr lang="en-US" sz="900" dirty="0">
                 <a:solidFill>
                   <a:srgbClr val="1E1E1E"/>
                 </a:solidFill>
@@ -9603,17 +9157,17 @@
               </a:rPr>
               <a:t>  Use only the provided sources. Attribute every claim to its source.</a:t>
             </a:r>
-            <a:endParaRPr lang="en-US" sz="1050" dirty="0"/>
-          </a:p>
-          <a:p>
-            <a:pPr indent="0" marL="0">
-              <a:spcAft>
-                <a:spcPts val="200"/>
-              </a:spcAft>
-              <a:buNone/>
-            </a:pPr>
-            <a:r>
-              <a:rPr lang="en-US" sz="1050" dirty="0">
+            <a:endParaRPr lang="en-US" sz="900" dirty="0"/>
+          </a:p>
+          <a:p>
+            <a:pPr marL="0" indent="0">
+              <a:spcAft>
+                <a:spcPts val="200"/>
+              </a:spcAft>
+              <a:buNone/>
+            </a:pPr>
+            <a:r>
+              <a:rPr lang="en-US" sz="900" dirty="0">
                 <a:solidFill>
                   <a:srgbClr val="1E1E1E"/>
                 </a:solidFill>
@@ -9623,17 +9177,17 @@
               </a:rPr>
               <a:t>  Separate what the company asserts from what others report. If the sources</a:t>
             </a:r>
-            <a:endParaRPr lang="en-US" sz="1050" dirty="0"/>
-          </a:p>
-          <a:p>
-            <a:pPr indent="0" marL="0">
-              <a:spcAft>
-                <a:spcPts val="200"/>
-              </a:spcAft>
-              <a:buNone/>
-            </a:pPr>
-            <a:r>
-              <a:rPr lang="en-US" sz="1050" dirty="0">
+            <a:endParaRPr lang="en-US" sz="900" dirty="0"/>
+          </a:p>
+          <a:p>
+            <a:pPr marL="0" indent="0">
+              <a:spcAft>
+                <a:spcPts val="200"/>
+              </a:spcAft>
+              <a:buNone/>
+            </a:pPr>
+            <a:r>
+              <a:rPr lang="en-US" sz="900" dirty="0">
                 <a:solidFill>
                   <a:srgbClr val="1E1E1E"/>
                 </a:solidFill>
@@ -9643,17 +9197,17 @@
               </a:rPr>
               <a:t>  do not answer, say so plainly. No investment advice, no buy or sell view.</a:t>
             </a:r>
-            <a:endParaRPr lang="en-US" sz="1050" dirty="0"/>
-          </a:p>
-          <a:p>
-            <a:pPr indent="0" marL="0">
-              <a:spcAft>
-                <a:spcPts val="200"/>
-              </a:spcAft>
-              <a:buNone/>
-            </a:pPr>
-            <a:r>
-              <a:rPr lang="en-US" sz="1050" dirty="0">
+            <a:endParaRPr lang="en-US" sz="900" dirty="0"/>
+          </a:p>
+          <a:p>
+            <a:pPr marL="0" indent="0">
+              <a:spcAft>
+                <a:spcPts val="200"/>
+              </a:spcAft>
+              <a:buNone/>
+            </a:pPr>
+            <a:r>
+              <a:rPr lang="en-US" sz="900" dirty="0">
                 <a:solidFill>
                   <a:srgbClr val="1E1E1E"/>
                 </a:solidFill>
@@ -9663,26 +9217,26 @@
               </a:rPr>
               <a:t>  Be concise.</a:t>
             </a:r>
-            <a:endParaRPr lang="en-US" sz="1050" dirty="0"/>
-          </a:p>
-          <a:p>
-            <a:pPr indent="0" marL="0">
-              <a:spcAft>
-                <a:spcPts val="200"/>
-              </a:spcAft>
-              <a:buNone/>
-            </a:pPr>
-            <a:endParaRPr lang="en-US" sz="1050" dirty="0"/>
-          </a:p>
-          <a:p>
-            <a:pPr indent="0" marL="0">
-              <a:spcAft>
-                <a:spcPts val="200"/>
-              </a:spcAft>
-              <a:buNone/>
-            </a:pPr>
-            <a:r>
-              <a:rPr lang="en-US" sz="1050" dirty="0">
+            <a:endParaRPr lang="en-US" sz="900" dirty="0"/>
+          </a:p>
+          <a:p>
+            <a:pPr marL="0" indent="0">
+              <a:spcAft>
+                <a:spcPts val="200"/>
+              </a:spcAft>
+              <a:buNone/>
+            </a:pPr>
+            <a:endParaRPr lang="en-US" sz="900" dirty="0"/>
+          </a:p>
+          <a:p>
+            <a:pPr marL="0" indent="0">
+              <a:spcAft>
+                <a:spcPts val="200"/>
+              </a:spcAft>
+              <a:buNone/>
+            </a:pPr>
+            <a:r>
+              <a:rPr lang="en-US" sz="900" dirty="0">
                 <a:solidFill>
                   <a:srgbClr val="1E1E1E"/>
                 </a:solidFill>
@@ -9692,17 +9246,17 @@
               </a:rPr>
               <a:t>CONSTRAINT</a:t>
             </a:r>
-            <a:endParaRPr lang="en-US" sz="1050" dirty="0"/>
-          </a:p>
-          <a:p>
-            <a:pPr indent="0" marL="0">
-              <a:spcAft>
-                <a:spcPts val="200"/>
-              </a:spcAft>
-              <a:buNone/>
-            </a:pPr>
-            <a:r>
-              <a:rPr lang="en-US" sz="1050" dirty="0">
+            <a:endParaRPr lang="en-US" sz="900" dirty="0"/>
+          </a:p>
+          <a:p>
+            <a:pPr marL="0" indent="0">
+              <a:spcAft>
+                <a:spcPts val="200"/>
+              </a:spcAft>
+              <a:buNone/>
+            </a:pPr>
+            <a:r>
+              <a:rPr lang="en-US" sz="900" dirty="0">
                 <a:solidFill>
                   <a:srgbClr val="1E1E1E"/>
                 </a:solidFill>
@@ -9712,17 +9266,17 @@
               </a:rPr>
               <a:t>The button is disabled until the checkbox is ticked. Do not remove that</a:t>
             </a:r>
-            <a:endParaRPr lang="en-US" sz="1050" dirty="0"/>
-          </a:p>
-          <a:p>
-            <a:pPr indent="0" marL="0">
-              <a:spcAft>
-                <a:spcPts val="200"/>
-              </a:spcAft>
-              <a:buNone/>
-            </a:pPr>
-            <a:r>
-              <a:rPr lang="en-US" sz="1050" dirty="0">
+            <a:endParaRPr lang="en-US" sz="900" dirty="0"/>
+          </a:p>
+          <a:p>
+            <a:pPr marL="0" indent="0">
+              <a:spcAft>
+                <a:spcPts val="200"/>
+              </a:spcAft>
+              <a:buNone/>
+            </a:pPr>
+            <a:r>
+              <a:rPr lang="en-US" sz="900" dirty="0">
                 <a:solidFill>
                   <a:srgbClr val="1E1E1E"/>
                 </a:solidFill>
@@ -9732,26 +9286,26 @@
               </a:rPr>
               <a:t>gate. The review IS the point.</a:t>
             </a:r>
-            <a:endParaRPr lang="en-US" sz="1050" dirty="0"/>
-          </a:p>
-          <a:p>
-            <a:pPr indent="0" marL="0">
-              <a:spcAft>
-                <a:spcPts val="200"/>
-              </a:spcAft>
-              <a:buNone/>
-            </a:pPr>
-            <a:endParaRPr lang="en-US" sz="1050" dirty="0"/>
-          </a:p>
-          <a:p>
-            <a:pPr indent="0" marL="0">
-              <a:spcAft>
-                <a:spcPts val="200"/>
-              </a:spcAft>
-              <a:buNone/>
-            </a:pPr>
-            <a:r>
-              <a:rPr lang="en-US" sz="1050" dirty="0">
+            <a:endParaRPr lang="en-US" sz="900" dirty="0"/>
+          </a:p>
+          <a:p>
+            <a:pPr marL="0" indent="0">
+              <a:spcAft>
+                <a:spcPts val="200"/>
+              </a:spcAft>
+              <a:buNone/>
+            </a:pPr>
+            <a:endParaRPr lang="en-US" sz="900" dirty="0"/>
+          </a:p>
+          <a:p>
+            <a:pPr marL="0" indent="0">
+              <a:spcAft>
+                <a:spcPts val="200"/>
+              </a:spcAft>
+              <a:buNone/>
+            </a:pPr>
+            <a:r>
+              <a:rPr lang="en-US" sz="900" dirty="0">
                 <a:solidFill>
                   <a:srgbClr val="1E1E1E"/>
                 </a:solidFill>
@@ -9761,17 +9315,17 @@
               </a:rPr>
               <a:t>ACCEPTANCE</a:t>
             </a:r>
-            <a:endParaRPr lang="en-US" sz="1050" dirty="0"/>
-          </a:p>
-          <a:p>
-            <a:pPr indent="0" marL="0">
-              <a:spcAft>
-                <a:spcPts val="200"/>
-              </a:spcAft>
-              <a:buNone/>
-            </a:pPr>
-            <a:r>
-              <a:rPr lang="en-US" sz="1050" dirty="0">
+            <a:endParaRPr lang="en-US" sz="900" dirty="0"/>
+          </a:p>
+          <a:p>
+            <a:pPr marL="0" indent="0">
+              <a:spcAft>
+                <a:spcPts val="200"/>
+              </a:spcAft>
+              <a:buNone/>
+            </a:pPr>
+            <a:r>
+              <a:rPr lang="en-US" sz="900" dirty="0">
                 <a:solidFill>
                   <a:srgbClr val="1E1E1E"/>
                 </a:solidFill>
@@ -9781,17 +9335,17 @@
               </a:rPr>
               <a:t>I read the surface, tick the box, click Generate, and the note appears</a:t>
             </a:r>
-            <a:endParaRPr lang="en-US" sz="1050" dirty="0"/>
-          </a:p>
-          <a:p>
-            <a:pPr indent="0" marL="0">
-              <a:spcAft>
-                <a:spcPts val="200"/>
-              </a:spcAft>
-              <a:buNone/>
-            </a:pPr>
-            <a:r>
-              <a:rPr lang="en-US" sz="1050" dirty="0">
+            <a:endParaRPr lang="en-US" sz="900" dirty="0"/>
+          </a:p>
+          <a:p>
+            <a:pPr marL="0" indent="0">
+              <a:spcAft>
+                <a:spcPts val="200"/>
+              </a:spcAft>
+              <a:buNone/>
+            </a:pPr>
+            <a:r>
+              <a:rPr lang="en-US" sz="900" dirty="0">
                 <a:solidFill>
                   <a:srgbClr val="1E1E1E"/>
                 </a:solidFill>
@@ -9801,17 +9355,17 @@
               </a:rPr>
               <a:t>citing the sections it drew from. If I un-tick the box, the button disables</a:t>
             </a:r>
-            <a:endParaRPr lang="en-US" sz="1050" dirty="0"/>
-          </a:p>
-          <a:p>
-            <a:pPr indent="0" marL="0">
-              <a:spcAft>
-                <a:spcPts val="200"/>
-              </a:spcAft>
-              <a:buNone/>
-            </a:pPr>
-            <a:r>
-              <a:rPr lang="en-US" sz="1050" dirty="0">
+            <a:endParaRPr lang="en-US" sz="900" dirty="0"/>
+          </a:p>
+          <a:p>
+            <a:pPr marL="0" indent="0">
+              <a:spcAft>
+                <a:spcPts val="200"/>
+              </a:spcAft>
+              <a:buNone/>
+            </a:pPr>
+            <a:r>
+              <a:rPr lang="en-US" sz="900" dirty="0">
                 <a:solidFill>
                   <a:srgbClr val="1E1E1E"/>
                 </a:solidFill>
@@ -9821,7 +9375,7 @@
               </a:rPr>
               <a:t>again.</a:t>
             </a:r>
-            <a:endParaRPr lang="en-US" sz="1050" dirty="0"/>
+            <a:endParaRPr lang="en-US" sz="900" dirty="0"/>
           </a:p>
         </p:txBody>
       </p:sp>
@@ -9833,8 +9387,8 @@
         </p:nvSpPr>
         <p:spPr>
           <a:xfrm>
-            <a:off x="457200" y="6263640"/>
-            <a:ext cx="11247120" cy="320040"/>
+            <a:off x="0" y="2948934"/>
+            <a:ext cx="5638800" cy="320040"/>
           </a:xfrm>
           <a:prstGeom prst="rect">
             <a:avLst/>
@@ -9846,7 +9400,7 @@
           <a:bodyPr wrap="square" lIns="0" tIns="0" rIns="0" bIns="0" rtlCol="0" anchor="ctr"/>
           <a:lstStyle/>
           <a:p>
-            <a:pPr algn="ctr" indent="0" marL="0">
+            <a:pPr marL="0" indent="0" algn="ctr">
               <a:buNone/>
             </a:pPr>
             <a:r>
@@ -9880,6 +9434,7 @@
         <a:solidFill>
           <a:srgbClr val="FFFFFF"/>
         </a:solidFill>
+        <a:effectLst/>
       </p:bgPr>
     </p:bg>
     <p:spTree>
@@ -9917,11 +9472,11 @@
           <a:bodyPr wrap="square" lIns="0" tIns="0" rIns="0" bIns="0" rtlCol="0" anchor="ctr"/>
           <a:lstStyle/>
           <a:p>
-            <a:pPr indent="0" marL="0">
-              <a:buNone/>
-            </a:pPr>
-            <a:r>
-              <a:rPr lang="en-US" sz="1200" b="1" spc="400" kern="0" dirty="0">
+            <a:pPr marL="0" indent="0">
+              <a:buNone/>
+            </a:pPr>
+            <a:r>
+              <a:rPr lang="en-US" sz="1200" b="1" kern="0" spc="400" dirty="0">
                 <a:solidFill>
                   <a:srgbClr val="A51C30"/>
                 </a:solidFill>
@@ -9929,7 +9484,7 @@
                 <a:ea typeface="Arial" pitchFamily="34" charset="-122"/>
                 <a:cs typeface="Arial" pitchFamily="34" charset="-120"/>
               </a:rPr>
-              <a:t>THE HOUR AS ONE PIPELINE</a:t>
+              <a:t>SPA AS ONE PIPELINE</a:t>
             </a:r>
             <a:endParaRPr lang="en-US" sz="1200" dirty="0"/>
           </a:p>
@@ -9956,7 +9511,7 @@
           <a:bodyPr wrap="square" lIns="0" tIns="0" rIns="0" bIns="0" rtlCol="0" anchor="ctr"/>
           <a:lstStyle/>
           <a:p>
-            <a:pPr indent="0" marL="0">
+            <a:pPr marL="0" indent="0">
               <a:buNone/>
             </a:pPr>
             <a:r>
@@ -9999,30 +9554,48 @@
       </p:sp>
       <p:graphicFrame>
         <p:nvGraphicFramePr>
-          <p:cNvPr id="3" name="Table 0"/>
+          <p:cNvPr id="5" name="Table 0"/>
           <p:cNvGraphicFramePr>
             <a:graphicFrameLocks noGrp="1"/>
           </p:cNvGraphicFramePr>
           <p:nvPr>
             <p:extLst>
               <p:ext uri="{D42A27DB-BD31-4B8C-83A1-F6EECF244321}">
-                <p14:modId xmlns:p14="http://schemas.microsoft.com/office/powerpoint/2010/main" val="1579011935"/>
+                <p14:modId xmlns:p14="http://schemas.microsoft.com/office/powerpoint/2010/main" val="3766884600"/>
               </p:ext>
             </p:extLst>
           </p:nvPr>
         </p:nvGraphicFramePr>
         <p:xfrm>
           <a:off x="457200" y="2011680"/>
-          <a:ext cx="11247120" cy="3840480"/>
+          <a:ext cx="11247120" cy="4023360"/>
         </p:xfrm>
         <a:graphic>
           <a:graphicData uri="http://schemas.openxmlformats.org/drawingml/2006/table">
             <a:tbl>
               <a:tblPr/>
               <a:tblGrid>
-                <a:gridCol w="1280160"/>
-                <a:gridCol w="5212080"/>
-                <a:gridCol w="4754880"/>
+                <a:gridCol w="1280160">
+                  <a:extLst>
+                    <a:ext uri="{9D8B030D-6E8A-4147-A177-3AD203B41FA5}">
+                      <a16:colId xmlns:a16="http://schemas.microsoft.com/office/drawing/2014/main" val="20000"/>
+                    </a:ext>
+                  </a:extLst>
+                </a:gridCol>
+                <a:gridCol w="5212080">
+                  <a:extLst>
+                    <a:ext uri="{9D8B030D-6E8A-4147-A177-3AD203B41FA5}">
+                      <a16:colId xmlns:a16="http://schemas.microsoft.com/office/drawing/2014/main" val="20001"/>
+                    </a:ext>
+                  </a:extLst>
+                </a:gridCol>
+                <a:gridCol w="4754880">
+                  <a:extLst>
+                    <a:ext uri="{9D8B030D-6E8A-4147-A177-3AD203B41FA5}">
+                      <a16:colId xmlns:a16="http://schemas.microsoft.com/office/drawing/2014/main" val="20002"/>
+                    </a:ext>
+                  </a:extLst>
+                </a:gridCol>
               </a:tblGrid>
               <a:tr h="457200">
                 <a:tc>
@@ -10030,7 +9603,7 @@
                     <a:bodyPr/>
                     <a:lstStyle/>
                     <a:p>
-                      <a:pPr algn="l" indent="0" marL="0">
+                      <a:pPr marL="0" indent="0" algn="l">
                         <a:buNone/>
                       </a:pPr>
                       <a:r>
@@ -10051,7 +9624,7 @@
                       </a:endParaRPr>
                     </a:p>
                   </a:txBody>
-                  <a:tcPr marL="91440" marR="91440" marT="91440" marB="91440" anchor="ctr">
+                  <a:tcPr marT="91440" marB="91440" anchor="ctr">
                     <a:lnL w="12700" cap="flat" cmpd="sng" algn="ctr">
                       <a:solidFill>
                         <a:srgbClr val="F3F3F1"/>
@@ -10098,7 +9671,7 @@
                     <a:bodyPr/>
                     <a:lstStyle/>
                     <a:p>
-                      <a:pPr algn="l" indent="0" marL="0">
+                      <a:pPr marL="0" indent="0" algn="l">
                         <a:buNone/>
                       </a:pPr>
                       <a:endParaRPr lang="en-US" sz="1200" dirty="0">
@@ -10108,7 +9681,7 @@
                       </a:endParaRPr>
                     </a:p>
                   </a:txBody>
-                  <a:tcPr marL="91440" marR="91440" marT="91440" marB="91440" anchor="ctr">
+                  <a:tcPr marT="91440" marB="91440" anchor="ctr">
                     <a:lnL w="12700" cap="flat" cmpd="sng" algn="ctr">
                       <a:solidFill>
                         <a:srgbClr val="F3F3F1"/>
@@ -10155,7 +9728,7 @@
                     <a:bodyPr/>
                     <a:lstStyle/>
                     <a:p>
-                      <a:pPr algn="l" indent="0" marL="0">
+                      <a:pPr marL="0" indent="0" algn="l">
                         <a:buNone/>
                       </a:pPr>
                       <a:r>
@@ -10176,7 +9749,7 @@
                       </a:endParaRPr>
                     </a:p>
                   </a:txBody>
-                  <a:tcPr marL="91440" marR="91440" marT="91440" marB="91440" anchor="ctr">
+                  <a:tcPr marT="91440" marB="91440" anchor="ctr">
                     <a:lnL w="12700" cap="flat" cmpd="sng" algn="ctr">
                       <a:solidFill>
                         <a:srgbClr val="F3F3F1"/>
@@ -10218,6 +9791,11 @@
                     </a:solidFill>
                   </a:tcPr>
                 </a:tc>
+                <a:extLst>
+                  <a:ext uri="{0D108BD9-81ED-4DB2-BD59-A6C34878D82A}">
+                    <a16:rowId xmlns:a16="http://schemas.microsoft.com/office/drawing/2014/main" val="10000"/>
+                  </a:ext>
+                </a:extLst>
               </a:tr>
               <a:tr h="457200">
                 <a:tc>
@@ -10225,7 +9803,7 @@
                     <a:bodyPr/>
                     <a:lstStyle/>
                     <a:p>
-                      <a:pPr algn="l" indent="0" marL="0">
+                      <a:pPr marL="0" indent="0" algn="l">
                         <a:buNone/>
                       </a:pPr>
                       <a:r>
@@ -10246,7 +9824,7 @@
                       </a:endParaRPr>
                     </a:p>
                   </a:txBody>
-                  <a:tcPr marL="91440" marR="91440" marT="91440" marB="91440" anchor="ctr">
+                  <a:tcPr marT="91440" marB="91440" anchor="ctr">
                     <a:lnL w="12700" cap="flat" cmpd="sng" algn="ctr">
                       <a:solidFill>
                         <a:srgbClr val="F3F3F1"/>
@@ -10290,7 +9868,7 @@
                     <a:bodyPr/>
                     <a:lstStyle/>
                     <a:p>
-                      <a:pPr algn="l" indent="0" marL="0">
+                      <a:pPr marL="0" indent="0" algn="l">
                         <a:buNone/>
                       </a:pPr>
                       <a:r>
@@ -10311,7 +9889,7 @@
                       </a:endParaRPr>
                     </a:p>
                   </a:txBody>
-                  <a:tcPr marL="91440" marR="91440" marT="91440" marB="91440" anchor="ctr">
+                  <a:tcPr marT="91440" marB="91440" anchor="ctr">
                     <a:lnL w="12700" cap="flat" cmpd="sng" algn="ctr">
                       <a:solidFill>
                         <a:srgbClr val="F3F3F1"/>
@@ -10355,7 +9933,7 @@
                     <a:bodyPr/>
                     <a:lstStyle/>
                     <a:p>
-                      <a:pPr algn="l" indent="0" marL="0">
+                      <a:pPr marL="0" indent="0" algn="l">
                         <a:buNone/>
                       </a:pPr>
                       <a:r>
@@ -10367,7 +9945,29 @@
                           <a:ea typeface="Arial" pitchFamily="34" charset="-122"/>
                           <a:cs typeface="Arial" pitchFamily="34" charset="-120"/>
                         </a:rPr>
-                        <a:t>File upload plus CSV parser</a:t>
+                        <a:t>File upload plus CSV parser or raw </a:t>
+                      </a:r>
+                      <a:r>
+                        <a:rPr lang="en-US" sz="1200" i="1" dirty="0" err="1">
+                          <a:solidFill>
+                            <a:srgbClr val="293352"/>
+                          </a:solidFill>
+                          <a:latin typeface="Arial" pitchFamily="34" charset="0"/>
+                          <a:ea typeface="Arial" pitchFamily="34" charset="-122"/>
+                          <a:cs typeface="Arial" pitchFamily="34" charset="-120"/>
+                        </a:rPr>
+                        <a:t>github</a:t>
+                      </a:r>
+                      <a:r>
+                        <a:rPr lang="en-US" sz="1200" i="1" dirty="0">
+                          <a:solidFill>
+                            <a:srgbClr val="293352"/>
+                          </a:solidFill>
+                          <a:latin typeface="Arial" pitchFamily="34" charset="0"/>
+                          <a:ea typeface="Arial" pitchFamily="34" charset="-122"/>
+                          <a:cs typeface="Arial" pitchFamily="34" charset="-120"/>
+                        </a:rPr>
+                        <a:t> file URLs</a:t>
                       </a:r>
                       <a:endParaRPr lang="en-US" sz="1200" dirty="0">
                         <a:latin typeface="Arial" charset="0"/>
@@ -10376,7 +9976,7 @@
                       </a:endParaRPr>
                     </a:p>
                   </a:txBody>
-                  <a:tcPr marL="91440" marR="91440" marT="91440" marB="91440" anchor="ctr">
+                  <a:tcPr marT="91440" marB="91440" anchor="ctr">
                     <a:lnL w="12700" cap="flat" cmpd="sng" algn="ctr">
                       <a:solidFill>
                         <a:srgbClr val="F3F3F1"/>
@@ -10415,6 +10015,11 @@
                     </a:lnB>
                   </a:tcPr>
                 </a:tc>
+                <a:extLst>
+                  <a:ext uri="{0D108BD9-81ED-4DB2-BD59-A6C34878D82A}">
+                    <a16:rowId xmlns:a16="http://schemas.microsoft.com/office/drawing/2014/main" val="10001"/>
+                  </a:ext>
+                </a:extLst>
               </a:tr>
               <a:tr h="457200">
                 <a:tc>
@@ -10422,7 +10027,7 @@
                     <a:bodyPr/>
                     <a:lstStyle/>
                     <a:p>
-                      <a:pPr algn="l" indent="0" marL="0">
+                      <a:pPr marL="0" indent="0" algn="l">
                         <a:buNone/>
                       </a:pPr>
                       <a:r>
@@ -10443,7 +10048,7 @@
                       </a:endParaRPr>
                     </a:p>
                   </a:txBody>
-                  <a:tcPr marL="91440" marR="91440" marT="91440" marB="91440" anchor="ctr">
+                  <a:tcPr marT="91440" marB="91440" anchor="ctr">
                     <a:lnL w="12700" cap="flat" cmpd="sng" algn="ctr">
                       <a:solidFill>
                         <a:srgbClr val="F3F3F1"/>
@@ -10487,7 +10092,7 @@
                     <a:bodyPr/>
                     <a:lstStyle/>
                     <a:p>
-                      <a:pPr algn="l" indent="0" marL="0">
+                      <a:pPr marL="0" indent="0" algn="l">
                         <a:buNone/>
                       </a:pPr>
                       <a:r>
@@ -10508,7 +10113,7 @@
                       </a:endParaRPr>
                     </a:p>
                   </a:txBody>
-                  <a:tcPr marL="91440" marR="91440" marT="91440" marB="91440" anchor="ctr">
+                  <a:tcPr marT="91440" marB="91440" anchor="ctr">
                     <a:lnL w="12700" cap="flat" cmpd="sng" algn="ctr">
                       <a:solidFill>
                         <a:srgbClr val="F3F3F1"/>
@@ -10552,7 +10157,7 @@
                     <a:bodyPr/>
                     <a:lstStyle/>
                     <a:p>
-                      <a:pPr algn="l" indent="0" marL="0">
+                      <a:pPr marL="0" indent="0" algn="l">
                         <a:buNone/>
                       </a:pPr>
                       <a:r>
@@ -10564,7 +10169,7 @@
                           <a:ea typeface="Arial" pitchFamily="34" charset="-122"/>
                           <a:cs typeface="Arial" pitchFamily="34" charset="-120"/>
                         </a:rPr>
-                        <a:t>fetch() to Riskline, filter by country</a:t>
+                        <a:t>fetch() to Riskline, filter by country; could be input from user</a:t>
                       </a:r>
                       <a:endParaRPr lang="en-US" sz="1200" dirty="0">
                         <a:latin typeface="Arial" charset="0"/>
@@ -10573,7 +10178,7 @@
                       </a:endParaRPr>
                     </a:p>
                   </a:txBody>
-                  <a:tcPr marL="91440" marR="91440" marT="91440" marB="91440" anchor="ctr">
+                  <a:tcPr marT="91440" marB="91440" anchor="ctr">
                     <a:lnL w="12700" cap="flat" cmpd="sng" algn="ctr">
                       <a:solidFill>
                         <a:srgbClr val="F3F3F1"/>
@@ -10612,6 +10217,11 @@
                     </a:lnB>
                   </a:tcPr>
                 </a:tc>
+                <a:extLst>
+                  <a:ext uri="{0D108BD9-81ED-4DB2-BD59-A6C34878D82A}">
+                    <a16:rowId xmlns:a16="http://schemas.microsoft.com/office/drawing/2014/main" val="10002"/>
+                  </a:ext>
+                </a:extLst>
               </a:tr>
               <a:tr h="457200">
                 <a:tc>
@@ -10619,7 +10229,7 @@
                     <a:bodyPr/>
                     <a:lstStyle/>
                     <a:p>
-                      <a:pPr algn="l" indent="0" marL="0">
+                      <a:pPr marL="0" indent="0" algn="l">
                         <a:buNone/>
                       </a:pPr>
                       <a:r>
@@ -10640,7 +10250,7 @@
                       </a:endParaRPr>
                     </a:p>
                   </a:txBody>
-                  <a:tcPr marL="91440" marR="91440" marT="91440" marB="91440" anchor="ctr">
+                  <a:tcPr marT="91440" marB="91440" anchor="ctr">
                     <a:lnL w="12700" cap="flat" cmpd="sng" algn="ctr">
                       <a:solidFill>
                         <a:srgbClr val="F3F3F1"/>
@@ -10684,7 +10294,7 @@
                     <a:bodyPr/>
                     <a:lstStyle/>
                     <a:p>
-                      <a:pPr algn="l" indent="0" marL="0">
+                      <a:pPr marL="0" indent="0" algn="l">
                         <a:buNone/>
                       </a:pPr>
                       <a:r>
@@ -10705,7 +10315,7 @@
                       </a:endParaRPr>
                     </a:p>
                   </a:txBody>
-                  <a:tcPr marL="91440" marR="91440" marT="91440" marB="91440" anchor="ctr">
+                  <a:tcPr marT="91440" marB="91440" anchor="ctr">
                     <a:lnL w="12700" cap="flat" cmpd="sng" algn="ctr">
                       <a:solidFill>
                         <a:srgbClr val="F3F3F1"/>
@@ -10749,7 +10359,7 @@
                     <a:bodyPr/>
                     <a:lstStyle/>
                     <a:p>
-                      <a:pPr algn="l" indent="0" marL="0">
+                      <a:pPr marL="0" indent="0" algn="l">
                         <a:buNone/>
                       </a:pPr>
                       <a:r>
@@ -10761,7 +10371,7 @@
                           <a:ea typeface="Arial" pitchFamily="34" charset="-122"/>
                           <a:cs typeface="Arial" pitchFamily="34" charset="-120"/>
                         </a:rPr>
-                        <a:t>fetch() to NewsAPI with a keyed field</a:t>
+                        <a:t>fetch() to NewsAPI with an API keyed field&gt; expand with perplexity</a:t>
                       </a:r>
                       <a:endParaRPr lang="en-US" sz="1200" dirty="0">
                         <a:latin typeface="Arial" charset="0"/>
@@ -10770,7 +10380,7 @@
                       </a:endParaRPr>
                     </a:p>
                   </a:txBody>
-                  <a:tcPr marL="91440" marR="91440" marT="91440" marB="91440" anchor="ctr">
+                  <a:tcPr marT="91440" marB="91440" anchor="ctr">
                     <a:lnL w="12700" cap="flat" cmpd="sng" algn="ctr">
                       <a:solidFill>
                         <a:srgbClr val="F3F3F1"/>
@@ -10809,6 +10419,11 @@
                     </a:lnB>
                   </a:tcPr>
                 </a:tc>
+                <a:extLst>
+                  <a:ext uri="{0D108BD9-81ED-4DB2-BD59-A6C34878D82A}">
+                    <a16:rowId xmlns:a16="http://schemas.microsoft.com/office/drawing/2014/main" val="10003"/>
+                  </a:ext>
+                </a:extLst>
               </a:tr>
               <a:tr h="457200">
                 <a:tc>
@@ -10816,7 +10431,7 @@
                     <a:bodyPr/>
                     <a:lstStyle/>
                     <a:p>
-                      <a:pPr algn="l" indent="0" marL="0">
+                      <a:pPr marL="0" indent="0" algn="l">
                         <a:buNone/>
                       </a:pPr>
                       <a:r>
@@ -10837,7 +10452,7 @@
                       </a:endParaRPr>
                     </a:p>
                   </a:txBody>
-                  <a:tcPr marL="91440" marR="91440" marT="91440" marB="91440" anchor="ctr">
+                  <a:tcPr marT="91440" marB="91440" anchor="ctr">
                     <a:lnL w="12700" cap="flat" cmpd="sng" algn="ctr">
                       <a:solidFill>
                         <a:srgbClr val="F3F3F1"/>
@@ -10881,7 +10496,7 @@
                     <a:bodyPr/>
                     <a:lstStyle/>
                     <a:p>
-                      <a:pPr algn="l" indent="0" marL="0">
+                      <a:pPr marL="0" indent="0" algn="l">
                         <a:buNone/>
                       </a:pPr>
                       <a:r>
@@ -10902,7 +10517,7 @@
                       </a:endParaRPr>
                     </a:p>
                   </a:txBody>
-                  <a:tcPr marL="91440" marR="91440" marT="91440" marB="91440" anchor="ctr">
+                  <a:tcPr marT="91440" marB="91440" anchor="ctr">
                     <a:lnL w="12700" cap="flat" cmpd="sng" algn="ctr">
                       <a:solidFill>
                         <a:srgbClr val="F3F3F1"/>
@@ -10946,7 +10561,7 @@
                     <a:bodyPr/>
                     <a:lstStyle/>
                     <a:p>
-                      <a:pPr algn="l" indent="0" marL="0">
+                      <a:pPr marL="0" indent="0" algn="l">
                         <a:buNone/>
                       </a:pPr>
                       <a:r>
@@ -10967,7 +10582,7 @@
                       </a:endParaRPr>
                     </a:p>
                   </a:txBody>
-                  <a:tcPr marL="91440" marR="91440" marT="91440" marB="91440" anchor="ctr">
+                  <a:tcPr marT="91440" marB="91440" anchor="ctr">
                     <a:lnL w="12700" cap="flat" cmpd="sng" algn="ctr">
                       <a:solidFill>
                         <a:srgbClr val="F3F3F1"/>
@@ -11006,6 +10621,11 @@
                     </a:lnB>
                   </a:tcPr>
                 </a:tc>
+                <a:extLst>
+                  <a:ext uri="{0D108BD9-81ED-4DB2-BD59-A6C34878D82A}">
+                    <a16:rowId xmlns:a16="http://schemas.microsoft.com/office/drawing/2014/main" val="10004"/>
+                  </a:ext>
+                </a:extLst>
               </a:tr>
               <a:tr h="457200">
                 <a:tc>
@@ -11013,7 +10633,7 @@
                     <a:bodyPr/>
                     <a:lstStyle/>
                     <a:p>
-                      <a:pPr algn="l" indent="0" marL="0">
+                      <a:pPr marL="0" indent="0" algn="l">
                         <a:buNone/>
                       </a:pPr>
                       <a:r>
@@ -11034,7 +10654,7 @@
                       </a:endParaRPr>
                     </a:p>
                   </a:txBody>
-                  <a:tcPr marL="91440" marR="91440" marT="91440" marB="91440" anchor="ctr">
+                  <a:tcPr marT="91440" marB="91440" anchor="ctr">
                     <a:lnL w="12700" cap="flat" cmpd="sng" algn="ctr">
                       <a:solidFill>
                         <a:srgbClr val="F3F3F1"/>
@@ -11078,7 +10698,7 @@
                     <a:bodyPr/>
                     <a:lstStyle/>
                     <a:p>
-                      <a:pPr algn="l" indent="0" marL="0">
+                      <a:pPr marL="0" indent="0" algn="l">
                         <a:buNone/>
                       </a:pPr>
                       <a:r>
@@ -11099,7 +10719,7 @@
                       </a:endParaRPr>
                     </a:p>
                   </a:txBody>
-                  <a:tcPr marL="91440" marR="91440" marT="91440" marB="91440" anchor="ctr">
+                  <a:tcPr marT="91440" marB="91440" anchor="ctr">
                     <a:lnL w="12700" cap="flat" cmpd="sng" algn="ctr">
                       <a:solidFill>
                         <a:srgbClr val="F3F3F1"/>
@@ -11143,7 +10763,7 @@
                     <a:bodyPr/>
                     <a:lstStyle/>
                     <a:p>
-                      <a:pPr algn="l" indent="0" marL="0">
+                      <a:pPr marL="0" indent="0" algn="l">
                         <a:buNone/>
                       </a:pPr>
                       <a:r>
@@ -11155,7 +10775,7 @@
                           <a:ea typeface="Arial" pitchFamily="34" charset="-122"/>
                           <a:cs typeface="Arial" pitchFamily="34" charset="-120"/>
                         </a:rPr>
-                        <a:t>JS loop, OpenRouter per turn</a:t>
+                        <a:t>JS loop, OpenRouter per turn, with a progress bar &amp; specify a small model</a:t>
                       </a:r>
                       <a:endParaRPr lang="en-US" sz="1200" dirty="0">
                         <a:latin typeface="Arial" charset="0"/>
@@ -11164,7 +10784,7 @@
                       </a:endParaRPr>
                     </a:p>
                   </a:txBody>
-                  <a:tcPr marL="91440" marR="91440" marT="91440" marB="91440" anchor="ctr">
+                  <a:tcPr marT="91440" marB="91440" anchor="ctr">
                     <a:lnL w="12700" cap="flat" cmpd="sng" algn="ctr">
                       <a:solidFill>
                         <a:srgbClr val="F3F3F1"/>
@@ -11203,6 +10823,11 @@
                     </a:lnB>
                   </a:tcPr>
                 </a:tc>
+                <a:extLst>
+                  <a:ext uri="{0D108BD9-81ED-4DB2-BD59-A6C34878D82A}">
+                    <a16:rowId xmlns:a16="http://schemas.microsoft.com/office/drawing/2014/main" val="10005"/>
+                  </a:ext>
+                </a:extLst>
               </a:tr>
               <a:tr h="457200">
                 <a:tc>
@@ -11210,7 +10835,7 @@
                     <a:bodyPr/>
                     <a:lstStyle/>
                     <a:p>
-                      <a:pPr algn="l" indent="0" marL="0">
+                      <a:pPr marL="0" indent="0" algn="l">
                         <a:buNone/>
                       </a:pPr>
                       <a:r>
@@ -11231,7 +10856,7 @@
                       </a:endParaRPr>
                     </a:p>
                   </a:txBody>
-                  <a:tcPr marL="91440" marR="91440" marT="91440" marB="91440" anchor="ctr">
+                  <a:tcPr marT="91440" marB="91440" anchor="ctr">
                     <a:lnL w="12700" cap="flat" cmpd="sng" algn="ctr">
                       <a:solidFill>
                         <a:srgbClr val="F3F3F1"/>
@@ -11275,7 +10900,7 @@
                     <a:bodyPr/>
                     <a:lstStyle/>
                     <a:p>
-                      <a:pPr algn="l" indent="0" marL="0">
+                      <a:pPr marL="0" indent="0" algn="l">
                         <a:buNone/>
                       </a:pPr>
                       <a:r>
@@ -11296,7 +10921,7 @@
                       </a:endParaRPr>
                     </a:p>
                   </a:txBody>
-                  <a:tcPr marL="91440" marR="91440" marT="91440" marB="91440" anchor="ctr">
+                  <a:tcPr marT="91440" marB="91440" anchor="ctr">
                     <a:lnL w="12700" cap="flat" cmpd="sng" algn="ctr">
                       <a:solidFill>
                         <a:srgbClr val="F3F3F1"/>
@@ -11340,7 +10965,7 @@
                     <a:bodyPr/>
                     <a:lstStyle/>
                     <a:p>
-                      <a:pPr algn="l" indent="0" marL="0">
+                      <a:pPr marL="0" indent="0" algn="l">
                         <a:buNone/>
                       </a:pPr>
                       <a:r>
@@ -11352,7 +10977,7 @@
                           <a:ea typeface="Arial" pitchFamily="34" charset="-122"/>
                           <a:cs typeface="Arial" pitchFamily="34" charset="-120"/>
                         </a:rPr>
-                        <a:t>JS loop, OpenRouter per turn</a:t>
+                        <a:t>JS loop, OpenRouter per turn, with a progress bar &amp; specify a small model</a:t>
                       </a:r>
                       <a:endParaRPr lang="en-US" sz="1200" dirty="0">
                         <a:latin typeface="Arial" charset="0"/>
@@ -11361,7 +10986,7 @@
                       </a:endParaRPr>
                     </a:p>
                   </a:txBody>
-                  <a:tcPr marL="91440" marR="91440" marT="91440" marB="91440" anchor="ctr">
+                  <a:tcPr marT="91440" marB="91440" anchor="ctr">
                     <a:lnL w="12700" cap="flat" cmpd="sng" algn="ctr">
                       <a:solidFill>
                         <a:srgbClr val="F3F3F1"/>
@@ -11400,6 +11025,11 @@
                     </a:lnB>
                   </a:tcPr>
                 </a:tc>
+                <a:extLst>
+                  <a:ext uri="{0D108BD9-81ED-4DB2-BD59-A6C34878D82A}">
+                    <a16:rowId xmlns:a16="http://schemas.microsoft.com/office/drawing/2014/main" val="10006"/>
+                  </a:ext>
+                </a:extLst>
               </a:tr>
               <a:tr h="457200">
                 <a:tc>
@@ -11407,7 +11037,7 @@
                     <a:bodyPr/>
                     <a:lstStyle/>
                     <a:p>
-                      <a:pPr algn="l" indent="0" marL="0">
+                      <a:pPr marL="0" indent="0" algn="l">
                         <a:buNone/>
                       </a:pPr>
                       <a:r>
@@ -11428,7 +11058,7 @@
                       </a:endParaRPr>
                     </a:p>
                   </a:txBody>
-                  <a:tcPr marL="91440" marR="91440" marT="91440" marB="91440" anchor="ctr">
+                  <a:tcPr marT="91440" marB="91440" anchor="ctr">
                     <a:lnL w="12700" cap="flat" cmpd="sng" algn="ctr">
                       <a:solidFill>
                         <a:srgbClr val="F3F3F1"/>
@@ -11472,7 +11102,7 @@
                     <a:bodyPr/>
                     <a:lstStyle/>
                     <a:p>
-                      <a:pPr algn="l" indent="0" marL="0">
+                      <a:pPr marL="0" indent="0" algn="l">
                         <a:buNone/>
                       </a:pPr>
                       <a:r>
@@ -11493,7 +11123,7 @@
                       </a:endParaRPr>
                     </a:p>
                   </a:txBody>
-                  <a:tcPr marL="91440" marR="91440" marT="91440" marB="91440" anchor="ctr">
+                  <a:tcPr marT="91440" marB="91440" anchor="ctr">
                     <a:lnL w="12700" cap="flat" cmpd="sng" algn="ctr">
                       <a:solidFill>
                         <a:srgbClr val="F3F3F1"/>
@@ -11537,7 +11167,7 @@
                     <a:bodyPr/>
                     <a:lstStyle/>
                     <a:p>
-                      <a:pPr algn="l" indent="0" marL="0">
+                      <a:pPr marL="0" indent="0" algn="l">
                         <a:buNone/>
                       </a:pPr>
                       <a:r>
@@ -11549,7 +11179,7 @@
                           <a:ea typeface="Arial" pitchFamily="34" charset="-122"/>
                           <a:cs typeface="Arial" pitchFamily="34" charset="-120"/>
                         </a:rPr>
-                        <a:t>Panel rendered before the note is produced</a:t>
+                        <a:t>Raw data is shown for human review along with the research note summary.</a:t>
                       </a:r>
                       <a:endParaRPr lang="en-US" sz="1200" dirty="0">
                         <a:latin typeface="Arial" charset="0"/>
@@ -11558,7 +11188,7 @@
                       </a:endParaRPr>
                     </a:p>
                   </a:txBody>
-                  <a:tcPr marL="91440" marR="91440" marT="91440" marB="91440" anchor="ctr">
+                  <a:tcPr marT="91440" marB="91440" anchor="ctr">
                     <a:lnL w="12700" cap="flat" cmpd="sng" algn="ctr">
                       <a:solidFill>
                         <a:srgbClr val="F3F3F1"/>
@@ -11597,6 +11227,11 @@
                     </a:lnB>
                   </a:tcPr>
                 </a:tc>
+                <a:extLst>
+                  <a:ext uri="{0D108BD9-81ED-4DB2-BD59-A6C34878D82A}">
+                    <a16:rowId xmlns:a16="http://schemas.microsoft.com/office/drawing/2014/main" val="10007"/>
+                  </a:ext>
+                </a:extLst>
               </a:tr>
             </a:tbl>
           </a:graphicData>
@@ -11623,7 +11258,7 @@
           <a:bodyPr wrap="square" lIns="0" tIns="0" rIns="0" bIns="0" rtlCol="0" anchor="ctr"/>
           <a:lstStyle/>
           <a:p>
-            <a:pPr algn="ctr" indent="0" marL="0">
+            <a:pPr marL="0" indent="0" algn="ctr">
               <a:buNone/>
             </a:pPr>
             <a:r>
@@ -11657,6 +11292,7 @@
         <a:solidFill>
           <a:srgbClr val="FFFFFF"/>
         </a:solidFill>
+        <a:effectLst/>
       </p:bgPr>
     </p:bg>
     <p:spTree>
@@ -11694,11 +11330,11 @@
           <a:bodyPr wrap="square" lIns="0" tIns="0" rIns="0" bIns="0" rtlCol="0" anchor="ctr"/>
           <a:lstStyle/>
           <a:p>
-            <a:pPr indent="0" marL="0">
-              <a:buNone/>
-            </a:pPr>
-            <a:r>
-              <a:rPr lang="en-US" sz="1200" b="1" spc="400" kern="0" dirty="0">
+            <a:pPr marL="0" indent="0">
+              <a:buNone/>
+            </a:pPr>
+            <a:r>
+              <a:rPr lang="en-US" sz="1200" b="1" kern="0" spc="400" dirty="0">
                 <a:solidFill>
                   <a:srgbClr val="A51C30"/>
                 </a:solidFill>
@@ -11733,7 +11369,7 @@
           <a:bodyPr wrap="square" lIns="0" tIns="0" rIns="0" bIns="0" rtlCol="0" anchor="ctr"/>
           <a:lstStyle/>
           <a:p>
-            <a:pPr indent="0" marL="0">
+            <a:pPr marL="0" indent="0">
               <a:buNone/>
             </a:pPr>
             <a:r>
@@ -11820,7 +11456,7 @@
           <a:bodyPr wrap="square" lIns="0" tIns="0" rIns="0" bIns="0" rtlCol="0" anchor="ctr"/>
           <a:lstStyle/>
           <a:p>
-            <a:pPr algn="ctr" indent="0" marL="0">
+            <a:pPr marL="0" indent="0" algn="ctr">
               <a:buNone/>
             </a:pPr>
             <a:r>
@@ -11859,7 +11495,7 @@
           <a:bodyPr wrap="square" lIns="0" tIns="0" rIns="0" bIns="0" rtlCol="0" anchor="ctr"/>
           <a:lstStyle/>
           <a:p>
-            <a:pPr indent="0" marL="0">
+            <a:pPr marL="0" indent="0">
               <a:buNone/>
             </a:pPr>
             <a:r>
@@ -11898,7 +11534,7 @@
           <a:bodyPr wrap="square" lIns="0" tIns="0" rIns="0" bIns="0" rtlCol="0" anchor="ctr"/>
           <a:lstStyle/>
           <a:p>
-            <a:pPr indent="0" marL="0">
+            <a:pPr marL="0" indent="0">
               <a:buNone/>
             </a:pPr>
             <a:r>
@@ -11962,7 +11598,7 @@
           <a:bodyPr wrap="square" lIns="0" tIns="0" rIns="0" bIns="0" rtlCol="0" anchor="ctr"/>
           <a:lstStyle/>
           <a:p>
-            <a:pPr algn="ctr" indent="0" marL="0">
+            <a:pPr marL="0" indent="0" algn="ctr">
               <a:buNone/>
             </a:pPr>
             <a:r>
@@ -12001,7 +11637,7 @@
           <a:bodyPr wrap="square" lIns="0" tIns="0" rIns="0" bIns="0" rtlCol="0" anchor="ctr"/>
           <a:lstStyle/>
           <a:p>
-            <a:pPr indent="0" marL="0">
+            <a:pPr marL="0" indent="0">
               <a:buNone/>
             </a:pPr>
             <a:r>
@@ -12040,7 +11676,7 @@
           <a:bodyPr wrap="square" lIns="0" tIns="0" rIns="0" bIns="0" rtlCol="0" anchor="ctr"/>
           <a:lstStyle/>
           <a:p>
-            <a:pPr indent="0" marL="0">
+            <a:pPr marL="0" indent="0">
               <a:buNone/>
             </a:pPr>
             <a:r>
@@ -12104,7 +11740,7 @@
           <a:bodyPr wrap="square" lIns="0" tIns="0" rIns="0" bIns="0" rtlCol="0" anchor="ctr"/>
           <a:lstStyle/>
           <a:p>
-            <a:pPr algn="ctr" indent="0" marL="0">
+            <a:pPr marL="0" indent="0" algn="ctr">
               <a:buNone/>
             </a:pPr>
             <a:r>
@@ -12143,11 +11779,11 @@
           <a:bodyPr wrap="square" lIns="0" tIns="0" rIns="0" bIns="0" rtlCol="0" anchor="ctr"/>
           <a:lstStyle/>
           <a:p>
-            <a:pPr indent="0" marL="0">
-              <a:buNone/>
-            </a:pPr>
-            <a:r>
-              <a:rPr lang="en-US" sz="1800" b="1" dirty="0">
+            <a:pPr marL="0" indent="0">
+              <a:buNone/>
+            </a:pPr>
+            <a:r>
+              <a:rPr lang="en-US" sz="1800" b="1" strike="sngStrike" dirty="0">
                 <a:solidFill>
                   <a:srgbClr val="293352"/>
                 </a:solidFill>
@@ -12157,7 +11793,7 @@
               </a:rPr>
               <a:t>Tag v0.1.0</a:t>
             </a:r>
-            <a:endParaRPr lang="en-US" sz="1800" dirty="0"/>
+            <a:endParaRPr lang="en-US" sz="1800" strike="sngStrike" dirty="0"/>
           </a:p>
         </p:txBody>
       </p:sp>
@@ -12182,9 +11818,20 @@
           <a:bodyPr wrap="square" lIns="0" tIns="0" rIns="0" bIns="0" rtlCol="0" anchor="ctr"/>
           <a:lstStyle/>
           <a:p>
-            <a:pPr indent="0" marL="0">
-              <a:buNone/>
-            </a:pPr>
+            <a:pPr marL="0" indent="0">
+              <a:buNone/>
+            </a:pPr>
+            <a:r>
+              <a:rPr lang="en-US" sz="1300" strike="sngStrike" dirty="0">
+                <a:solidFill>
+                  <a:srgbClr val="1E1E1E"/>
+                </a:solidFill>
+                <a:latin typeface="Arial" pitchFamily="34" charset="0"/>
+                <a:ea typeface="Arial" pitchFamily="34" charset="-122"/>
+                <a:cs typeface="Arial" pitchFamily="34" charset="-120"/>
+              </a:rPr>
+              <a:t>git tag v0.1.0 &amp;&amp; git push origin v0.1.0. The GitHub Actions workflow builds the site and publishes it to GitHub Pages. </a:t>
+            </a:r>
             <a:r>
               <a:rPr lang="en-US" sz="1300" dirty="0">
                 <a:solidFill>
@@ -12194,9 +11841,9 @@
                 <a:ea typeface="Arial" pitchFamily="34" charset="-122"/>
                 <a:cs typeface="Arial" pitchFamily="34" charset="-120"/>
               </a:rPr>
-              <a:t>git tag v0.1.0 &amp;&amp; git push origin v0.1.0. The GitHub Actions workflow builds the site and publishes it to GitHub Pages.</a:t>
-            </a:r>
-            <a:endParaRPr lang="en-US" sz="1300" dirty="0"/>
+              <a:t>We are pushing any changes directly to the app but normally you would have versioning.</a:t>
+            </a:r>
+            <a:endParaRPr lang="en-US" sz="1300" strike="sngStrike" dirty="0"/>
           </a:p>
         </p:txBody>
       </p:sp>
@@ -12246,7 +11893,7 @@
           <a:bodyPr wrap="square" lIns="0" tIns="0" rIns="0" bIns="0" rtlCol="0" anchor="ctr"/>
           <a:lstStyle/>
           <a:p>
-            <a:pPr algn="ctr" indent="0" marL="0">
+            <a:pPr marL="0" indent="0" algn="ctr">
               <a:buNone/>
             </a:pPr>
             <a:r>
@@ -12285,7 +11932,7 @@
           <a:bodyPr wrap="square" lIns="0" tIns="0" rIns="0" bIns="0" rtlCol="0" anchor="ctr"/>
           <a:lstStyle/>
           <a:p>
-            <a:pPr indent="0" marL="0">
+            <a:pPr marL="0" indent="0">
               <a:buNone/>
             </a:pPr>
             <a:r>
@@ -12324,7 +11971,7 @@
           <a:bodyPr wrap="square" lIns="0" tIns="0" rIns="0" bIns="0" rtlCol="0" anchor="ctr"/>
           <a:lstStyle/>
           <a:p>
-            <a:pPr indent="0" marL="0">
+            <a:pPr marL="0" indent="0">
               <a:buNone/>
             </a:pPr>
             <a:r>
@@ -12358,6 +12005,7 @@
         <a:solidFill>
           <a:srgbClr val="FFFFFF"/>
         </a:solidFill>
+        <a:effectLst/>
       </p:bgPr>
     </p:bg>
     <p:spTree>
@@ -12395,11 +12043,11 @@
           <a:bodyPr wrap="square" lIns="0" tIns="0" rIns="0" bIns="0" rtlCol="0" anchor="ctr"/>
           <a:lstStyle/>
           <a:p>
-            <a:pPr indent="0" marL="0">
-              <a:buNone/>
-            </a:pPr>
-            <a:r>
-              <a:rPr lang="en-US" sz="1200" b="1" spc="400" kern="0" dirty="0">
+            <a:pPr marL="0" indent="0">
+              <a:buNone/>
+            </a:pPr>
+            <a:r>
+              <a:rPr lang="en-US" sz="1200" b="1" kern="0" spc="400" dirty="0">
                 <a:solidFill>
                   <a:srgbClr val="A51C30"/>
                 </a:solidFill>
@@ -12434,7 +12082,7 @@
           <a:bodyPr wrap="square" lIns="0" tIns="0" rIns="0" bIns="0" rtlCol="0" anchor="ctr"/>
           <a:lstStyle/>
           <a:p>
-            <a:pPr indent="0" marL="0">
+            <a:pPr marL="0" indent="0">
               <a:buNone/>
             </a:pPr>
             <a:r>
@@ -12521,11 +12169,11 @@
           <a:bodyPr wrap="square" lIns="0" tIns="0" rIns="0" bIns="0" rtlCol="0" anchor="ctr"/>
           <a:lstStyle/>
           <a:p>
-            <a:pPr indent="0" marL="0">
-              <a:buNone/>
-            </a:pPr>
-            <a:r>
-              <a:rPr lang="en-US" sz="1200" b="1" spc="500" kern="0" dirty="0">
+            <a:pPr marL="0" indent="0">
+              <a:buNone/>
+            </a:pPr>
+            <a:r>
+              <a:rPr lang="en-US" sz="1200" b="1" kern="0" spc="500" dirty="0">
                 <a:solidFill>
                   <a:srgbClr val="A51C30"/>
                 </a:solidFill>
@@ -12712,11 +12360,11 @@
           <a:bodyPr wrap="square" lIns="0" tIns="0" rIns="0" bIns="0" rtlCol="0" anchor="ctr"/>
           <a:lstStyle/>
           <a:p>
-            <a:pPr indent="0" marL="0">
-              <a:buNone/>
-            </a:pPr>
-            <a:r>
-              <a:rPr lang="en-US" sz="1200" b="1" spc="500" kern="0" dirty="0">
+            <a:pPr marL="0" indent="0">
+              <a:buNone/>
+            </a:pPr>
+            <a:r>
+              <a:rPr lang="en-US" sz="1200" b="1" kern="0" spc="500" dirty="0">
                 <a:solidFill>
                   <a:srgbClr val="F3F3F1"/>
                 </a:solidFill>
@@ -12814,24 +12462,12 @@
             <a:endParaRPr lang="en-US" sz="1500" dirty="0"/>
           </a:p>
           <a:p>
-            <a:pPr marL="342900" indent="-342900">
+            <a:pPr>
               <a:spcAft>
                 <a:spcPts val="800"/>
               </a:spcAft>
               <a:buSzPct val="100000"/>
-              <a:buChar char="▪"/>
-            </a:pPr>
-            <a:r>
-              <a:rPr lang="en-US" sz="1500" dirty="0">
-                <a:solidFill>
-                  <a:srgbClr val="FFFFFF"/>
-                </a:solidFill>
-                <a:latin typeface="Arial" pitchFamily="34" charset="0"/>
-                <a:ea typeface="Arial" pitchFamily="34" charset="-122"/>
-                <a:cs typeface="Arial" pitchFamily="34" charset="-120"/>
-              </a:rPr>
-              <a:t>A fire and forget system. The checkbox is the point.</a:t>
-            </a:r>
+            </a:pPr>
             <a:endParaRPr lang="en-US" sz="1500" dirty="0"/>
           </a:p>
         </p:txBody>
@@ -12857,7 +12493,7 @@
           <a:bodyPr wrap="square" lIns="0" tIns="0" rIns="0" bIns="0" rtlCol="0" anchor="ctr"/>
           <a:lstStyle/>
           <a:p>
-            <a:pPr algn="ctr" indent="0" marL="0">
+            <a:pPr marL="0" indent="0" algn="ctr">
               <a:buNone/>
             </a:pPr>
             <a:r>
@@ -12869,7 +12505,7 @@
                 <a:ea typeface="Arial" pitchFamily="34" charset="-122"/>
                 <a:cs typeface="Arial" pitchFamily="34" charset="-120"/>
               </a:rPr>
-              <a:t>45 minutes was how long Knight Capital ran without the surface you just built.</a:t>
+              <a:t>45 minutes was how long Knight Capital ran without the surface you just built.  And it cost them $400M.  HFT removes the human so you have to be VERY careful and have good QA, and release reviews.</a:t>
             </a:r>
             <a:endParaRPr lang="en-US" sz="1400" dirty="0"/>
           </a:p>
@@ -12891,6 +12527,7 @@
         <a:solidFill>
           <a:srgbClr val="FFFFFF"/>
         </a:solidFill>
+        <a:effectLst/>
       </p:bgPr>
     </p:bg>
     <p:spTree>
@@ -12928,11 +12565,11 @@
           <a:bodyPr wrap="square" lIns="0" tIns="0" rIns="0" bIns="0" rtlCol="0" anchor="ctr"/>
           <a:lstStyle/>
           <a:p>
-            <a:pPr indent="0" marL="0">
-              <a:buNone/>
-            </a:pPr>
-            <a:r>
-              <a:rPr lang="en-US" sz="1200" b="1" spc="400" kern="0" dirty="0">
+            <a:pPr marL="0" indent="0">
+              <a:buNone/>
+            </a:pPr>
+            <a:r>
+              <a:rPr lang="en-US" sz="1200" b="1" kern="0" spc="400" dirty="0">
                 <a:solidFill>
                   <a:srgbClr val="A51C30"/>
                 </a:solidFill>
@@ -12967,7 +12604,7 @@
           <a:bodyPr wrap="square" lIns="0" tIns="0" rIns="0" bIns="0" rtlCol="0" anchor="ctr"/>
           <a:lstStyle/>
           <a:p>
-            <a:pPr indent="0" marL="0">
+            <a:pPr marL="0" indent="0">
               <a:buNone/>
             </a:pPr>
             <a:r>
@@ -13054,11 +12691,11 @@
           <a:bodyPr wrap="square" lIns="0" tIns="0" rIns="0" bIns="0" rtlCol="0" anchor="ctr"/>
           <a:lstStyle/>
           <a:p>
-            <a:pPr indent="0" marL="0">
-              <a:buNone/>
-            </a:pPr>
-            <a:r>
-              <a:rPr lang="en-US" sz="1100" b="1" spc="500" kern="0" dirty="0">
+            <a:pPr marL="0" indent="0">
+              <a:buNone/>
+            </a:pPr>
+            <a:r>
+              <a:rPr lang="en-US" sz="1100" b="1" kern="0" spc="500" dirty="0">
                 <a:solidFill>
                   <a:srgbClr val="A51C30"/>
                 </a:solidFill>
@@ -13093,7 +12730,7 @@
           <a:bodyPr wrap="square" lIns="0" tIns="0" rIns="0" bIns="0" rtlCol="0" anchor="ctr"/>
           <a:lstStyle/>
           <a:p>
-            <a:pPr indent="0" marL="0">
+            <a:pPr marL="0" indent="0">
               <a:buNone/>
             </a:pPr>
             <a:r>
@@ -13305,11 +12942,11 @@
           <a:bodyPr wrap="square" lIns="0" tIns="0" rIns="0" bIns="0" rtlCol="0" anchor="ctr"/>
           <a:lstStyle/>
           <a:p>
-            <a:pPr indent="0" marL="0">
-              <a:buNone/>
-            </a:pPr>
-            <a:r>
-              <a:rPr lang="en-US" sz="1100" b="1" spc="500" kern="0" dirty="0">
+            <a:pPr marL="0" indent="0">
+              <a:buNone/>
+            </a:pPr>
+            <a:r>
+              <a:rPr lang="en-US" sz="1100" b="1" kern="0" spc="500" dirty="0">
                 <a:solidFill>
                   <a:srgbClr val="F3F3F1"/>
                 </a:solidFill>
@@ -13344,7 +12981,7 @@
           <a:bodyPr wrap="square" lIns="0" tIns="0" rIns="0" bIns="0" rtlCol="0" anchor="ctr"/>
           <a:lstStyle/>
           <a:p>
-            <a:pPr indent="0" marL="0">
+            <a:pPr marL="0" indent="0">
               <a:buNone/>
             </a:pPr>
             <a:r>
@@ -13535,11 +13172,11 @@
           <a:bodyPr wrap="square" lIns="0" tIns="0" rIns="0" bIns="0" rtlCol="0" anchor="ctr"/>
           <a:lstStyle/>
           <a:p>
-            <a:pPr indent="0" marL="0">
-              <a:buNone/>
-            </a:pPr>
-            <a:r>
-              <a:rPr lang="en-US" sz="1100" b="1" spc="500" kern="0" dirty="0">
+            <a:pPr marL="0" indent="0">
+              <a:buNone/>
+            </a:pPr>
+            <a:r>
+              <a:rPr lang="en-US" sz="1100" b="1" kern="0" spc="500" dirty="0">
                 <a:solidFill>
                   <a:srgbClr val="F3F3F1"/>
                 </a:solidFill>
@@ -13574,7 +13211,7 @@
           <a:bodyPr wrap="square" lIns="0" tIns="0" rIns="0" bIns="0" rtlCol="0" anchor="ctr"/>
           <a:lstStyle/>
           <a:p>
-            <a:pPr indent="0" marL="0">
+            <a:pPr marL="0" indent="0">
               <a:buNone/>
             </a:pPr>
             <a:r>
@@ -13740,7 +13377,7 @@
           <a:bodyPr wrap="square" lIns="0" tIns="0" rIns="0" bIns="0" rtlCol="0" anchor="ctr"/>
           <a:lstStyle/>
           <a:p>
-            <a:pPr algn="ctr" indent="0" marL="0">
+            <a:pPr marL="0" indent="0" algn="ctr">
               <a:buNone/>
             </a:pPr>
             <a:r>
@@ -13774,6 +13411,7 @@
         <a:solidFill>
           <a:srgbClr val="FFFFFF"/>
         </a:solidFill>
+        <a:effectLst/>
       </p:bgPr>
     </p:bg>
     <p:spTree>
@@ -13811,11 +13449,11 @@
           <a:bodyPr wrap="square" lIns="0" tIns="0" rIns="0" bIns="0" rtlCol="0" anchor="ctr"/>
           <a:lstStyle/>
           <a:p>
-            <a:pPr indent="0" marL="0">
-              <a:buNone/>
-            </a:pPr>
-            <a:r>
-              <a:rPr lang="en-US" sz="1200" b="1" spc="400" kern="0" dirty="0">
+            <a:pPr marL="0" indent="0">
+              <a:buNone/>
+            </a:pPr>
+            <a:r>
+              <a:rPr lang="en-US" sz="1200" b="1" kern="0" spc="400" dirty="0">
                 <a:solidFill>
                   <a:srgbClr val="A51C30"/>
                 </a:solidFill>
@@ -13850,7 +13488,7 @@
           <a:bodyPr wrap="square" lIns="0" tIns="0" rIns="0" bIns="0" rtlCol="0" anchor="ctr"/>
           <a:lstStyle/>
           <a:p>
-            <a:pPr indent="0" marL="0">
+            <a:pPr marL="0" indent="0">
               <a:buNone/>
             </a:pPr>
             <a:r>
@@ -13937,7 +13575,7 @@
           <a:bodyPr wrap="square" lIns="0" tIns="0" rIns="0" bIns="0" rtlCol="0" anchor="ctr"/>
           <a:lstStyle/>
           <a:p>
-            <a:pPr algn="ctr" indent="0" marL="0">
+            <a:pPr marL="0" indent="0" algn="ctr">
               <a:buNone/>
             </a:pPr>
             <a:r>
@@ -13976,7 +13614,7 @@
           <a:bodyPr wrap="square" lIns="0" tIns="0" rIns="0" bIns="0" rtlCol="0" anchor="ctr"/>
           <a:lstStyle/>
           <a:p>
-            <a:pPr indent="0" marL="0">
+            <a:pPr marL="0" indent="0">
               <a:buNone/>
             </a:pPr>
             <a:r>
@@ -13988,7 +13626,7 @@
                 <a:ea typeface="Arial" pitchFamily="34" charset="-122"/>
                 <a:cs typeface="Arial" pitchFamily="34" charset="-120"/>
               </a:rPr>
-              <a:t>Upload a transcript CSV. See symbol, date, and turn count confirm.</a:t>
+              <a:t>Upload a transcript CSV.  Sample shown to user to ensure it is correct.</a:t>
             </a:r>
             <a:endParaRPr lang="en-US" sz="1500" dirty="0"/>
           </a:p>
@@ -14040,7 +13678,7 @@
           <a:bodyPr wrap="square" lIns="0" tIns="0" rIns="0" bIns="0" rtlCol="0" anchor="ctr"/>
           <a:lstStyle/>
           <a:p>
-            <a:pPr algn="ctr" indent="0" marL="0">
+            <a:pPr marL="0" indent="0" algn="ctr">
               <a:buNone/>
             </a:pPr>
             <a:r>
@@ -14079,7 +13717,7 @@
           <a:bodyPr wrap="square" lIns="0" tIns="0" rIns="0" bIns="0" rtlCol="0" anchor="ctr"/>
           <a:lstStyle/>
           <a:p>
-            <a:pPr indent="0" marL="0">
+            <a:pPr marL="0" indent="0">
               <a:buNone/>
             </a:pPr>
             <a:r>
@@ -14143,7 +13781,7 @@
           <a:bodyPr wrap="square" lIns="0" tIns="0" rIns="0" bIns="0" rtlCol="0" anchor="ctr"/>
           <a:lstStyle/>
           <a:p>
-            <a:pPr algn="ctr" indent="0" marL="0">
+            <a:pPr marL="0" indent="0" algn="ctr">
               <a:buNone/>
             </a:pPr>
             <a:r>
@@ -14182,7 +13820,7 @@
           <a:bodyPr wrap="square" lIns="0" tIns="0" rIns="0" bIns="0" rtlCol="0" anchor="ctr"/>
           <a:lstStyle/>
           <a:p>
-            <a:pPr indent="0" marL="0">
+            <a:pPr marL="0" indent="0">
               <a:buNone/>
             </a:pPr>
             <a:r>
@@ -14246,7 +13884,7 @@
           <a:bodyPr wrap="square" lIns="0" tIns="0" rIns="0" bIns="0" rtlCol="0" anchor="ctr"/>
           <a:lstStyle/>
           <a:p>
-            <a:pPr algn="ctr" indent="0" marL="0">
+            <a:pPr marL="0" indent="0" algn="ctr">
               <a:buNone/>
             </a:pPr>
             <a:r>
@@ -14285,7 +13923,7 @@
           <a:bodyPr wrap="square" lIns="0" tIns="0" rIns="0" bIns="0" rtlCol="0" anchor="ctr"/>
           <a:lstStyle/>
           <a:p>
-            <a:pPr indent="0" marL="0">
+            <a:pPr marL="0" indent="0">
               <a:buNone/>
             </a:pPr>
             <a:r>
@@ -14349,7 +13987,7 @@
           <a:bodyPr wrap="square" lIns="0" tIns="0" rIns="0" bIns="0" rtlCol="0" anchor="ctr"/>
           <a:lstStyle/>
           <a:p>
-            <a:pPr algn="ctr" indent="0" marL="0">
+            <a:pPr marL="0" indent="0" algn="ctr">
               <a:buNone/>
             </a:pPr>
             <a:r>
@@ -14388,7 +14026,7 @@
           <a:bodyPr wrap="square" lIns="0" tIns="0" rIns="0" bIns="0" rtlCol="0" anchor="ctr"/>
           <a:lstStyle/>
           <a:p>
-            <a:pPr indent="0" marL="0">
+            <a:pPr marL="0" indent="0">
               <a:buNone/>
             </a:pPr>
             <a:r>
@@ -14452,7 +14090,7 @@
           <a:bodyPr wrap="square" lIns="0" tIns="0" rIns="0" bIns="0" rtlCol="0" anchor="ctr"/>
           <a:lstStyle/>
           <a:p>
-            <a:pPr algn="ctr" indent="0" marL="0">
+            <a:pPr marL="0" indent="0" algn="ctr">
               <a:buNone/>
             </a:pPr>
             <a:r>
@@ -14491,7 +14129,7 @@
           <a:bodyPr wrap="square" lIns="0" tIns="0" rIns="0" bIns="0" rtlCol="0" anchor="ctr"/>
           <a:lstStyle/>
           <a:p>
-            <a:pPr indent="0" marL="0">
+            <a:pPr marL="0" indent="0">
               <a:buNone/>
             </a:pPr>
             <a:r>
@@ -14503,7 +14141,7 @@
                 <a:ea typeface="Arial" pitchFamily="34" charset="-122"/>
                 <a:cs typeface="Arial" pitchFamily="34" charset="-120"/>
               </a:rPr>
-              <a:t>The review surface renders. You confirm coverage, then produce the research note.</a:t>
+              <a:t>The review surface renders. You confirm coverage, then the model produce the research note.</a:t>
             </a:r>
             <a:endParaRPr lang="en-US" sz="1500" dirty="0"/>
           </a:p>
@@ -14525,6 +14163,7 @@
         <a:solidFill>
           <a:srgbClr val="FFFFFF"/>
         </a:solidFill>
+        <a:effectLst/>
       </p:bgPr>
     </p:bg>
     <p:spTree>
@@ -14562,11 +14201,11 @@
           <a:bodyPr wrap="square" lIns="0" tIns="0" rIns="0" bIns="0" rtlCol="0" anchor="ctr"/>
           <a:lstStyle/>
           <a:p>
-            <a:pPr indent="0" marL="0">
-              <a:buNone/>
-            </a:pPr>
-            <a:r>
-              <a:rPr lang="en-US" sz="1200" b="1" spc="400" kern="0" dirty="0">
+            <a:pPr marL="0" indent="0">
+              <a:buNone/>
+            </a:pPr>
+            <a:r>
+              <a:rPr lang="en-US" sz="1200" b="1" kern="0" spc="400" dirty="0">
                 <a:solidFill>
                   <a:srgbClr val="A51C30"/>
                 </a:solidFill>
@@ -14601,7 +14240,7 @@
           <a:bodyPr wrap="square" lIns="0" tIns="0" rIns="0" bIns="0" rtlCol="0" anchor="ctr"/>
           <a:lstStyle/>
           <a:p>
-            <a:pPr indent="0" marL="0">
+            <a:pPr marL="0" indent="0">
               <a:buNone/>
             </a:pPr>
             <a:r>
@@ -14688,11 +14327,11 @@
           <a:bodyPr wrap="square" lIns="0" tIns="0" rIns="0" bIns="0" rtlCol="0" anchor="ctr"/>
           <a:lstStyle/>
           <a:p>
-            <a:pPr indent="0" marL="0">
-              <a:buNone/>
-            </a:pPr>
-            <a:r>
-              <a:rPr lang="en-US" sz="1100" b="1" spc="400" kern="0" dirty="0">
+            <a:pPr marL="0" indent="0">
+              <a:buNone/>
+            </a:pPr>
+            <a:r>
+              <a:rPr lang="en-US" sz="1100" b="1" kern="0" spc="400" dirty="0">
                 <a:solidFill>
                   <a:srgbClr val="A51C30"/>
                 </a:solidFill>
@@ -14727,7 +14366,7 @@
           <a:bodyPr wrap="square" lIns="0" tIns="0" rIns="0" bIns="0" rtlCol="0" anchor="ctr"/>
           <a:lstStyle/>
           <a:p>
-            <a:pPr indent="0" marL="0">
+            <a:pPr marL="0" indent="0">
               <a:buNone/>
             </a:pPr>
             <a:r>
@@ -14766,7 +14405,7 @@
           <a:bodyPr wrap="square" lIns="0" tIns="0" rIns="0" bIns="0" rtlCol="0" anchor="ctr"/>
           <a:lstStyle/>
           <a:p>
-            <a:pPr indent="0" marL="0">
+            <a:pPr marL="0" indent="0">
               <a:spcAft>
                 <a:spcPts val="400"/>
               </a:spcAft>
@@ -14808,7 +14447,7 @@
           <a:bodyPr wrap="square" lIns="0" tIns="0" rIns="0" bIns="0" rtlCol="0" anchor="ctr"/>
           <a:lstStyle/>
           <a:p>
-            <a:pPr indent="0" marL="0">
+            <a:pPr marL="0" indent="0">
               <a:buNone/>
             </a:pPr>
             <a:r>
@@ -14872,11 +14511,11 @@
           <a:bodyPr wrap="square" lIns="0" tIns="0" rIns="0" bIns="0" rtlCol="0" anchor="ctr"/>
           <a:lstStyle/>
           <a:p>
-            <a:pPr indent="0" marL="0">
-              <a:buNone/>
-            </a:pPr>
-            <a:r>
-              <a:rPr lang="en-US" sz="1100" b="1" spc="400" kern="0" dirty="0">
+            <a:pPr marL="0" indent="0">
+              <a:buNone/>
+            </a:pPr>
+            <a:r>
+              <a:rPr lang="en-US" sz="1100" b="1" kern="0" spc="400" dirty="0">
                 <a:solidFill>
                   <a:srgbClr val="A51C30"/>
                 </a:solidFill>
@@ -14911,7 +14550,7 @@
           <a:bodyPr wrap="square" lIns="0" tIns="0" rIns="0" bIns="0" rtlCol="0" anchor="ctr"/>
           <a:lstStyle/>
           <a:p>
-            <a:pPr indent="0" marL="0">
+            <a:pPr marL="0" indent="0">
               <a:buNone/>
             </a:pPr>
             <a:r>
@@ -14950,7 +14589,7 @@
           <a:bodyPr wrap="square" lIns="0" tIns="0" rIns="0" bIns="0" rtlCol="0" anchor="ctr"/>
           <a:lstStyle/>
           <a:p>
-            <a:pPr indent="0" marL="0">
+            <a:pPr marL="0" indent="0">
               <a:spcAft>
                 <a:spcPts val="400"/>
               </a:spcAft>
@@ -14992,7 +14631,7 @@
           <a:bodyPr wrap="square" lIns="0" tIns="0" rIns="0" bIns="0" rtlCol="0" anchor="ctr"/>
           <a:lstStyle/>
           <a:p>
-            <a:pPr indent="0" marL="0">
+            <a:pPr marL="0" indent="0">
               <a:buNone/>
             </a:pPr>
             <a:r>
@@ -15056,11 +14695,11 @@
           <a:bodyPr wrap="square" lIns="0" tIns="0" rIns="0" bIns="0" rtlCol="0" anchor="ctr"/>
           <a:lstStyle/>
           <a:p>
-            <a:pPr indent="0" marL="0">
-              <a:buNone/>
-            </a:pPr>
-            <a:r>
-              <a:rPr lang="en-US" sz="1100" b="1" spc="400" kern="0" dirty="0">
+            <a:pPr marL="0" indent="0">
+              <a:buNone/>
+            </a:pPr>
+            <a:r>
+              <a:rPr lang="en-US" sz="1100" b="1" kern="0" spc="400" dirty="0">
                 <a:solidFill>
                   <a:srgbClr val="A51C30"/>
                 </a:solidFill>
@@ -15095,7 +14734,7 @@
           <a:bodyPr wrap="square" lIns="0" tIns="0" rIns="0" bIns="0" rtlCol="0" anchor="ctr"/>
           <a:lstStyle/>
           <a:p>
-            <a:pPr indent="0" marL="0">
+            <a:pPr marL="0" indent="0">
               <a:buNone/>
             </a:pPr>
             <a:r>
@@ -15134,7 +14773,7 @@
           <a:bodyPr wrap="square" lIns="0" tIns="0" rIns="0" bIns="0" rtlCol="0" anchor="ctr"/>
           <a:lstStyle/>
           <a:p>
-            <a:pPr indent="0" marL="0">
+            <a:pPr marL="0" indent="0">
               <a:spcAft>
                 <a:spcPts val="400"/>
               </a:spcAft>
@@ -15176,7 +14815,7 @@
           <a:bodyPr wrap="square" lIns="0" tIns="0" rIns="0" bIns="0" rtlCol="0" anchor="ctr"/>
           <a:lstStyle/>
           <a:p>
-            <a:pPr indent="0" marL="0">
+            <a:pPr marL="0" indent="0">
               <a:buNone/>
             </a:pPr>
             <a:r>
@@ -15215,7 +14854,7 @@
           <a:bodyPr wrap="square" lIns="0" tIns="0" rIns="0" bIns="0" rtlCol="0" anchor="ctr"/>
           <a:lstStyle/>
           <a:p>
-            <a:pPr algn="ctr" indent="0" marL="0">
+            <a:pPr marL="0" indent="0" algn="ctr">
               <a:buNone/>
             </a:pPr>
             <a:r>
@@ -15249,6 +14888,7 @@
         <a:solidFill>
           <a:srgbClr val="FFFFFF"/>
         </a:solidFill>
+        <a:effectLst/>
       </p:bgPr>
     </p:bg>
     <p:spTree>
@@ -15286,11 +14926,11 @@
           <a:bodyPr wrap="square" lIns="0" tIns="0" rIns="0" bIns="0" rtlCol="0" anchor="ctr"/>
           <a:lstStyle/>
           <a:p>
-            <a:pPr indent="0" marL="0">
-              <a:buNone/>
-            </a:pPr>
-            <a:r>
-              <a:rPr lang="en-US" sz="1200" b="1" spc="400" kern="0" dirty="0">
+            <a:pPr marL="0" indent="0">
+              <a:buNone/>
+            </a:pPr>
+            <a:r>
+              <a:rPr lang="en-US" sz="1200" b="1" kern="0" spc="400" dirty="0">
                 <a:solidFill>
                   <a:srgbClr val="A51C30"/>
                 </a:solidFill>
@@ -15325,7 +14965,7 @@
           <a:bodyPr wrap="square" lIns="0" tIns="0" rIns="0" bIns="0" rtlCol="0" anchor="ctr"/>
           <a:lstStyle/>
           <a:p>
-            <a:pPr indent="0" marL="0">
+            <a:pPr marL="0" indent="0">
               <a:buNone/>
             </a:pPr>
             <a:r>
@@ -15412,11 +15052,11 @@
           <a:bodyPr wrap="square" lIns="0" tIns="0" rIns="0" bIns="0" rtlCol="0" anchor="ctr"/>
           <a:lstStyle/>
           <a:p>
-            <a:pPr algn="ctr" indent="0" marL="0">
-              <a:buNone/>
-            </a:pPr>
-            <a:r>
-              <a:rPr lang="en-US" sz="1500" b="1" spc="400" kern="0" dirty="0">
+            <a:pPr marL="0" indent="0" algn="ctr">
+              <a:buNone/>
+            </a:pPr>
+            <a:r>
+              <a:rPr lang="en-US" sz="1500" b="1" kern="0" spc="400" dirty="0">
                 <a:solidFill>
                   <a:srgbClr val="FFFFFF"/>
                 </a:solidFill>
@@ -15451,7 +15091,7 @@
           <a:bodyPr wrap="square" lIns="0" tIns="0" rIns="0" bIns="0" rtlCol="0" anchor="ctr"/>
           <a:lstStyle/>
           <a:p>
-            <a:pPr indent="0" marL="0">
+            <a:pPr marL="0" indent="0">
               <a:buNone/>
             </a:pPr>
             <a:r>
@@ -15490,7 +15130,7 @@
           <a:bodyPr wrap="square" lIns="0" tIns="0" rIns="0" bIns="0" rtlCol="0" anchor="ctr"/>
           <a:lstStyle/>
           <a:p>
-            <a:pPr indent="0" marL="0">
+            <a:pPr marL="0" indent="0">
               <a:buNone/>
             </a:pPr>
             <a:r>
@@ -15554,11 +15194,11 @@
           <a:bodyPr wrap="square" lIns="0" tIns="0" rIns="0" bIns="0" rtlCol="0" anchor="ctr"/>
           <a:lstStyle/>
           <a:p>
-            <a:pPr algn="ctr" indent="0" marL="0">
-              <a:buNone/>
-            </a:pPr>
-            <a:r>
-              <a:rPr lang="en-US" sz="1500" b="1" spc="400" kern="0" dirty="0">
+            <a:pPr marL="0" indent="0" algn="ctr">
+              <a:buNone/>
+            </a:pPr>
+            <a:r>
+              <a:rPr lang="en-US" sz="1500" b="1" kern="0" spc="400" dirty="0">
                 <a:solidFill>
                   <a:srgbClr val="FFFFFF"/>
                 </a:solidFill>
@@ -15593,7 +15233,7 @@
           <a:bodyPr wrap="square" lIns="0" tIns="0" rIns="0" bIns="0" rtlCol="0" anchor="ctr"/>
           <a:lstStyle/>
           <a:p>
-            <a:pPr indent="0" marL="0">
+            <a:pPr marL="0" indent="0">
               <a:buNone/>
             </a:pPr>
             <a:r>
@@ -15632,7 +15272,7 @@
           <a:bodyPr wrap="square" lIns="0" tIns="0" rIns="0" bIns="0" rtlCol="0" anchor="ctr"/>
           <a:lstStyle/>
           <a:p>
-            <a:pPr indent="0" marL="0">
+            <a:pPr marL="0" indent="0">
               <a:buNone/>
             </a:pPr>
             <a:r>
@@ -15696,11 +15336,11 @@
           <a:bodyPr wrap="square" lIns="0" tIns="0" rIns="0" bIns="0" rtlCol="0" anchor="ctr"/>
           <a:lstStyle/>
           <a:p>
-            <a:pPr algn="ctr" indent="0" marL="0">
-              <a:buNone/>
-            </a:pPr>
-            <a:r>
-              <a:rPr lang="en-US" sz="1500" b="1" spc="400" kern="0" dirty="0">
+            <a:pPr marL="0" indent="0" algn="ctr">
+              <a:buNone/>
+            </a:pPr>
+            <a:r>
+              <a:rPr lang="en-US" sz="1500" b="1" kern="0" spc="400" dirty="0">
                 <a:solidFill>
                   <a:srgbClr val="FFFFFF"/>
                 </a:solidFill>
@@ -15735,7 +15375,7 @@
           <a:bodyPr wrap="square" lIns="0" tIns="0" rIns="0" bIns="0" rtlCol="0" anchor="ctr"/>
           <a:lstStyle/>
           <a:p>
-            <a:pPr indent="0" marL="0">
+            <a:pPr marL="0" indent="0">
               <a:buNone/>
             </a:pPr>
             <a:r>
@@ -15774,7 +15414,7 @@
           <a:bodyPr wrap="square" lIns="0" tIns="0" rIns="0" bIns="0" rtlCol="0" anchor="ctr"/>
           <a:lstStyle/>
           <a:p>
-            <a:pPr indent="0" marL="0">
+            <a:pPr marL="0" indent="0">
               <a:buNone/>
             </a:pPr>
             <a:r>
@@ -15838,11 +15478,11 @@
           <a:bodyPr wrap="square" lIns="0" tIns="0" rIns="0" bIns="0" rtlCol="0" anchor="ctr"/>
           <a:lstStyle/>
           <a:p>
-            <a:pPr algn="ctr" indent="0" marL="0">
-              <a:buNone/>
-            </a:pPr>
-            <a:r>
-              <a:rPr lang="en-US" sz="1500" b="1" spc="400" kern="0" dirty="0">
+            <a:pPr marL="0" indent="0" algn="ctr">
+              <a:buNone/>
+            </a:pPr>
+            <a:r>
+              <a:rPr lang="en-US" sz="1500" b="1" kern="0" spc="400" dirty="0">
                 <a:solidFill>
                   <a:srgbClr val="FFFFFF"/>
                 </a:solidFill>
@@ -15877,7 +15517,7 @@
           <a:bodyPr wrap="square" lIns="0" tIns="0" rIns="0" bIns="0" rtlCol="0" anchor="ctr"/>
           <a:lstStyle/>
           <a:p>
-            <a:pPr indent="0" marL="0">
+            <a:pPr marL="0" indent="0">
               <a:buNone/>
             </a:pPr>
             <a:r>
@@ -15916,7 +15556,7 @@
           <a:bodyPr wrap="square" lIns="0" tIns="0" rIns="0" bIns="0" rtlCol="0" anchor="ctr"/>
           <a:lstStyle/>
           <a:p>
-            <a:pPr indent="0" marL="0">
+            <a:pPr marL="0" indent="0">
               <a:buNone/>
             </a:pPr>
             <a:r>
@@ -15955,7 +15595,7 @@
           <a:bodyPr wrap="square" lIns="0" tIns="0" rIns="0" bIns="0" rtlCol="0" anchor="ctr"/>
           <a:lstStyle/>
           <a:p>
-            <a:pPr algn="ctr" indent="0" marL="0">
+            <a:pPr marL="0" indent="0" algn="ctr">
               <a:buNone/>
             </a:pPr>
             <a:r>
@@ -15989,6 +15629,7 @@
         <a:solidFill>
           <a:srgbClr val="FFFFFF"/>
         </a:solidFill>
+        <a:effectLst/>
       </p:bgPr>
     </p:bg>
     <p:spTree>
@@ -16026,11 +15667,11 @@
           <a:bodyPr wrap="square" lIns="0" tIns="0" rIns="0" bIns="0" rtlCol="0" anchor="ctr"/>
           <a:lstStyle/>
           <a:p>
-            <a:pPr indent="0" marL="0">
-              <a:buNone/>
-            </a:pPr>
-            <a:r>
-              <a:rPr lang="en-US" sz="1200" b="1" spc="400" kern="0" dirty="0">
+            <a:pPr marL="0" indent="0">
+              <a:buNone/>
+            </a:pPr>
+            <a:r>
+              <a:rPr lang="en-US" sz="1200" b="1" kern="0" spc="400" dirty="0">
                 <a:solidFill>
                   <a:srgbClr val="A51C30"/>
                 </a:solidFill>
@@ -16065,7 +15706,7 @@
           <a:bodyPr wrap="square" lIns="0" tIns="0" rIns="0" bIns="0" rtlCol="0" anchor="ctr"/>
           <a:lstStyle/>
           <a:p>
-            <a:pPr indent="0" marL="0">
+            <a:pPr marL="0" indent="0">
               <a:buNone/>
             </a:pPr>
             <a:r>
@@ -16154,7 +15795,7 @@
           <a:bodyPr wrap="square" lIns="0" tIns="0" rIns="0" bIns="0" rtlCol="0" anchor="ctr"/>
           <a:lstStyle/>
           <a:p>
-            <a:pPr algn="ctr" indent="0" marL="0">
+            <a:pPr marL="0" indent="0" algn="ctr">
               <a:buNone/>
             </a:pPr>
             <a:r>
@@ -16193,7 +15834,7 @@
           <a:bodyPr wrap="square" lIns="0" tIns="0" rIns="0" bIns="0" rtlCol="0" anchor="ctr"/>
           <a:lstStyle/>
           <a:p>
-            <a:pPr indent="0" marL="0">
+            <a:pPr marL="0" indent="0">
               <a:buNone/>
             </a:pPr>
             <a:r>
@@ -16232,7 +15873,7 @@
           <a:bodyPr wrap="square" lIns="0" tIns="0" rIns="0" bIns="0" rtlCol="0" anchor="ctr"/>
           <a:lstStyle/>
           <a:p>
-            <a:pPr indent="0" marL="0">
+            <a:pPr marL="0" indent="0">
               <a:buNone/>
             </a:pPr>
             <a:r>
@@ -16298,7 +15939,7 @@
           <a:bodyPr wrap="square" lIns="0" tIns="0" rIns="0" bIns="0" rtlCol="0" anchor="ctr"/>
           <a:lstStyle/>
           <a:p>
-            <a:pPr algn="ctr" indent="0" marL="0">
+            <a:pPr marL="0" indent="0" algn="ctr">
               <a:buNone/>
             </a:pPr>
             <a:r>
@@ -16337,7 +15978,7 @@
           <a:bodyPr wrap="square" lIns="0" tIns="0" rIns="0" bIns="0" rtlCol="0" anchor="ctr"/>
           <a:lstStyle/>
           <a:p>
-            <a:pPr indent="0" marL="0">
+            <a:pPr marL="0" indent="0">
               <a:buNone/>
             </a:pPr>
             <a:r>
@@ -16376,7 +16017,7 @@
           <a:bodyPr wrap="square" lIns="0" tIns="0" rIns="0" bIns="0" rtlCol="0" anchor="ctr"/>
           <a:lstStyle/>
           <a:p>
-            <a:pPr indent="0" marL="0">
+            <a:pPr marL="0" indent="0">
               <a:buNone/>
             </a:pPr>
             <a:r>
@@ -16442,7 +16083,7 @@
           <a:bodyPr wrap="square" lIns="0" tIns="0" rIns="0" bIns="0" rtlCol="0" anchor="ctr"/>
           <a:lstStyle/>
           <a:p>
-            <a:pPr algn="ctr" indent="0" marL="0">
+            <a:pPr marL="0" indent="0" algn="ctr">
               <a:buNone/>
             </a:pPr>
             <a:r>
@@ -16481,7 +16122,7 @@
           <a:bodyPr wrap="square" lIns="0" tIns="0" rIns="0" bIns="0" rtlCol="0" anchor="ctr"/>
           <a:lstStyle/>
           <a:p>
-            <a:pPr indent="0" marL="0">
+            <a:pPr marL="0" indent="0">
               <a:buNone/>
             </a:pPr>
             <a:r>
@@ -16520,7 +16161,7 @@
           <a:bodyPr wrap="square" lIns="0" tIns="0" rIns="0" bIns="0" rtlCol="0" anchor="ctr"/>
           <a:lstStyle/>
           <a:p>
-            <a:pPr indent="0" marL="0">
+            <a:pPr marL="0" indent="0">
               <a:buNone/>
             </a:pPr>
             <a:r>
@@ -16586,7 +16227,7 @@
           <a:bodyPr wrap="square" lIns="0" tIns="0" rIns="0" bIns="0" rtlCol="0" anchor="ctr"/>
           <a:lstStyle/>
           <a:p>
-            <a:pPr algn="ctr" indent="0" marL="0">
+            <a:pPr marL="0" indent="0" algn="ctr">
               <a:buNone/>
             </a:pPr>
             <a:r>
@@ -16625,7 +16266,7 @@
           <a:bodyPr wrap="square" lIns="0" tIns="0" rIns="0" bIns="0" rtlCol="0" anchor="ctr"/>
           <a:lstStyle/>
           <a:p>
-            <a:pPr indent="0" marL="0">
+            <a:pPr marL="0" indent="0">
               <a:buNone/>
             </a:pPr>
             <a:r>
@@ -16664,7 +16305,7 @@
           <a:bodyPr wrap="square" lIns="0" tIns="0" rIns="0" bIns="0" rtlCol="0" anchor="ctr"/>
           <a:lstStyle/>
           <a:p>
-            <a:pPr indent="0" marL="0">
+            <a:pPr marL="0" indent="0">
               <a:buNone/>
             </a:pPr>
             <a:r>
@@ -16698,6 +16339,7 @@
         <a:solidFill>
           <a:srgbClr val="FFFFFF"/>
         </a:solidFill>
+        <a:effectLst/>
       </p:bgPr>
     </p:bg>
     <p:spTree>
@@ -16735,11 +16377,11 @@
           <a:bodyPr wrap="square" lIns="0" tIns="0" rIns="0" bIns="0" rtlCol="0" anchor="ctr"/>
           <a:lstStyle/>
           <a:p>
-            <a:pPr indent="0" marL="0">
-              <a:buNone/>
-            </a:pPr>
-            <a:r>
-              <a:rPr lang="en-US" sz="1200" b="1" spc="400" kern="0" dirty="0">
+            <a:pPr marL="0" indent="0">
+              <a:buNone/>
+            </a:pPr>
+            <a:r>
+              <a:rPr lang="en-US" sz="1200" b="1" kern="0" spc="400" dirty="0">
                 <a:solidFill>
                   <a:srgbClr val="A51C30"/>
                 </a:solidFill>
@@ -16774,11 +16416,11 @@
           <a:bodyPr wrap="square" lIns="0" tIns="0" rIns="0" bIns="0" rtlCol="0" anchor="ctr"/>
           <a:lstStyle/>
           <a:p>
-            <a:pPr indent="0" marL="0">
-              <a:buNone/>
-            </a:pPr>
-            <a:r>
-              <a:rPr lang="en-US" sz="3400" b="1" dirty="0">
+            <a:pPr marL="0" indent="0">
+              <a:buNone/>
+            </a:pPr>
+            <a:r>
+              <a:rPr lang="en-US" sz="2000" b="1" dirty="0">
                 <a:solidFill>
                   <a:srgbClr val="293352"/>
                 </a:solidFill>
@@ -16786,9 +16428,9 @@
                 <a:ea typeface="Arial" pitchFamily="34" charset="-122"/>
                 <a:cs typeface="Arial" pitchFamily="34" charset="-120"/>
               </a:rPr>
-              <a:t>Provide the transcript</a:t>
-            </a:r>
-            <a:endParaRPr lang="en-US" sz="3400" dirty="0"/>
+              <a:t>Think through starting from user (you) to functional requirement to your actual prompt.  Vibe code just the prompt or describe all of it in the chat.  Do not just do one part which will be incomplete and cause more work.</a:t>
+            </a:r>
+            <a:endParaRPr lang="en-US" sz="2000" dirty="0"/>
           </a:p>
         </p:txBody>
       </p:sp>
@@ -16861,11 +16503,11 @@
           <a:bodyPr wrap="square" lIns="0" tIns="0" rIns="0" bIns="0" rtlCol="0" anchor="ctr"/>
           <a:lstStyle/>
           <a:p>
-            <a:pPr indent="0" marL="0">
-              <a:buNone/>
-            </a:pPr>
-            <a:r>
-              <a:rPr lang="en-US" sz="1200" b="1" spc="500" kern="0" dirty="0">
+            <a:pPr marL="0" indent="0">
+              <a:buNone/>
+            </a:pPr>
+            <a:r>
+              <a:rPr lang="en-US" sz="1200" b="1" kern="0" spc="500" dirty="0">
                 <a:solidFill>
                   <a:srgbClr val="A51C30"/>
                 </a:solidFill>
@@ -16900,7 +16542,7 @@
           <a:bodyPr wrap="square" lIns="0" tIns="0" rIns="0" bIns="0" rtlCol="0" anchor="ctr"/>
           <a:lstStyle/>
           <a:p>
-            <a:pPr indent="0" marL="0">
+            <a:pPr marL="0" indent="0">
               <a:buNone/>
             </a:pPr>
             <a:r>
@@ -16939,7 +16581,7 @@
           <a:bodyPr wrap="square" lIns="0" tIns="0" rIns="0" bIns="0" rtlCol="0" anchor="ctr"/>
           <a:lstStyle/>
           <a:p>
-            <a:pPr indent="0" marL="0">
+            <a:pPr marL="0" indent="0">
               <a:buNone/>
             </a:pPr>
             <a:r>
@@ -17003,11 +16645,11 @@
           <a:bodyPr wrap="square" lIns="0" tIns="0" rIns="0" bIns="0" rtlCol="0" anchor="ctr"/>
           <a:lstStyle/>
           <a:p>
-            <a:pPr indent="0" marL="0">
-              <a:buNone/>
-            </a:pPr>
-            <a:r>
-              <a:rPr lang="en-US" sz="1200" b="1" spc="500" kern="0" dirty="0">
+            <a:pPr marL="0" indent="0">
+              <a:buNone/>
+            </a:pPr>
+            <a:r>
+              <a:rPr lang="en-US" sz="1200" b="1" kern="0" spc="500" dirty="0">
                 <a:solidFill>
                   <a:srgbClr val="F3F3F1"/>
                 </a:solidFill>
@@ -17042,7 +16684,7 @@
           <a:bodyPr wrap="square" lIns="0" tIns="0" rIns="0" bIns="0" rtlCol="0" anchor="ctr"/>
           <a:lstStyle/>
           <a:p>
-            <a:pPr indent="0" marL="0">
+            <a:pPr marL="0" indent="0">
               <a:buNone/>
             </a:pPr>
             <a:r>
@@ -17182,45 +16824,6 @@
                 <a:cs typeface="Arial" pitchFamily="34" charset="-120"/>
               </a:rPr>
               <a:t>On upload of a different file, replace the previous transcript cleanly.</a:t>
-            </a:r>
-            <a:endParaRPr lang="en-US" sz="1300" dirty="0"/>
-          </a:p>
-        </p:txBody>
-      </p:sp>
-      <p:sp>
-        <p:nvSpPr>
-          <p:cNvPr id="13" name="Text 11"/>
-          <p:cNvSpPr/>
-          <p:nvPr/>
-        </p:nvSpPr>
-        <p:spPr>
-          <a:xfrm>
-            <a:off x="457200" y="6126480"/>
-            <a:ext cx="11247120" cy="320040"/>
-          </a:xfrm>
-          <a:prstGeom prst="rect">
-            <a:avLst/>
-          </a:prstGeom>
-          <a:noFill/>
-          <a:ln/>
-        </p:spPr>
-        <p:txBody>
-          <a:bodyPr wrap="square" lIns="0" tIns="0" rIns="0" bIns="0" rtlCol="0" anchor="ctr"/>
-          <a:lstStyle/>
-          <a:p>
-            <a:pPr algn="ctr" indent="0" marL="0">
-              <a:buNone/>
-            </a:pPr>
-            <a:r>
-              <a:rPr lang="en-US" sz="1300" i="1" dirty="0">
-                <a:solidFill>
-                  <a:srgbClr val="8996A0"/>
-                </a:solidFill>
-                <a:latin typeface="Arial" pitchFamily="34" charset="0"/>
-                <a:ea typeface="Arial" pitchFamily="34" charset="-122"/>
-                <a:cs typeface="Arial" pitchFamily="34" charset="-120"/>
-              </a:rPr>
-              <a:t>BUILD TIME  ·  ABOUT 5 MINUTES</a:t>
             </a:r>
             <a:endParaRPr lang="en-US" sz="1300" dirty="0"/>
           </a:p>
@@ -17242,6 +16845,7 @@
         <a:solidFill>
           <a:srgbClr val="FFFFFF"/>
         </a:solidFill>
+        <a:effectLst/>
       </p:bgPr>
     </p:bg>
     <p:spTree>
@@ -17279,11 +16883,11 @@
           <a:bodyPr wrap="square" lIns="0" tIns="0" rIns="0" bIns="0" rtlCol="0" anchor="ctr"/>
           <a:lstStyle/>
           <a:p>
-            <a:pPr indent="0" marL="0">
-              <a:buNone/>
-            </a:pPr>
-            <a:r>
-              <a:rPr lang="en-US" sz="1200" b="1" spc="400" kern="0" dirty="0">
+            <a:pPr marL="0" indent="0">
+              <a:buNone/>
+            </a:pPr>
+            <a:r>
+              <a:rPr lang="en-US" sz="1200" b="1" kern="0" spc="400" dirty="0">
                 <a:solidFill>
                   <a:srgbClr val="A51C30"/>
                 </a:solidFill>
@@ -17318,7 +16922,7 @@
           <a:bodyPr wrap="square" lIns="0" tIns="0" rIns="0" bIns="0" rtlCol="0" anchor="ctr"/>
           <a:lstStyle/>
           <a:p>
-            <a:pPr indent="0" marL="0">
+            <a:pPr marL="0" indent="0">
               <a:buNone/>
             </a:pPr>
             <a:r>
@@ -17386,13 +16990,397 @@
       </p:sp>
       <p:sp>
         <p:nvSpPr>
-          <p:cNvPr id="6" name="Shape 4"/>
-          <p:cNvSpPr/>
-          <p:nvPr/>
-        </p:nvSpPr>
-        <p:spPr>
-          <a:xfrm>
-            <a:off x="457200" y="1965960"/>
+          <p:cNvPr id="8" name="Text 6"/>
+          <p:cNvSpPr/>
+          <p:nvPr/>
+        </p:nvSpPr>
+        <p:spPr>
+          <a:xfrm>
+            <a:off x="731520" y="2468880"/>
+            <a:ext cx="10698480" cy="3611880"/>
+          </a:xfrm>
+          <a:prstGeom prst="rect">
+            <a:avLst/>
+          </a:prstGeom>
+          <a:noFill/>
+          <a:ln/>
+        </p:spPr>
+        <p:txBody>
+          <a:bodyPr wrap="square" lIns="0" tIns="0" rIns="0" bIns="0" rtlCol="0" anchor="ctr"/>
+          <a:lstStyle/>
+          <a:p>
+            <a:pPr marL="0" indent="0">
+              <a:spcAft>
+                <a:spcPts val="200"/>
+              </a:spcAft>
+              <a:buNone/>
+            </a:pPr>
+            <a:r>
+              <a:rPr lang="en-US" sz="1050" dirty="0">
+                <a:solidFill>
+                  <a:srgbClr val="1E1E1E"/>
+                </a:solidFill>
+                <a:latin typeface="Consolas" pitchFamily="34" charset="0"/>
+                <a:ea typeface="Consolas" pitchFamily="34" charset="-122"/>
+                <a:cs typeface="Consolas" pitchFamily="34" charset="-120"/>
+              </a:rPr>
+              <a:t>Build a transcript loader for our Vite vanilla JS SPA.</a:t>
+            </a:r>
+            <a:endParaRPr lang="en-US" sz="1050" dirty="0"/>
+          </a:p>
+          <a:p>
+            <a:pPr marL="0" indent="0">
+              <a:spcAft>
+                <a:spcPts val="200"/>
+              </a:spcAft>
+              <a:buNone/>
+            </a:pPr>
+            <a:endParaRPr lang="en-US" sz="1050" dirty="0"/>
+          </a:p>
+          <a:p>
+            <a:pPr marL="0" indent="0">
+              <a:spcAft>
+                <a:spcPts val="200"/>
+              </a:spcAft>
+              <a:buNone/>
+            </a:pPr>
+            <a:r>
+              <a:rPr lang="en-US" sz="1050" dirty="0">
+                <a:solidFill>
+                  <a:srgbClr val="1E1E1E"/>
+                </a:solidFill>
+                <a:latin typeface="Consolas" pitchFamily="34" charset="0"/>
+                <a:ea typeface="Consolas" pitchFamily="34" charset="-122"/>
+                <a:cs typeface="Consolas" pitchFamily="34" charset="-120"/>
+              </a:rPr>
+              <a:t>CONTEXT</a:t>
+            </a:r>
+            <a:endParaRPr lang="en-US" sz="1050" dirty="0"/>
+          </a:p>
+          <a:p>
+            <a:pPr marL="0" indent="0">
+              <a:spcAft>
+                <a:spcPts val="200"/>
+              </a:spcAft>
+              <a:buNone/>
+            </a:pPr>
+            <a:r>
+              <a:rPr lang="en-US" sz="1050" dirty="0">
+                <a:solidFill>
+                  <a:srgbClr val="1E1E1E"/>
+                </a:solidFill>
+                <a:latin typeface="Consolas" pitchFamily="34" charset="0"/>
+                <a:ea typeface="Consolas" pitchFamily="34" charset="-122"/>
+                <a:cs typeface="Consolas" pitchFamily="34" charset="-120"/>
+              </a:rPr>
+              <a:t>The app already runs (npm run dev). PapaParse is loaded. The transcript is a</a:t>
+            </a:r>
+            <a:endParaRPr lang="en-US" sz="1050" dirty="0"/>
+          </a:p>
+          <a:p>
+            <a:pPr marL="0" indent="0">
+              <a:spcAft>
+                <a:spcPts val="200"/>
+              </a:spcAft>
+              <a:buNone/>
+            </a:pPr>
+            <a:r>
+              <a:rPr lang="en-US" sz="1050" dirty="0">
+                <a:solidFill>
+                  <a:srgbClr val="1E1E1E"/>
+                </a:solidFill>
+                <a:latin typeface="Consolas" pitchFamily="34" charset="0"/>
+                <a:ea typeface="Consolas" pitchFamily="34" charset="-122"/>
+                <a:cs typeface="Consolas" pitchFamily="34" charset="-120"/>
+              </a:rPr>
+              <a:t>CSV with columns: symbol, report_date, speaker, title, msg, source_url. One</a:t>
+            </a:r>
+            <a:endParaRPr lang="en-US" sz="1050" dirty="0"/>
+          </a:p>
+          <a:p>
+            <a:pPr marL="0" indent="0">
+              <a:spcAft>
+                <a:spcPts val="200"/>
+              </a:spcAft>
+              <a:buNone/>
+            </a:pPr>
+            <a:r>
+              <a:rPr lang="en-US" sz="1050" dirty="0">
+                <a:solidFill>
+                  <a:srgbClr val="1E1E1E"/>
+                </a:solidFill>
+                <a:latin typeface="Consolas" pitchFamily="34" charset="0"/>
+                <a:ea typeface="Consolas" pitchFamily="34" charset="-122"/>
+                <a:cs typeface="Consolas" pitchFamily="34" charset="-120"/>
+              </a:rPr>
+              <a:t>row per speaker turn.</a:t>
+            </a:r>
+            <a:endParaRPr lang="en-US" sz="1050" dirty="0"/>
+          </a:p>
+          <a:p>
+            <a:pPr marL="0" indent="0">
+              <a:spcAft>
+                <a:spcPts val="200"/>
+              </a:spcAft>
+              <a:buNone/>
+            </a:pPr>
+            <a:endParaRPr lang="en-US" sz="1050" dirty="0"/>
+          </a:p>
+          <a:p>
+            <a:pPr marL="0" indent="0">
+              <a:spcAft>
+                <a:spcPts val="200"/>
+              </a:spcAft>
+              <a:buNone/>
+            </a:pPr>
+            <a:r>
+              <a:rPr lang="en-US" sz="1050" dirty="0">
+                <a:solidFill>
+                  <a:srgbClr val="1E1E1E"/>
+                </a:solidFill>
+                <a:latin typeface="Consolas" pitchFamily="34" charset="0"/>
+                <a:ea typeface="Consolas" pitchFamily="34" charset="-122"/>
+                <a:cs typeface="Consolas" pitchFamily="34" charset="-120"/>
+              </a:rPr>
+              <a:t>TASK</a:t>
+            </a:r>
+            <a:endParaRPr lang="en-US" sz="1050" dirty="0"/>
+          </a:p>
+          <a:p>
+            <a:pPr marL="0" indent="0">
+              <a:spcAft>
+                <a:spcPts val="200"/>
+              </a:spcAft>
+              <a:buNone/>
+            </a:pPr>
+            <a:r>
+              <a:rPr lang="en-US" sz="1050" dirty="0">
+                <a:solidFill>
+                  <a:srgbClr val="1E1E1E"/>
+                </a:solidFill>
+                <a:latin typeface="Consolas" pitchFamily="34" charset="0"/>
+                <a:ea typeface="Consolas" pitchFamily="34" charset="-122"/>
+                <a:cs typeface="Consolas" pitchFamily="34" charset="-120"/>
+              </a:rPr>
+              <a:t>Add a file input that accepts a single .csv. On selection, parse with</a:t>
+            </a:r>
+            <a:endParaRPr lang="en-US" sz="1050" dirty="0"/>
+          </a:p>
+          <a:p>
+            <a:pPr marL="0" indent="0">
+              <a:spcAft>
+                <a:spcPts val="200"/>
+              </a:spcAft>
+              <a:buNone/>
+            </a:pPr>
+            <a:r>
+              <a:rPr lang="en-US" sz="1050" dirty="0">
+                <a:solidFill>
+                  <a:srgbClr val="1E1E1E"/>
+                </a:solidFill>
+                <a:latin typeface="Consolas" pitchFamily="34" charset="0"/>
+                <a:ea typeface="Consolas" pitchFamily="34" charset="-122"/>
+                <a:cs typeface="Consolas" pitchFamily="34" charset="-120"/>
+              </a:rPr>
+              <a:t>PapaParse and store the rows in a top level `transcript` variable. Render a</a:t>
+            </a:r>
+            <a:endParaRPr lang="en-US" sz="1050" dirty="0"/>
+          </a:p>
+          <a:p>
+            <a:pPr marL="0" indent="0">
+              <a:spcAft>
+                <a:spcPts val="200"/>
+              </a:spcAft>
+              <a:buNone/>
+            </a:pPr>
+            <a:r>
+              <a:rPr lang="en-US" sz="1050" dirty="0">
+                <a:solidFill>
+                  <a:srgbClr val="1E1E1E"/>
+                </a:solidFill>
+                <a:latin typeface="Consolas" pitchFamily="34" charset="0"/>
+                <a:ea typeface="Consolas" pitchFamily="34" charset="-122"/>
+                <a:cs typeface="Consolas" pitchFamily="34" charset="-120"/>
+              </a:rPr>
+              <a:t>confirmation line on the page: "&lt;symbol&gt; · &lt;report_date&gt; · &lt;n&gt; turns</a:t>
+            </a:r>
+            <a:endParaRPr lang="en-US" sz="1050" dirty="0"/>
+          </a:p>
+          <a:p>
+            <a:pPr marL="0" indent="0">
+              <a:spcAft>
+                <a:spcPts val="200"/>
+              </a:spcAft>
+              <a:buNone/>
+            </a:pPr>
+            <a:r>
+              <a:rPr lang="en-US" sz="1050" dirty="0">
+                <a:solidFill>
+                  <a:srgbClr val="1E1E1E"/>
+                </a:solidFill>
+                <a:latin typeface="Consolas" pitchFamily="34" charset="0"/>
+                <a:ea typeface="Consolas" pitchFamily="34" charset="-122"/>
+                <a:cs typeface="Consolas" pitchFamily="34" charset="-120"/>
+              </a:rPr>
+              <a:t>loaded".</a:t>
+            </a:r>
+            <a:endParaRPr lang="en-US" sz="1050" dirty="0"/>
+          </a:p>
+          <a:p>
+            <a:pPr marL="0" indent="0">
+              <a:spcAft>
+                <a:spcPts val="200"/>
+              </a:spcAft>
+              <a:buNone/>
+            </a:pPr>
+            <a:endParaRPr lang="en-US" sz="1050" dirty="0"/>
+          </a:p>
+          <a:p>
+            <a:pPr marL="0" indent="0">
+              <a:spcAft>
+                <a:spcPts val="200"/>
+              </a:spcAft>
+              <a:buNone/>
+            </a:pPr>
+            <a:r>
+              <a:rPr lang="en-US" sz="1050" dirty="0">
+                <a:solidFill>
+                  <a:srgbClr val="1E1E1E"/>
+                </a:solidFill>
+                <a:latin typeface="Consolas" pitchFamily="34" charset="0"/>
+                <a:ea typeface="Consolas" pitchFamily="34" charset="-122"/>
+                <a:cs typeface="Consolas" pitchFamily="34" charset="-120"/>
+              </a:rPr>
+              <a:t>CONSTRAINT</a:t>
+            </a:r>
+            <a:endParaRPr lang="en-US" sz="1050" dirty="0"/>
+          </a:p>
+          <a:p>
+            <a:pPr marL="0" indent="0">
+              <a:spcAft>
+                <a:spcPts val="200"/>
+              </a:spcAft>
+              <a:buNone/>
+            </a:pPr>
+            <a:r>
+              <a:rPr lang="en-US" sz="1050" dirty="0">
+                <a:solidFill>
+                  <a:srgbClr val="1E1E1E"/>
+                </a:solidFill>
+                <a:latin typeface="Consolas" pitchFamily="34" charset="0"/>
+                <a:ea typeface="Consolas" pitchFamily="34" charset="-122"/>
+                <a:cs typeface="Consolas" pitchFamily="34" charset="-120"/>
+              </a:rPr>
+              <a:t>Do not fetch anything. The user provides the file. If the CSV is missing a</a:t>
+            </a:r>
+            <a:endParaRPr lang="en-US" sz="1050" dirty="0"/>
+          </a:p>
+          <a:p>
+            <a:pPr marL="0" indent="0">
+              <a:spcAft>
+                <a:spcPts val="200"/>
+              </a:spcAft>
+              <a:buNone/>
+            </a:pPr>
+            <a:r>
+              <a:rPr lang="en-US" sz="1050" dirty="0">
+                <a:solidFill>
+                  <a:srgbClr val="1E1E1E"/>
+                </a:solidFill>
+                <a:latin typeface="Consolas" pitchFamily="34" charset="0"/>
+                <a:ea typeface="Consolas" pitchFamily="34" charset="-122"/>
+                <a:cs typeface="Consolas" pitchFamily="34" charset="-120"/>
+              </a:rPr>
+              <a:t>required column, show the missing name on screen and stop cleanly.</a:t>
+            </a:r>
+            <a:endParaRPr lang="en-US" sz="1050" dirty="0"/>
+          </a:p>
+          <a:p>
+            <a:pPr marL="0" indent="0">
+              <a:spcAft>
+                <a:spcPts val="200"/>
+              </a:spcAft>
+              <a:buNone/>
+            </a:pPr>
+            <a:endParaRPr lang="en-US" sz="1050" dirty="0"/>
+          </a:p>
+          <a:p>
+            <a:pPr marL="0" indent="0">
+              <a:spcAft>
+                <a:spcPts val="200"/>
+              </a:spcAft>
+              <a:buNone/>
+            </a:pPr>
+            <a:r>
+              <a:rPr lang="en-US" sz="1050" dirty="0">
+                <a:solidFill>
+                  <a:srgbClr val="1E1E1E"/>
+                </a:solidFill>
+                <a:latin typeface="Consolas" pitchFamily="34" charset="0"/>
+                <a:ea typeface="Consolas" pitchFamily="34" charset="-122"/>
+                <a:cs typeface="Consolas" pitchFamily="34" charset="-120"/>
+              </a:rPr>
+              <a:t>ACCEPTANCE</a:t>
+            </a:r>
+            <a:endParaRPr lang="en-US" sz="1050" dirty="0"/>
+          </a:p>
+          <a:p>
+            <a:pPr marL="0" indent="0">
+              <a:spcAft>
+                <a:spcPts val="200"/>
+              </a:spcAft>
+              <a:buNone/>
+            </a:pPr>
+            <a:r>
+              <a:rPr lang="en-US" sz="1050" dirty="0">
+                <a:solidFill>
+                  <a:srgbClr val="1E1E1E"/>
+                </a:solidFill>
+                <a:latin typeface="Consolas" pitchFamily="34" charset="0"/>
+                <a:ea typeface="Consolas" pitchFamily="34" charset="-122"/>
+                <a:cs typeface="Consolas" pitchFamily="34" charset="-120"/>
+              </a:rPr>
+              <a:t>When I upload A_2026-05-27.csv I see "A · 2026-05-27 · 115 turns loaded".</a:t>
+            </a:r>
+            <a:endParaRPr lang="en-US" sz="1050" dirty="0"/>
+          </a:p>
+          <a:p>
+            <a:pPr marL="0" indent="0">
+              <a:spcAft>
+                <a:spcPts val="200"/>
+              </a:spcAft>
+              <a:buNone/>
+            </a:pPr>
+            <a:r>
+              <a:rPr lang="en-US" sz="1050" dirty="0">
+                <a:solidFill>
+                  <a:srgbClr val="1E1E1E"/>
+                </a:solidFill>
+                <a:latin typeface="Consolas" pitchFamily="34" charset="0"/>
+                <a:ea typeface="Consolas" pitchFamily="34" charset="-122"/>
+                <a:cs typeface="Consolas" pitchFamily="34" charset="-120"/>
+              </a:rPr>
+              <a:t>Uploading a second file replaces the first, no ghost data left over.</a:t>
+            </a:r>
+            <a:endParaRPr lang="en-US" sz="1050" dirty="0"/>
+          </a:p>
+        </p:txBody>
+      </p:sp>
+      <p:sp>
+        <p:nvSpPr>
+          <p:cNvPr id="10" name="Shape 4">
+            <a:extLst>
+              <a:ext uri="{FF2B5EF4-FFF2-40B4-BE49-F238E27FC236}">
+                <a16:creationId xmlns:a16="http://schemas.microsoft.com/office/drawing/2014/main" id="{8B74FA05-CE38-FE0E-DCCF-54F3A028E68A}"/>
+              </a:ext>
+            </a:extLst>
+          </p:cNvPr>
+          <p:cNvSpPr/>
+          <p:nvPr/>
+        </p:nvSpPr>
+        <p:spPr>
+          <a:xfrm>
+            <a:off x="457200" y="1544725"/>
             <a:ext cx="2194560" cy="365760"/>
           </a:xfrm>
           <a:prstGeom prst="rect">
@@ -17411,13 +17399,19 @@
       </p:sp>
       <p:sp>
         <p:nvSpPr>
-          <p:cNvPr id="7" name="Text 5"/>
-          <p:cNvSpPr/>
-          <p:nvPr/>
-        </p:nvSpPr>
-        <p:spPr>
-          <a:xfrm>
-            <a:off x="457200" y="1965960"/>
+          <p:cNvPr id="11" name="Text 5">
+            <a:extLst>
+              <a:ext uri="{FF2B5EF4-FFF2-40B4-BE49-F238E27FC236}">
+                <a16:creationId xmlns:a16="http://schemas.microsoft.com/office/drawing/2014/main" id="{992418A9-EFBE-7AF7-8E9B-188C423C5E57}"/>
+              </a:ext>
+            </a:extLst>
+          </p:cNvPr>
+          <p:cNvSpPr/>
+          <p:nvPr/>
+        </p:nvSpPr>
+        <p:spPr>
+          <a:xfrm>
+            <a:off x="457200" y="1544724"/>
             <a:ext cx="2194560" cy="365760"/>
           </a:xfrm>
           <a:prstGeom prst="rect">
@@ -17430,11 +17424,11 @@
           <a:bodyPr wrap="square" lIns="0" tIns="0" rIns="0" bIns="0" rtlCol="0" anchor="ctr"/>
           <a:lstStyle/>
           <a:p>
-            <a:pPr algn="ctr" indent="0" marL="0">
-              <a:buNone/>
-            </a:pPr>
-            <a:r>
-              <a:rPr lang="en-US" sz="1000" b="1" spc="400" kern="0" dirty="0">
+            <a:pPr marL="0" indent="0" algn="ctr">
+              <a:buNone/>
+            </a:pPr>
+            <a:r>
+              <a:rPr lang="en-US" sz="1000" b="1" kern="0" spc="400" dirty="0">
                 <a:solidFill>
                   <a:srgbClr val="FFFFFF"/>
                 </a:solidFill>
@@ -17442,426 +17436,9 @@
                 <a:ea typeface="Arial" pitchFamily="34" charset="-122"/>
                 <a:cs typeface="Arial" pitchFamily="34" charset="-120"/>
               </a:rPr>
-              <a:t>SUGGESTED PROMPT</a:t>
+              <a:t>EXAMPLE PROMPT</a:t>
             </a:r>
             <a:endParaRPr lang="en-US" sz="1000" dirty="0"/>
-          </a:p>
-        </p:txBody>
-      </p:sp>
-      <p:sp>
-        <p:nvSpPr>
-          <p:cNvPr id="8" name="Text 6"/>
-          <p:cNvSpPr/>
-          <p:nvPr/>
-        </p:nvSpPr>
-        <p:spPr>
-          <a:xfrm>
-            <a:off x="731520" y="2468880"/>
-            <a:ext cx="10698480" cy="3611880"/>
-          </a:xfrm>
-          <a:prstGeom prst="rect">
-            <a:avLst/>
-          </a:prstGeom>
-          <a:noFill/>
-          <a:ln/>
-        </p:spPr>
-        <p:txBody>
-          <a:bodyPr wrap="square" lIns="0" tIns="0" rIns="0" bIns="0" rtlCol="0" anchor="ctr"/>
-          <a:lstStyle/>
-          <a:p>
-            <a:pPr indent="0" marL="0">
-              <a:spcAft>
-                <a:spcPts val="200"/>
-              </a:spcAft>
-              <a:buNone/>
-            </a:pPr>
-            <a:r>
-              <a:rPr lang="en-US" sz="1050" dirty="0">
-                <a:solidFill>
-                  <a:srgbClr val="1E1E1E"/>
-                </a:solidFill>
-                <a:latin typeface="Consolas" pitchFamily="34" charset="0"/>
-                <a:ea typeface="Consolas" pitchFamily="34" charset="-122"/>
-                <a:cs typeface="Consolas" pitchFamily="34" charset="-120"/>
-              </a:rPr>
-              <a:t>Build a transcript loader for our Vite vanilla JS SPA.</a:t>
-            </a:r>
-            <a:endParaRPr lang="en-US" sz="1050" dirty="0"/>
-          </a:p>
-          <a:p>
-            <a:pPr indent="0" marL="0">
-              <a:spcAft>
-                <a:spcPts val="200"/>
-              </a:spcAft>
-              <a:buNone/>
-            </a:pPr>
-            <a:endParaRPr lang="en-US" sz="1050" dirty="0"/>
-          </a:p>
-          <a:p>
-            <a:pPr indent="0" marL="0">
-              <a:spcAft>
-                <a:spcPts val="200"/>
-              </a:spcAft>
-              <a:buNone/>
-            </a:pPr>
-            <a:r>
-              <a:rPr lang="en-US" sz="1050" dirty="0">
-                <a:solidFill>
-                  <a:srgbClr val="1E1E1E"/>
-                </a:solidFill>
-                <a:latin typeface="Consolas" pitchFamily="34" charset="0"/>
-                <a:ea typeface="Consolas" pitchFamily="34" charset="-122"/>
-                <a:cs typeface="Consolas" pitchFamily="34" charset="-120"/>
-              </a:rPr>
-              <a:t>CONTEXT</a:t>
-            </a:r>
-            <a:endParaRPr lang="en-US" sz="1050" dirty="0"/>
-          </a:p>
-          <a:p>
-            <a:pPr indent="0" marL="0">
-              <a:spcAft>
-                <a:spcPts val="200"/>
-              </a:spcAft>
-              <a:buNone/>
-            </a:pPr>
-            <a:r>
-              <a:rPr lang="en-US" sz="1050" dirty="0">
-                <a:solidFill>
-                  <a:srgbClr val="1E1E1E"/>
-                </a:solidFill>
-                <a:latin typeface="Consolas" pitchFamily="34" charset="0"/>
-                <a:ea typeface="Consolas" pitchFamily="34" charset="-122"/>
-                <a:cs typeface="Consolas" pitchFamily="34" charset="-120"/>
-              </a:rPr>
-              <a:t>The app already runs (npm run dev). PapaParse is loaded. The transcript is a</a:t>
-            </a:r>
-            <a:endParaRPr lang="en-US" sz="1050" dirty="0"/>
-          </a:p>
-          <a:p>
-            <a:pPr indent="0" marL="0">
-              <a:spcAft>
-                <a:spcPts val="200"/>
-              </a:spcAft>
-              <a:buNone/>
-            </a:pPr>
-            <a:r>
-              <a:rPr lang="en-US" sz="1050" dirty="0">
-                <a:solidFill>
-                  <a:srgbClr val="1E1E1E"/>
-                </a:solidFill>
-                <a:latin typeface="Consolas" pitchFamily="34" charset="0"/>
-                <a:ea typeface="Consolas" pitchFamily="34" charset="-122"/>
-                <a:cs typeface="Consolas" pitchFamily="34" charset="-120"/>
-              </a:rPr>
-              <a:t>CSV with columns: symbol, report_date, speaker, title, msg, source_url. One</a:t>
-            </a:r>
-            <a:endParaRPr lang="en-US" sz="1050" dirty="0"/>
-          </a:p>
-          <a:p>
-            <a:pPr indent="0" marL="0">
-              <a:spcAft>
-                <a:spcPts val="200"/>
-              </a:spcAft>
-              <a:buNone/>
-            </a:pPr>
-            <a:r>
-              <a:rPr lang="en-US" sz="1050" dirty="0">
-                <a:solidFill>
-                  <a:srgbClr val="1E1E1E"/>
-                </a:solidFill>
-                <a:latin typeface="Consolas" pitchFamily="34" charset="0"/>
-                <a:ea typeface="Consolas" pitchFamily="34" charset="-122"/>
-                <a:cs typeface="Consolas" pitchFamily="34" charset="-120"/>
-              </a:rPr>
-              <a:t>row per speaker turn.</a:t>
-            </a:r>
-            <a:endParaRPr lang="en-US" sz="1050" dirty="0"/>
-          </a:p>
-          <a:p>
-            <a:pPr indent="0" marL="0">
-              <a:spcAft>
-                <a:spcPts val="200"/>
-              </a:spcAft>
-              <a:buNone/>
-            </a:pPr>
-            <a:endParaRPr lang="en-US" sz="1050" dirty="0"/>
-          </a:p>
-          <a:p>
-            <a:pPr indent="0" marL="0">
-              <a:spcAft>
-                <a:spcPts val="200"/>
-              </a:spcAft>
-              <a:buNone/>
-            </a:pPr>
-            <a:r>
-              <a:rPr lang="en-US" sz="1050" dirty="0">
-                <a:solidFill>
-                  <a:srgbClr val="1E1E1E"/>
-                </a:solidFill>
-                <a:latin typeface="Consolas" pitchFamily="34" charset="0"/>
-                <a:ea typeface="Consolas" pitchFamily="34" charset="-122"/>
-                <a:cs typeface="Consolas" pitchFamily="34" charset="-120"/>
-              </a:rPr>
-              <a:t>TASK</a:t>
-            </a:r>
-            <a:endParaRPr lang="en-US" sz="1050" dirty="0"/>
-          </a:p>
-          <a:p>
-            <a:pPr indent="0" marL="0">
-              <a:spcAft>
-                <a:spcPts val="200"/>
-              </a:spcAft>
-              <a:buNone/>
-            </a:pPr>
-            <a:r>
-              <a:rPr lang="en-US" sz="1050" dirty="0">
-                <a:solidFill>
-                  <a:srgbClr val="1E1E1E"/>
-                </a:solidFill>
-                <a:latin typeface="Consolas" pitchFamily="34" charset="0"/>
-                <a:ea typeface="Consolas" pitchFamily="34" charset="-122"/>
-                <a:cs typeface="Consolas" pitchFamily="34" charset="-120"/>
-              </a:rPr>
-              <a:t>Add a file input that accepts a single .csv. On selection, parse with</a:t>
-            </a:r>
-            <a:endParaRPr lang="en-US" sz="1050" dirty="0"/>
-          </a:p>
-          <a:p>
-            <a:pPr indent="0" marL="0">
-              <a:spcAft>
-                <a:spcPts val="200"/>
-              </a:spcAft>
-              <a:buNone/>
-            </a:pPr>
-            <a:r>
-              <a:rPr lang="en-US" sz="1050" dirty="0">
-                <a:solidFill>
-                  <a:srgbClr val="1E1E1E"/>
-                </a:solidFill>
-                <a:latin typeface="Consolas" pitchFamily="34" charset="0"/>
-                <a:ea typeface="Consolas" pitchFamily="34" charset="-122"/>
-                <a:cs typeface="Consolas" pitchFamily="34" charset="-120"/>
-              </a:rPr>
-              <a:t>PapaParse and store the rows in a top level `transcript` variable. Render a</a:t>
-            </a:r>
-            <a:endParaRPr lang="en-US" sz="1050" dirty="0"/>
-          </a:p>
-          <a:p>
-            <a:pPr indent="0" marL="0">
-              <a:spcAft>
-                <a:spcPts val="200"/>
-              </a:spcAft>
-              <a:buNone/>
-            </a:pPr>
-            <a:r>
-              <a:rPr lang="en-US" sz="1050" dirty="0">
-                <a:solidFill>
-                  <a:srgbClr val="1E1E1E"/>
-                </a:solidFill>
-                <a:latin typeface="Consolas" pitchFamily="34" charset="0"/>
-                <a:ea typeface="Consolas" pitchFamily="34" charset="-122"/>
-                <a:cs typeface="Consolas" pitchFamily="34" charset="-120"/>
-              </a:rPr>
-              <a:t>confirmation line on the page: "&lt;symbol&gt; · &lt;report_date&gt; · &lt;n&gt; turns</a:t>
-            </a:r>
-            <a:endParaRPr lang="en-US" sz="1050" dirty="0"/>
-          </a:p>
-          <a:p>
-            <a:pPr indent="0" marL="0">
-              <a:spcAft>
-                <a:spcPts val="200"/>
-              </a:spcAft>
-              <a:buNone/>
-            </a:pPr>
-            <a:r>
-              <a:rPr lang="en-US" sz="1050" dirty="0">
-                <a:solidFill>
-                  <a:srgbClr val="1E1E1E"/>
-                </a:solidFill>
-                <a:latin typeface="Consolas" pitchFamily="34" charset="0"/>
-                <a:ea typeface="Consolas" pitchFamily="34" charset="-122"/>
-                <a:cs typeface="Consolas" pitchFamily="34" charset="-120"/>
-              </a:rPr>
-              <a:t>loaded".</a:t>
-            </a:r>
-            <a:endParaRPr lang="en-US" sz="1050" dirty="0"/>
-          </a:p>
-          <a:p>
-            <a:pPr indent="0" marL="0">
-              <a:spcAft>
-                <a:spcPts val="200"/>
-              </a:spcAft>
-              <a:buNone/>
-            </a:pPr>
-            <a:endParaRPr lang="en-US" sz="1050" dirty="0"/>
-          </a:p>
-          <a:p>
-            <a:pPr indent="0" marL="0">
-              <a:spcAft>
-                <a:spcPts val="200"/>
-              </a:spcAft>
-              <a:buNone/>
-            </a:pPr>
-            <a:r>
-              <a:rPr lang="en-US" sz="1050" dirty="0">
-                <a:solidFill>
-                  <a:srgbClr val="1E1E1E"/>
-                </a:solidFill>
-                <a:latin typeface="Consolas" pitchFamily="34" charset="0"/>
-                <a:ea typeface="Consolas" pitchFamily="34" charset="-122"/>
-                <a:cs typeface="Consolas" pitchFamily="34" charset="-120"/>
-              </a:rPr>
-              <a:t>CONSTRAINT</a:t>
-            </a:r>
-            <a:endParaRPr lang="en-US" sz="1050" dirty="0"/>
-          </a:p>
-          <a:p>
-            <a:pPr indent="0" marL="0">
-              <a:spcAft>
-                <a:spcPts val="200"/>
-              </a:spcAft>
-              <a:buNone/>
-            </a:pPr>
-            <a:r>
-              <a:rPr lang="en-US" sz="1050" dirty="0">
-                <a:solidFill>
-                  <a:srgbClr val="1E1E1E"/>
-                </a:solidFill>
-                <a:latin typeface="Consolas" pitchFamily="34" charset="0"/>
-                <a:ea typeface="Consolas" pitchFamily="34" charset="-122"/>
-                <a:cs typeface="Consolas" pitchFamily="34" charset="-120"/>
-              </a:rPr>
-              <a:t>Do not fetch anything. The user provides the file. If the CSV is missing a</a:t>
-            </a:r>
-            <a:endParaRPr lang="en-US" sz="1050" dirty="0"/>
-          </a:p>
-          <a:p>
-            <a:pPr indent="0" marL="0">
-              <a:spcAft>
-                <a:spcPts val="200"/>
-              </a:spcAft>
-              <a:buNone/>
-            </a:pPr>
-            <a:r>
-              <a:rPr lang="en-US" sz="1050" dirty="0">
-                <a:solidFill>
-                  <a:srgbClr val="1E1E1E"/>
-                </a:solidFill>
-                <a:latin typeface="Consolas" pitchFamily="34" charset="0"/>
-                <a:ea typeface="Consolas" pitchFamily="34" charset="-122"/>
-                <a:cs typeface="Consolas" pitchFamily="34" charset="-120"/>
-              </a:rPr>
-              <a:t>required column, show the missing name on screen and stop cleanly.</a:t>
-            </a:r>
-            <a:endParaRPr lang="en-US" sz="1050" dirty="0"/>
-          </a:p>
-          <a:p>
-            <a:pPr indent="0" marL="0">
-              <a:spcAft>
-                <a:spcPts val="200"/>
-              </a:spcAft>
-              <a:buNone/>
-            </a:pPr>
-            <a:endParaRPr lang="en-US" sz="1050" dirty="0"/>
-          </a:p>
-          <a:p>
-            <a:pPr indent="0" marL="0">
-              <a:spcAft>
-                <a:spcPts val="200"/>
-              </a:spcAft>
-              <a:buNone/>
-            </a:pPr>
-            <a:r>
-              <a:rPr lang="en-US" sz="1050" dirty="0">
-                <a:solidFill>
-                  <a:srgbClr val="1E1E1E"/>
-                </a:solidFill>
-                <a:latin typeface="Consolas" pitchFamily="34" charset="0"/>
-                <a:ea typeface="Consolas" pitchFamily="34" charset="-122"/>
-                <a:cs typeface="Consolas" pitchFamily="34" charset="-120"/>
-              </a:rPr>
-              <a:t>ACCEPTANCE</a:t>
-            </a:r>
-            <a:endParaRPr lang="en-US" sz="1050" dirty="0"/>
-          </a:p>
-          <a:p>
-            <a:pPr indent="0" marL="0">
-              <a:spcAft>
-                <a:spcPts val="200"/>
-              </a:spcAft>
-              <a:buNone/>
-            </a:pPr>
-            <a:r>
-              <a:rPr lang="en-US" sz="1050" dirty="0">
-                <a:solidFill>
-                  <a:srgbClr val="1E1E1E"/>
-                </a:solidFill>
-                <a:latin typeface="Consolas" pitchFamily="34" charset="0"/>
-                <a:ea typeface="Consolas" pitchFamily="34" charset="-122"/>
-                <a:cs typeface="Consolas" pitchFamily="34" charset="-120"/>
-              </a:rPr>
-              <a:t>When I upload A_2026-05-27.csv I see "A · 2026-05-27 · 115 turns loaded".</a:t>
-            </a:r>
-            <a:endParaRPr lang="en-US" sz="1050" dirty="0"/>
-          </a:p>
-          <a:p>
-            <a:pPr indent="0" marL="0">
-              <a:spcAft>
-                <a:spcPts val="200"/>
-              </a:spcAft>
-              <a:buNone/>
-            </a:pPr>
-            <a:r>
-              <a:rPr lang="en-US" sz="1050" dirty="0">
-                <a:solidFill>
-                  <a:srgbClr val="1E1E1E"/>
-                </a:solidFill>
-                <a:latin typeface="Consolas" pitchFamily="34" charset="0"/>
-                <a:ea typeface="Consolas" pitchFamily="34" charset="-122"/>
-                <a:cs typeface="Consolas" pitchFamily="34" charset="-120"/>
-              </a:rPr>
-              <a:t>Uploading a second file replaces the first, no ghost data left over.</a:t>
-            </a:r>
-            <a:endParaRPr lang="en-US" sz="1050" dirty="0"/>
-          </a:p>
-        </p:txBody>
-      </p:sp>
-      <p:sp>
-        <p:nvSpPr>
-          <p:cNvPr id="9" name="Text 7"/>
-          <p:cNvSpPr/>
-          <p:nvPr/>
-        </p:nvSpPr>
-        <p:spPr>
-          <a:xfrm>
-            <a:off x="457200" y="6263640"/>
-            <a:ext cx="11247120" cy="320040"/>
-          </a:xfrm>
-          <a:prstGeom prst="rect">
-            <a:avLst/>
-          </a:prstGeom>
-          <a:noFill/>
-          <a:ln/>
-        </p:spPr>
-        <p:txBody>
-          <a:bodyPr wrap="square" lIns="0" tIns="0" rIns="0" bIns="0" rtlCol="0" anchor="ctr"/>
-          <a:lstStyle/>
-          <a:p>
-            <a:pPr algn="ctr" indent="0" marL="0">
-              <a:buNone/>
-            </a:pPr>
-            <a:r>
-              <a:rPr lang="en-US" sz="1200" i="1" dirty="0">
-                <a:solidFill>
-                  <a:srgbClr val="8996A0"/>
-                </a:solidFill>
-                <a:latin typeface="Arial" pitchFamily="34" charset="0"/>
-                <a:ea typeface="Arial" pitchFamily="34" charset="-122"/>
-                <a:cs typeface="Arial" pitchFamily="34" charset="-120"/>
-              </a:rPr>
-              <a:t>Copy the block above into your tool of choice. Read the reply before accepting it.</a:t>
-            </a:r>
-            <a:endParaRPr lang="en-US" sz="1200" dirty="0"/>
           </a:p>
         </p:txBody>
       </p:sp>
@@ -18166,4 +17743,299 @@
     </a:ext>
   </a:extLst>
 </a:theme>
+</file>
+
+<file path=ppt/theme/theme2.xml><?xml version="1.0" encoding="utf-8"?>
+<a:theme xmlns:a="http://schemas.openxmlformats.org/drawingml/2006/main" name="Office Theme">
+  <a:themeElements>
+    <a:clrScheme name="Office">
+      <a:dk1>
+        <a:sysClr val="windowText" lastClr="000000"/>
+      </a:dk1>
+      <a:lt1>
+        <a:sysClr val="window" lastClr="FFFFFF"/>
+      </a:lt1>
+      <a:dk2>
+        <a:srgbClr val="44546A"/>
+      </a:dk2>
+      <a:lt2>
+        <a:srgbClr val="E7E6E6"/>
+      </a:lt2>
+      <a:accent1>
+        <a:srgbClr val="4472C4"/>
+      </a:accent1>
+      <a:accent2>
+        <a:srgbClr val="ED7D31"/>
+      </a:accent2>
+      <a:accent3>
+        <a:srgbClr val="A5A5A5"/>
+      </a:accent3>
+      <a:accent4>
+        <a:srgbClr val="FFC000"/>
+      </a:accent4>
+      <a:accent5>
+        <a:srgbClr val="5B9BD5"/>
+      </a:accent5>
+      <a:accent6>
+        <a:srgbClr val="70AD47"/>
+      </a:accent6>
+      <a:hlink>
+        <a:srgbClr val="0563C1"/>
+      </a:hlink>
+      <a:folHlink>
+        <a:srgbClr val="954F72"/>
+      </a:folHlink>
+    </a:clrScheme>
+    <a:fontScheme name="Office">
+      <a:majorFont>
+        <a:latin typeface="Calibri Light" panose="020F0302020204030204"/>
+        <a:ea typeface=""/>
+        <a:cs typeface=""/>
+        <a:font script="Jpan" typeface="游ゴシック Light"/>
+        <a:font script="Hang" typeface="맑은 고딕"/>
+        <a:font script="Hans" typeface="等线 Light"/>
+        <a:font script="Hant" typeface="新細明體"/>
+        <a:font script="Arab" typeface="Times New Roman"/>
+        <a:font script="Hebr" typeface="Times New Roman"/>
+        <a:font script="Thai" typeface="Angsana New"/>
+        <a:font script="Ethi" typeface="Nyala"/>
+        <a:font script="Beng" typeface="Vrinda"/>
+        <a:font script="Gujr" typeface="Shruti"/>
+        <a:font script="Khmr" typeface="MoolBoran"/>
+        <a:font script="Knda" typeface="Tunga"/>
+        <a:font script="Guru" typeface="Raavi"/>
+        <a:font script="Cans" typeface="Euphemia"/>
+        <a:font script="Cher" typeface="Plantagenet Cherokee"/>
+        <a:font script="Yiii" typeface="Microsoft Yi Baiti"/>
+        <a:font script="Tibt" typeface="Microsoft Himalaya"/>
+        <a:font script="Thaa" typeface="MV Boli"/>
+        <a:font script="Deva" typeface="Mangal"/>
+        <a:font script="Telu" typeface="Gautami"/>
+        <a:font script="Taml" typeface="Latha"/>
+        <a:font script="Syrc" typeface="Estrangelo Edessa"/>
+        <a:font script="Orya" typeface="Kalinga"/>
+        <a:font script="Mlym" typeface="Kartika"/>
+        <a:font script="Laoo" typeface="DokChampa"/>
+        <a:font script="Sinh" typeface="Iskoola Pota"/>
+        <a:font script="Mong" typeface="Mongolian Baiti"/>
+        <a:font script="Viet" typeface="Times New Roman"/>
+        <a:font script="Uigh" typeface="Microsoft Uighur"/>
+        <a:font script="Geor" typeface="Sylfaen"/>
+        <a:font script="Armn" typeface="Arial"/>
+        <a:font script="Bugi" typeface="Leelawadee UI"/>
+        <a:font script="Bopo" typeface="Microsoft JhengHei"/>
+        <a:font script="Java" typeface="Javanese Text"/>
+        <a:font script="Lisu" typeface="Segoe UI"/>
+        <a:font script="Mymr" typeface="Myanmar Text"/>
+        <a:font script="Nkoo" typeface="Ebrima"/>
+        <a:font script="Olck" typeface="Nirmala UI"/>
+        <a:font script="Osma" typeface="Ebrima"/>
+        <a:font script="Phag" typeface="Phagspa"/>
+        <a:font script="Syrn" typeface="Estrangelo Edessa"/>
+        <a:font script="Syrj" typeface="Estrangelo Edessa"/>
+        <a:font script="Syre" typeface="Estrangelo Edessa"/>
+        <a:font script="Sora" typeface="Nirmala UI"/>
+        <a:font script="Tale" typeface="Microsoft Tai Le"/>
+        <a:font script="Talu" typeface="Microsoft New Tai Lue"/>
+        <a:font script="Tfng" typeface="Ebrima"/>
+      </a:majorFont>
+      <a:minorFont>
+        <a:latin typeface="Calibri" panose="020F0502020204030204"/>
+        <a:ea typeface=""/>
+        <a:cs typeface=""/>
+        <a:font script="Jpan" typeface="游ゴシック"/>
+        <a:font script="Hang" typeface="맑은 고딕"/>
+        <a:font script="Hans" typeface="等线"/>
+        <a:font script="Hant" typeface="新細明體"/>
+        <a:font script="Arab" typeface="Arial"/>
+        <a:font script="Hebr" typeface="Arial"/>
+        <a:font script="Thai" typeface="Cordia New"/>
+        <a:font script="Ethi" typeface="Nyala"/>
+        <a:font script="Beng" typeface="Vrinda"/>
+        <a:font script="Gujr" typeface="Shruti"/>
+        <a:font script="Khmr" typeface="DaunPenh"/>
+        <a:font script="Knda" typeface="Tunga"/>
+        <a:font script="Guru" typeface="Raavi"/>
+        <a:font script="Cans" typeface="Euphemia"/>
+        <a:font script="Cher" typeface="Plantagenet Cherokee"/>
+        <a:font script="Yiii" typeface="Microsoft Yi Baiti"/>
+        <a:font script="Tibt" typeface="Microsoft Himalaya"/>
+        <a:font script="Thaa" typeface="MV Boli"/>
+        <a:font script="Deva" typeface="Mangal"/>
+        <a:font script="Telu" typeface="Gautami"/>
+        <a:font script="Taml" typeface="Latha"/>
+        <a:font script="Syrc" typeface="Estrangelo Edessa"/>
+        <a:font script="Orya" typeface="Kalinga"/>
+        <a:font script="Mlym" typeface="Kartika"/>
+        <a:font script="Laoo" typeface="DokChampa"/>
+        <a:font script="Sinh" typeface="Iskoola Pota"/>
+        <a:font script="Mong" typeface="Mongolian Baiti"/>
+        <a:font script="Viet" typeface="Arial"/>
+        <a:font script="Uigh" typeface="Microsoft Uighur"/>
+        <a:font script="Geor" typeface="Sylfaen"/>
+        <a:font script="Armn" typeface="Arial"/>
+        <a:font script="Bugi" typeface="Leelawadee UI"/>
+        <a:font script="Bopo" typeface="Microsoft JhengHei"/>
+        <a:font script="Java" typeface="Javanese Text"/>
+        <a:font script="Lisu" typeface="Segoe UI"/>
+        <a:font script="Mymr" typeface="Myanmar Text"/>
+        <a:font script="Nkoo" typeface="Ebrima"/>
+        <a:font script="Olck" typeface="Nirmala UI"/>
+        <a:font script="Osma" typeface="Ebrima"/>
+        <a:font script="Phag" typeface="Phagspa"/>
+        <a:font script="Syrn" typeface="Estrangelo Edessa"/>
+        <a:font script="Syrj" typeface="Estrangelo Edessa"/>
+        <a:font script="Syre" typeface="Estrangelo Edessa"/>
+        <a:font script="Sora" typeface="Nirmala UI"/>
+        <a:font script="Tale" typeface="Microsoft Tai Le"/>
+        <a:font script="Talu" typeface="Microsoft New Tai Lue"/>
+        <a:font script="Tfng" typeface="Ebrima"/>
+      </a:minorFont>
+    </a:fontScheme>
+    <a:fmtScheme name="Office">
+      <a:fillStyleLst>
+        <a:solidFill>
+          <a:schemeClr val="phClr"/>
+        </a:solidFill>
+        <a:gradFill rotWithShape="1">
+          <a:gsLst>
+            <a:gs pos="0">
+              <a:schemeClr val="phClr">
+                <a:lumMod val="110000"/>
+                <a:satMod val="105000"/>
+                <a:tint val="67000"/>
+              </a:schemeClr>
+            </a:gs>
+            <a:gs pos="50000">
+              <a:schemeClr val="phClr">
+                <a:lumMod val="105000"/>
+                <a:satMod val="103000"/>
+                <a:tint val="73000"/>
+              </a:schemeClr>
+            </a:gs>
+            <a:gs pos="100000">
+              <a:schemeClr val="phClr">
+                <a:lumMod val="105000"/>
+                <a:satMod val="109000"/>
+                <a:tint val="81000"/>
+              </a:schemeClr>
+            </a:gs>
+          </a:gsLst>
+          <a:lin ang="5400000" scaled="0"/>
+        </a:gradFill>
+        <a:gradFill rotWithShape="1">
+          <a:gsLst>
+            <a:gs pos="0">
+              <a:schemeClr val="phClr">
+                <a:satMod val="103000"/>
+                <a:lumMod val="102000"/>
+                <a:tint val="94000"/>
+              </a:schemeClr>
+            </a:gs>
+            <a:gs pos="50000">
+              <a:schemeClr val="phClr">
+                <a:satMod val="110000"/>
+                <a:lumMod val="100000"/>
+                <a:shade val="100000"/>
+              </a:schemeClr>
+            </a:gs>
+            <a:gs pos="100000">
+              <a:schemeClr val="phClr">
+                <a:lumMod val="99000"/>
+                <a:satMod val="120000"/>
+                <a:shade val="78000"/>
+              </a:schemeClr>
+            </a:gs>
+          </a:gsLst>
+          <a:lin ang="5400000" scaled="0"/>
+        </a:gradFill>
+      </a:fillStyleLst>
+      <a:lnStyleLst>
+        <a:ln w="6350" cap="flat" cmpd="sng" algn="ctr">
+          <a:solidFill>
+            <a:schemeClr val="phClr"/>
+          </a:solidFill>
+          <a:prstDash val="solid"/>
+          <a:miter lim="800000"/>
+        </a:ln>
+        <a:ln w="12700" cap="flat" cmpd="sng" algn="ctr">
+          <a:solidFill>
+            <a:schemeClr val="phClr"/>
+          </a:solidFill>
+          <a:prstDash val="solid"/>
+          <a:miter lim="800000"/>
+        </a:ln>
+        <a:ln w="19050" cap="flat" cmpd="sng" algn="ctr">
+          <a:solidFill>
+            <a:schemeClr val="phClr"/>
+          </a:solidFill>
+          <a:prstDash val="solid"/>
+          <a:miter lim="800000"/>
+        </a:ln>
+      </a:lnStyleLst>
+      <a:effectStyleLst>
+        <a:effectStyle>
+          <a:effectLst/>
+        </a:effectStyle>
+        <a:effectStyle>
+          <a:effectLst/>
+        </a:effectStyle>
+        <a:effectStyle>
+          <a:effectLst>
+            <a:outerShdw blurRad="57150" dist="19050" dir="5400000" algn="ctr" rotWithShape="0">
+              <a:srgbClr val="000000">
+                <a:alpha val="63000"/>
+              </a:srgbClr>
+            </a:outerShdw>
+          </a:effectLst>
+        </a:effectStyle>
+      </a:effectStyleLst>
+      <a:bgFillStyleLst>
+        <a:solidFill>
+          <a:schemeClr val="phClr"/>
+        </a:solidFill>
+        <a:solidFill>
+          <a:schemeClr val="phClr">
+            <a:tint val="95000"/>
+            <a:satMod val="170000"/>
+          </a:schemeClr>
+        </a:solidFill>
+        <a:gradFill rotWithShape="1">
+          <a:gsLst>
+            <a:gs pos="0">
+              <a:schemeClr val="phClr">
+                <a:tint val="93000"/>
+                <a:satMod val="150000"/>
+                <a:shade val="98000"/>
+                <a:lumMod val="102000"/>
+              </a:schemeClr>
+            </a:gs>
+            <a:gs pos="50000">
+              <a:schemeClr val="phClr">
+                <a:tint val="98000"/>
+                <a:satMod val="130000"/>
+                <a:shade val="90000"/>
+                <a:lumMod val="103000"/>
+              </a:schemeClr>
+            </a:gs>
+            <a:gs pos="100000">
+              <a:schemeClr val="phClr">
+                <a:shade val="63000"/>
+                <a:satMod val="120000"/>
+              </a:schemeClr>
+            </a:gs>
+          </a:gsLst>
+          <a:lin ang="5400000" scaled="0"/>
+        </a:gradFill>
+      </a:bgFillStyleLst>
+    </a:fmtScheme>
+  </a:themeElements>
+  <a:objectDefaults/>
+  <a:extraClrSchemeLst/>
+  <a:extLst>
+    <a:ext uri="{05A4C25C-085E-4340-85A3-A5531E510DB2}">
+      <thm15:themeFamily xmlns:thm15="http://schemas.microsoft.com/office/thememl/2012/main" name="Office Theme" id="{62F939B6-93AF-4DB8-9C6B-D6C7DFDC589F}" vid="{4A3C46E8-61CC-4603-A589-7422A47A8E4A}"/>
+    </a:ext>
+  </a:extLst>
+</a:theme>
 </file>